--- a/output/wordlabs-slow-3day.pptx
+++ b/output/wordlabs-slow-3day.pptx
@@ -4240,7 +4240,7 @@
                 <a:ea typeface="Calibri" pitchFamily="34" charset="-122"/>
                 <a:cs typeface="Calibri" pitchFamily="34" charset="-120"/>
               </a:rPr>
-              <a:t>"not fast, taking time"</a:t>
+              <a:t>"not fast, moving carefully"</a:t>
             </a:r>
             <a:endParaRPr lang="en-US" sz="2200" dirty="0"/>
           </a:p>
@@ -5288,7 +5288,7 @@
                 <a:ea typeface="Calibri" pitchFamily="34" charset="-122"/>
                 <a:cs typeface="Calibri" pitchFamily="34" charset="-120"/>
               </a:rPr>
-              <a:t>Word Labs  •  wordlabs.app  •  Root: 'slow' = not fast, taking time</a:t>
+              <a:t>Word Labs  •  wordlabs.app  •  Root: 'slow' = not fast, moving carefully</a:t>
             </a:r>
             <a:endParaRPr lang="en-US" sz="800" dirty="0"/>
           </a:p>
@@ -5928,7 +5928,7 @@
                 <a:ea typeface="Calibri" pitchFamily="34" charset="-122"/>
                 <a:cs typeface="Calibri" pitchFamily="34" charset="-120"/>
               </a:rPr>
-              <a:t>Word Labs  •  wordlabs.app  •  Root: 'slow' = not fast, taking time</a:t>
+              <a:t>Word Labs  •  wordlabs.app  •  Root: 'slow' = not fast, moving carefully</a:t>
             </a:r>
             <a:endParaRPr lang="en-US" sz="800" dirty="0"/>
           </a:p>
@@ -6040,7 +6040,7 @@
                 <a:ea typeface="Calibri" pitchFamily="34" charset="-122"/>
                 <a:cs typeface="Calibri" pitchFamily="34" charset="-120"/>
               </a:rPr>
-              <a:t>The runner was </a:t>
+              <a:t>The </a:t>
             </a:r>
             <a:pPr algn="l" indent="0" marL="0">
               <a:buNone/>
@@ -6057,7 +6057,7 @@
                 <a:ea typeface="Calibri" pitchFamily="34" charset="-122"/>
                 <a:cs typeface="Calibri" pitchFamily="34" charset="-120"/>
               </a:rPr>
-              <a:t>slowing</a:t>
+              <a:t>slowness</a:t>
             </a:r>
             <a:pPr algn="l" indent="0" marL="0">
               <a:buNone/>
@@ -6071,7 +6071,7 @@
                 <a:ea typeface="Calibri" pitchFamily="34" charset="-122"/>
                 <a:cs typeface="Calibri" pitchFamily="34" charset="-120"/>
               </a:rPr>
-              <a:t> down near the finish line, moving more </a:t>
+              <a:t> of the old computer was frustrating, so she carefully and </a:t>
             </a:r>
             <a:pPr algn="l" indent="0" marL="0">
               <a:buNone/>
@@ -6102,7 +6102,7 @@
                 <a:ea typeface="Calibri" pitchFamily="34" charset="-122"/>
                 <a:cs typeface="Calibri" pitchFamily="34" charset="-120"/>
               </a:rPr>
-              <a:t> than before.</a:t>
+              <a:t> saved her work.</a:t>
             </a:r>
             <a:endParaRPr lang="en-US" sz="1800" dirty="0"/>
           </a:p>
@@ -6257,7 +6257,7 @@
                 <a:ea typeface="Trebuchet MS" pitchFamily="34" charset="-122"/>
                 <a:cs typeface="Trebuchet MS" pitchFamily="34" charset="-120"/>
               </a:rPr>
-              <a:t>slowing</a:t>
+              <a:t>slowness</a:t>
             </a:r>
             <a:endParaRPr lang="en-US" sz="1400" dirty="0"/>
           </a:p>
@@ -6716,7 +6716,7 @@
                 <a:ea typeface="Calibri" pitchFamily="34" charset="-122"/>
                 <a:cs typeface="Calibri" pitchFamily="34" charset="-120"/>
               </a:rPr>
-              <a:t>Word Labs  •  wordlabs.app  •  Root: 'slow' = not fast, taking time</a:t>
+              <a:t>Word Labs  •  wordlabs.app  •  Root: 'slow' = not fast, moving carefully</a:t>
             </a:r>
             <a:endParaRPr lang="en-US" sz="800" dirty="0"/>
           </a:p>
@@ -6855,7 +6855,7 @@
                 <a:ea typeface="Trebuchet MS" pitchFamily="34" charset="-122"/>
                 <a:cs typeface="Trebuchet MS" pitchFamily="34" charset="-120"/>
               </a:rPr>
-              <a:t>slowing</a:t>
+              <a:t>slowness</a:t>
             </a:r>
             <a:endParaRPr lang="en-US" sz="2800" dirty="0"/>
           </a:p>
@@ -7543,7 +7543,7 @@
                 <a:ea typeface="Calibri" pitchFamily="34" charset="-122"/>
                 <a:cs typeface="Calibri" pitchFamily="34" charset="-120"/>
               </a:rPr>
-              <a:t>Word Labs  •  wordlabs.app  •  Root: 'slow' = not fast, taking time</a:t>
+              <a:t>Word Labs  •  wordlabs.app  •  Root: 'slow' = not fast, moving carefully</a:t>
             </a:r>
             <a:endParaRPr lang="en-US" sz="800" dirty="0"/>
           </a:p>
@@ -7682,7 +7682,7 @@
                 <a:ea typeface="Trebuchet MS" pitchFamily="34" charset="-122"/>
                 <a:cs typeface="Trebuchet MS" pitchFamily="34" charset="-120"/>
               </a:rPr>
-              <a:t>slowing</a:t>
+              <a:t>slowness</a:t>
             </a:r>
             <a:endParaRPr lang="en-US" sz="2800" dirty="0"/>
           </a:p>
@@ -7933,7 +7933,7 @@
                 <a:ea typeface="Trebuchet MS" pitchFamily="34" charset="-122"/>
                 <a:cs typeface="Trebuchet MS" pitchFamily="34" charset="-120"/>
               </a:rPr>
-              <a:t>ing</a:t>
+              <a:t>ness</a:t>
             </a:r>
             <a:endParaRPr lang="en-US" sz="1300" dirty="0"/>
           </a:p>
@@ -7972,7 +7972,7 @@
                 <a:ea typeface="Calibri" pitchFamily="34" charset="-122"/>
                 <a:cs typeface="Calibri" pitchFamily="34" charset="-120"/>
               </a:rPr>
-              <a:t>ongoing action</a:t>
+              <a:t>quality or state of</a:t>
             </a:r>
             <a:endParaRPr lang="en-US" sz="850" dirty="0"/>
           </a:p>
@@ -8528,7 +8528,7 @@
                 <a:ea typeface="Calibri" pitchFamily="34" charset="-122"/>
                 <a:cs typeface="Calibri" pitchFamily="34" charset="-120"/>
               </a:rPr>
-              <a:t>Word Labs  •  wordlabs.app  •  Root: 'slow' = not fast, taking time</a:t>
+              <a:t>Word Labs  •  wordlabs.app  •  Root: 'slow' = not fast, moving carefully</a:t>
             </a:r>
             <a:endParaRPr lang="en-US" sz="800" dirty="0"/>
           </a:p>
@@ -8667,7 +8667,7 @@
                 <a:ea typeface="Trebuchet MS" pitchFamily="34" charset="-122"/>
                 <a:cs typeface="Trebuchet MS" pitchFamily="34" charset="-120"/>
               </a:rPr>
-              <a:t>slowing</a:t>
+              <a:t>slowness</a:t>
             </a:r>
             <a:endParaRPr lang="en-US" sz="2800" dirty="0"/>
           </a:p>
@@ -8918,7 +8918,7 @@
                 <a:ea typeface="Trebuchet MS" pitchFamily="34" charset="-122"/>
                 <a:cs typeface="Trebuchet MS" pitchFamily="34" charset="-120"/>
               </a:rPr>
-              <a:t>ing</a:t>
+              <a:t>ness</a:t>
             </a:r>
             <a:endParaRPr lang="en-US" sz="1300" dirty="0"/>
           </a:p>
@@ -8957,7 +8957,7 @@
                 <a:ea typeface="Calibri" pitchFamily="34" charset="-122"/>
                 <a:cs typeface="Calibri" pitchFamily="34" charset="-120"/>
               </a:rPr>
-              <a:t>ongoing action</a:t>
+              <a:t>quality or state of</a:t>
             </a:r>
             <a:endParaRPr lang="en-US" sz="850" dirty="0"/>
           </a:p>
@@ -9221,7 +9221,7 @@
                 <a:ea typeface="Trebuchet MS" pitchFamily="34" charset="-122"/>
                 <a:cs typeface="Trebuchet MS" pitchFamily="34" charset="-120"/>
               </a:rPr>
-              <a:t>ing</a:t>
+              <a:t>ness</a:t>
             </a:r>
             <a:endParaRPr lang="en-US" sz="1400" dirty="0"/>
           </a:p>
@@ -9645,7 +9645,7 @@
                 <a:ea typeface="Calibri" pitchFamily="34" charset="-122"/>
                 <a:cs typeface="Calibri" pitchFamily="34" charset="-120"/>
               </a:rPr>
-              <a:t>Word Labs  •  wordlabs.app  •  Root: 'slow' = not fast, taking time</a:t>
+              <a:t>Word Labs  •  wordlabs.app  •  Root: 'slow' = not fast, moving carefully</a:t>
             </a:r>
             <a:endParaRPr lang="en-US" sz="800" dirty="0"/>
           </a:p>
@@ -9784,7 +9784,7 @@
                 <a:ea typeface="Trebuchet MS" pitchFamily="34" charset="-122"/>
                 <a:cs typeface="Trebuchet MS" pitchFamily="34" charset="-120"/>
               </a:rPr>
-              <a:t>slowing</a:t>
+              <a:t>slowness</a:t>
             </a:r>
             <a:endParaRPr lang="en-US" sz="2800" dirty="0"/>
           </a:p>
@@ -10035,7 +10035,7 @@
                 <a:ea typeface="Trebuchet MS" pitchFamily="34" charset="-122"/>
                 <a:cs typeface="Trebuchet MS" pitchFamily="34" charset="-120"/>
               </a:rPr>
-              <a:t>ing</a:t>
+              <a:t>ness</a:t>
             </a:r>
             <a:endParaRPr lang="en-US" sz="1300" dirty="0"/>
           </a:p>
@@ -10074,7 +10074,7 @@
                 <a:ea typeface="Calibri" pitchFamily="34" charset="-122"/>
                 <a:cs typeface="Calibri" pitchFamily="34" charset="-120"/>
               </a:rPr>
-              <a:t>ongoing action</a:t>
+              <a:t>quality or state of</a:t>
             </a:r>
             <a:endParaRPr lang="en-US" sz="850" dirty="0"/>
           </a:p>
@@ -10338,7 +10338,7 @@
                 <a:ea typeface="Trebuchet MS" pitchFamily="34" charset="-122"/>
                 <a:cs typeface="Trebuchet MS" pitchFamily="34" charset="-120"/>
               </a:rPr>
-              <a:t>ing</a:t>
+              <a:t>ness</a:t>
             </a:r>
             <a:endParaRPr lang="en-US" sz="1400" dirty="0"/>
           </a:p>
@@ -10445,7 +10445,7 @@
         </p:nvSpPr>
         <p:spPr>
           <a:xfrm>
-            <a:off x="2670048" y="4169664"/>
+            <a:off x="2427732" y="4169664"/>
             <a:ext cx="685800" cy="475488"/>
           </a:xfrm>
           <a:prstGeom prst="rect">
@@ -10472,7 +10472,7 @@
         </p:nvSpPr>
         <p:spPr>
           <a:xfrm>
-            <a:off x="2670048" y="4169664"/>
+            <a:off x="2427732" y="4169664"/>
             <a:ext cx="685800" cy="475488"/>
           </a:xfrm>
           <a:prstGeom prst="rect">
@@ -10511,7 +10511,7 @@
         </p:nvSpPr>
         <p:spPr>
           <a:xfrm>
-            <a:off x="4123944" y="4169664"/>
+            <a:off x="3639312" y="4169664"/>
             <a:ext cx="685800" cy="475488"/>
           </a:xfrm>
           <a:prstGeom prst="rect">
@@ -10538,7 +10538,7 @@
         </p:nvSpPr>
         <p:spPr>
           <a:xfrm>
-            <a:off x="4123944" y="4169664"/>
+            <a:off x="3639312" y="4169664"/>
             <a:ext cx="685800" cy="475488"/>
           </a:xfrm>
           <a:prstGeom prst="rect">
@@ -10577,7 +10577,7 @@
         </p:nvSpPr>
         <p:spPr>
           <a:xfrm>
-            <a:off x="5577840" y="4169664"/>
+            <a:off x="4850892" y="4169664"/>
             <a:ext cx="685800" cy="475488"/>
           </a:xfrm>
           <a:prstGeom prst="rect">
@@ -10604,7 +10604,7 @@
         </p:nvSpPr>
         <p:spPr>
           <a:xfrm>
-            <a:off x="5577840" y="4169664"/>
+            <a:off x="4850892" y="4169664"/>
             <a:ext cx="685800" cy="475488"/>
           </a:xfrm>
           <a:prstGeom prst="rect">
@@ -10629,7 +10629,7 @@
                 <a:ea typeface="Trebuchet MS" pitchFamily="34" charset="-122"/>
                 <a:cs typeface="Trebuchet MS" pitchFamily="34" charset="-120"/>
               </a:rPr>
-              <a:t>i</a:t>
+              <a:t>n</a:t>
             </a:r>
             <a:endParaRPr lang="en-US" sz="900" dirty="0"/>
           </a:p>
@@ -10643,7 +10643,7 @@
         </p:nvSpPr>
         <p:spPr>
           <a:xfrm>
-            <a:off x="7031736" y="4169664"/>
+            <a:off x="6062472" y="4169664"/>
             <a:ext cx="685800" cy="475488"/>
           </a:xfrm>
           <a:prstGeom prst="rect">
@@ -10670,7 +10670,7 @@
         </p:nvSpPr>
         <p:spPr>
           <a:xfrm>
-            <a:off x="7031736" y="4169664"/>
+            <a:off x="6062472" y="4169664"/>
             <a:ext cx="685800" cy="475488"/>
           </a:xfrm>
           <a:prstGeom prst="rect">
@@ -10695,7 +10695,73 @@
                 <a:ea typeface="Trebuchet MS" pitchFamily="34" charset="-122"/>
                 <a:cs typeface="Trebuchet MS" pitchFamily="34" charset="-120"/>
               </a:rPr>
-              <a:t>ng</a:t>
+              <a:t>e</a:t>
+            </a:r>
+            <a:endParaRPr lang="en-US" sz="900" dirty="0"/>
+          </a:p>
+        </p:txBody>
+      </p:sp>
+      <p:sp>
+        <p:nvSpPr>
+          <p:cNvPr id="41" name="Shape 39"/>
+          <p:cNvSpPr/>
+          <p:nvPr/>
+        </p:nvSpPr>
+        <p:spPr>
+          <a:xfrm>
+            <a:off x="7274052" y="4169664"/>
+            <a:ext cx="685800" cy="475488"/>
+          </a:xfrm>
+          <a:prstGeom prst="rect">
+            <a:avLst>
+              <a:gd name="adj" fmla="val 7692"/>
+            </a:avLst>
+          </a:prstGeom>
+          <a:solidFill>
+            <a:srgbClr val="FFFFFF"/>
+          </a:solidFill>
+          <a:ln w="12700">
+            <a:solidFill>
+              <a:srgbClr val="DB2777"/>
+            </a:solidFill>
+            <a:prstDash val="solid"/>
+          </a:ln>
+        </p:spPr>
+      </p:sp>
+      <p:sp>
+        <p:nvSpPr>
+          <p:cNvPr id="42" name="Text 40"/>
+          <p:cNvSpPr/>
+          <p:nvPr/>
+        </p:nvSpPr>
+        <p:spPr>
+          <a:xfrm>
+            <a:off x="7274052" y="4169664"/>
+            <a:ext cx="685800" cy="475488"/>
+          </a:xfrm>
+          <a:prstGeom prst="rect">
+            <a:avLst/>
+          </a:prstGeom>
+          <a:noFill/>
+          <a:ln/>
+        </p:spPr>
+        <p:txBody>
+          <a:bodyPr wrap="square" lIns="0" tIns="0" rIns="0" bIns="0" rtlCol="0" anchor="ctr"/>
+          <a:lstStyle/>
+          <a:p>
+            <a:pPr algn="ctr" indent="0" marL="0">
+              <a:buNone/>
+            </a:pPr>
+            <a:r>
+              <a:rPr lang="en-US" sz="900" b="1" dirty="0">
+                <a:solidFill>
+                  <a:srgbClr val="9D174D"/>
+                </a:solidFill>
+                <a:latin typeface="Trebuchet MS" pitchFamily="34" charset="0"/>
+                <a:ea typeface="Trebuchet MS" pitchFamily="34" charset="-122"/>
+                <a:cs typeface="Trebuchet MS" pitchFamily="34" charset="-120"/>
+              </a:rPr>
+              <a:t>ss</a:t>
             </a:r>
             <a:endParaRPr lang="en-US" sz="900" dirty="0"/>
           </a:p>
@@ -10987,7 +11053,7 @@
                 <a:ea typeface="Calibri" pitchFamily="34" charset="-122"/>
                 <a:cs typeface="Calibri" pitchFamily="34" charset="-120"/>
               </a:rPr>
-              <a:t>Word Labs  •  wordlabs.app  •  Root: 'slow' = not fast, taking time</a:t>
+              <a:t>Word Labs  •  wordlabs.app  •  Root: 'slow' = not fast, moving carefully</a:t>
             </a:r>
             <a:endParaRPr lang="en-US" sz="800" dirty="0"/>
           </a:p>
@@ -11814,7 +11880,7 @@
                 <a:ea typeface="Calibri" pitchFamily="34" charset="-122"/>
                 <a:cs typeface="Calibri" pitchFamily="34" charset="-120"/>
               </a:rPr>
-              <a:t>Word Labs  •  wordlabs.app  •  Root: 'slow' = not fast, taking time</a:t>
+              <a:t>Word Labs  •  wordlabs.app  •  Root: 'slow' = not fast, moving carefully</a:t>
             </a:r>
             <a:endParaRPr lang="en-US" sz="800" dirty="0"/>
           </a:p>
@@ -12243,7 +12309,7 @@
                 <a:ea typeface="Calibri" pitchFamily="34" charset="-122"/>
                 <a:cs typeface="Calibri" pitchFamily="34" charset="-120"/>
               </a:rPr>
-              <a:t>in a way that is</a:t>
+              <a:t>in the manner of</a:t>
             </a:r>
             <a:endParaRPr lang="en-US" sz="850" dirty="0"/>
           </a:p>
@@ -12799,7 +12865,7 @@
                 <a:ea typeface="Calibri" pitchFamily="34" charset="-122"/>
                 <a:cs typeface="Calibri" pitchFamily="34" charset="-120"/>
               </a:rPr>
-              <a:t>Word Labs  •  wordlabs.app  •  Root: 'slow' = not fast, taking time</a:t>
+              <a:t>Word Labs  •  wordlabs.app  •  Root: 'slow' = not fast, moving carefully</a:t>
             </a:r>
             <a:endParaRPr lang="en-US" sz="800" dirty="0"/>
           </a:p>
@@ -13228,7 +13294,7 @@
                 <a:ea typeface="Calibri" pitchFamily="34" charset="-122"/>
                 <a:cs typeface="Calibri" pitchFamily="34" charset="-120"/>
               </a:rPr>
-              <a:t>in a way that is</a:t>
+              <a:t>in the manner of</a:t>
             </a:r>
             <a:endParaRPr lang="en-US" sz="850" dirty="0"/>
           </a:p>
@@ -13825,7 +13891,7 @@
                 <a:ea typeface="Calibri" pitchFamily="34" charset="-122"/>
                 <a:cs typeface="Calibri" pitchFamily="34" charset="-120"/>
               </a:rPr>
-              <a:t>Root 'slow' — not fast, taking time</a:t>
+              <a:t>Root 'slow' — not fast, moving carefully</a:t>
             </a:r>
             <a:endParaRPr lang="en-US" sz="1600" dirty="0"/>
           </a:p>
@@ -14181,7 +14247,7 @@
                 <a:ea typeface="Calibri" pitchFamily="34" charset="-122"/>
                 <a:cs typeface="Calibri" pitchFamily="34" charset="-120"/>
               </a:rPr>
-              <a:t>Word Labs  •  wordlabs.app  •  Root: 'slow' = not fast, taking time</a:t>
+              <a:t>Word Labs  •  wordlabs.app  •  Root: 'slow' = not fast, moving carefully</a:t>
             </a:r>
             <a:endParaRPr lang="en-US" sz="800" dirty="0"/>
           </a:p>
@@ -14610,7 +14676,7 @@
                 <a:ea typeface="Calibri" pitchFamily="34" charset="-122"/>
                 <a:cs typeface="Calibri" pitchFamily="34" charset="-120"/>
               </a:rPr>
-              <a:t>in a way that is</a:t>
+              <a:t>in the manner of</a:t>
             </a:r>
             <a:endParaRPr lang="en-US" sz="850" dirty="0"/>
           </a:p>
@@ -15805,7 +15871,7 @@
                 <a:ea typeface="Calibri" pitchFamily="34" charset="-122"/>
                 <a:cs typeface="Calibri" pitchFamily="34" charset="-120"/>
               </a:rPr>
-              <a:t>Word Labs  •  wordlabs.app  •  Root: 'slow' = not fast, taking time</a:t>
+              <a:t>Word Labs  •  wordlabs.app  •  Root: 'slow' = not fast, moving carefully</a:t>
             </a:r>
             <a:endParaRPr lang="en-US" sz="800" dirty="0"/>
           </a:p>
@@ -16445,7 +16511,7 @@
                 <a:ea typeface="Calibri" pitchFamily="34" charset="-122"/>
                 <a:cs typeface="Calibri" pitchFamily="34" charset="-120"/>
               </a:rPr>
-              <a:t>Word Labs  •  wordlabs.app  •  Root: 'slow' = not fast, taking time</a:t>
+              <a:t>Word Labs  •  wordlabs.app  •  Root: 'slow' = not fast, moving carefully</a:t>
             </a:r>
             <a:endParaRPr lang="en-US" sz="800" dirty="0"/>
           </a:p>
@@ -16574,7 +16640,7 @@
                 <a:ea typeface="Calibri" pitchFamily="34" charset="-122"/>
                 <a:cs typeface="Calibri" pitchFamily="34" charset="-120"/>
               </a:rPr>
-              <a:t>slowest</a:t>
+              <a:t>slowdown</a:t>
             </a:r>
             <a:pPr algn="l" indent="0" marL="0">
               <a:buNone/>
@@ -16588,7 +16654,7 @@
                 <a:ea typeface="Calibri" pitchFamily="34" charset="-122"/>
                 <a:cs typeface="Calibri" pitchFamily="34" charset="-120"/>
               </a:rPr>
-              <a:t> swimmer was </a:t>
+              <a:t> in traffic meant the </a:t>
             </a:r>
             <a:pPr algn="l" indent="0" marL="0">
               <a:buNone/>
@@ -16605,7 +16671,7 @@
                 <a:ea typeface="Calibri" pitchFamily="34" charset="-122"/>
                 <a:cs typeface="Calibri" pitchFamily="34" charset="-120"/>
               </a:rPr>
-              <a:t>slowing</a:t>
+              <a:t>slower</a:t>
             </a:r>
             <a:pPr algn="l" indent="0" marL="0">
               <a:buNone/>
@@ -16619,7 +16685,7 @@
                 <a:ea typeface="Calibri" pitchFamily="34" charset="-122"/>
                 <a:cs typeface="Calibri" pitchFamily="34" charset="-120"/>
               </a:rPr>
-              <a:t> down, but her </a:t>
+              <a:t> drivers arrived late, but the </a:t>
             </a:r>
             <a:pPr algn="l" indent="0" marL="0">
               <a:buNone/>
@@ -16636,7 +16702,7 @@
                 <a:ea typeface="Calibri" pitchFamily="34" charset="-122"/>
                 <a:cs typeface="Calibri" pitchFamily="34" charset="-120"/>
               </a:rPr>
-              <a:t>slowness</a:t>
+              <a:t>slowest</a:t>
             </a:r>
             <a:pPr algn="l" indent="0" marL="0">
               <a:buNone/>
@@ -16650,7 +16716,7 @@
                 <a:ea typeface="Calibri" pitchFamily="34" charset="-122"/>
                 <a:cs typeface="Calibri" pitchFamily="34" charset="-120"/>
               </a:rPr>
-              <a:t> didn't stop her from finishing the race!</a:t>
+              <a:t> one missed the show completely!</a:t>
             </a:r>
             <a:endParaRPr lang="en-US" sz="1800" dirty="0"/>
           </a:p>
@@ -16805,7 +16871,7 @@
                 <a:ea typeface="Trebuchet MS" pitchFamily="34" charset="-122"/>
                 <a:cs typeface="Trebuchet MS" pitchFamily="34" charset="-120"/>
               </a:rPr>
-              <a:t>slowest</a:t>
+              <a:t>slowdown</a:t>
             </a:r>
             <a:endParaRPr lang="en-US" sz="1400" dirty="0"/>
           </a:p>
@@ -16933,7 +16999,7 @@
                 <a:ea typeface="Trebuchet MS" pitchFamily="34" charset="-122"/>
                 <a:cs typeface="Trebuchet MS" pitchFamily="34" charset="-120"/>
               </a:rPr>
-              <a:t>slowing</a:t>
+              <a:t>slower</a:t>
             </a:r>
             <a:endParaRPr lang="en-US" sz="1400" dirty="0"/>
           </a:p>
@@ -17061,7 +17127,7 @@
                 <a:ea typeface="Trebuchet MS" pitchFamily="34" charset="-122"/>
                 <a:cs typeface="Trebuchet MS" pitchFamily="34" charset="-120"/>
               </a:rPr>
-              <a:t>slowness</a:t>
+              <a:t>slowest</a:t>
             </a:r>
             <a:endParaRPr lang="en-US" sz="1400" dirty="0"/>
           </a:p>
@@ -17392,7 +17458,7 @@
                 <a:ea typeface="Calibri" pitchFamily="34" charset="-122"/>
                 <a:cs typeface="Calibri" pitchFamily="34" charset="-120"/>
               </a:rPr>
-              <a:t>Word Labs  •  wordlabs.app  •  Root: 'slow' = not fast, taking time</a:t>
+              <a:t>Word Labs  •  wordlabs.app  •  Root: 'slow' = not fast, moving carefully</a:t>
             </a:r>
             <a:endParaRPr lang="en-US" sz="800" dirty="0"/>
           </a:p>
@@ -17531,7 +17597,7 @@
                 <a:ea typeface="Trebuchet MS" pitchFamily="34" charset="-122"/>
                 <a:cs typeface="Trebuchet MS" pitchFamily="34" charset="-120"/>
               </a:rPr>
-              <a:t>slowest</a:t>
+              <a:t>slowdown</a:t>
             </a:r>
             <a:endParaRPr lang="en-US" sz="2800" dirty="0"/>
           </a:p>
@@ -18219,7 +18285,7 @@
                 <a:ea typeface="Calibri" pitchFamily="34" charset="-122"/>
                 <a:cs typeface="Calibri" pitchFamily="34" charset="-120"/>
               </a:rPr>
-              <a:t>Word Labs  •  wordlabs.app  •  Root: 'slow' = not fast, taking time</a:t>
+              <a:t>Word Labs  •  wordlabs.app  •  Root: 'slow' = not fast, moving carefully</a:t>
             </a:r>
             <a:endParaRPr lang="en-US" sz="800" dirty="0"/>
           </a:p>
@@ -18358,7 +18424,7 @@
                 <a:ea typeface="Trebuchet MS" pitchFamily="34" charset="-122"/>
                 <a:cs typeface="Trebuchet MS" pitchFamily="34" charset="-120"/>
               </a:rPr>
-              <a:t>slowest</a:t>
+              <a:t>slowdown</a:t>
             </a:r>
             <a:endParaRPr lang="en-US" sz="2800" dirty="0"/>
           </a:p>
@@ -18609,7 +18675,7 @@
                 <a:ea typeface="Trebuchet MS" pitchFamily="34" charset="-122"/>
                 <a:cs typeface="Trebuchet MS" pitchFamily="34" charset="-120"/>
               </a:rPr>
-              <a:t>est</a:t>
+              <a:t>down</a:t>
             </a:r>
             <a:endParaRPr lang="en-US" sz="1300" dirty="0"/>
           </a:p>
@@ -18648,7 +18714,7 @@
                 <a:ea typeface="Calibri" pitchFamily="34" charset="-122"/>
                 <a:cs typeface="Calibri" pitchFamily="34" charset="-120"/>
               </a:rPr>
-              <a:t>the most</a:t>
+              <a:t>reduction or decrease</a:t>
             </a:r>
             <a:endParaRPr lang="en-US" sz="850" dirty="0"/>
           </a:p>
@@ -19204,7 +19270,7 @@
                 <a:ea typeface="Calibri" pitchFamily="34" charset="-122"/>
                 <a:cs typeface="Calibri" pitchFamily="34" charset="-120"/>
               </a:rPr>
-              <a:t>Word Labs  •  wordlabs.app  •  Root: 'slow' = not fast, taking time</a:t>
+              <a:t>Word Labs  •  wordlabs.app  •  Root: 'slow' = not fast, moving carefully</a:t>
             </a:r>
             <a:endParaRPr lang="en-US" sz="800" dirty="0"/>
           </a:p>
@@ -19343,7 +19409,7 @@
                 <a:ea typeface="Trebuchet MS" pitchFamily="34" charset="-122"/>
                 <a:cs typeface="Trebuchet MS" pitchFamily="34" charset="-120"/>
               </a:rPr>
-              <a:t>slowest</a:t>
+              <a:t>slowdown</a:t>
             </a:r>
             <a:endParaRPr lang="en-US" sz="2800" dirty="0"/>
           </a:p>
@@ -19594,7 +19660,7 @@
                 <a:ea typeface="Trebuchet MS" pitchFamily="34" charset="-122"/>
                 <a:cs typeface="Trebuchet MS" pitchFamily="34" charset="-120"/>
               </a:rPr>
-              <a:t>est</a:t>
+              <a:t>down</a:t>
             </a:r>
             <a:endParaRPr lang="en-US" sz="1300" dirty="0"/>
           </a:p>
@@ -19633,7 +19699,7 @@
                 <a:ea typeface="Calibri" pitchFamily="34" charset="-122"/>
                 <a:cs typeface="Calibri" pitchFamily="34" charset="-120"/>
               </a:rPr>
-              <a:t>the most</a:t>
+              <a:t>reduction or decrease</a:t>
             </a:r>
             <a:endParaRPr lang="en-US" sz="850" dirty="0"/>
           </a:p>
@@ -19897,7 +19963,7 @@
                 <a:ea typeface="Trebuchet MS" pitchFamily="34" charset="-122"/>
                 <a:cs typeface="Trebuchet MS" pitchFamily="34" charset="-120"/>
               </a:rPr>
-              <a:t>est</a:t>
+              <a:t>down</a:t>
             </a:r>
             <a:endParaRPr lang="en-US" sz="1400" dirty="0"/>
           </a:p>
@@ -20321,7 +20387,7 @@
                 <a:ea typeface="Calibri" pitchFamily="34" charset="-122"/>
                 <a:cs typeface="Calibri" pitchFamily="34" charset="-120"/>
               </a:rPr>
-              <a:t>Word Labs  •  wordlabs.app  •  Root: 'slow' = not fast, taking time</a:t>
+              <a:t>Word Labs  •  wordlabs.app  •  Root: 'slow' = not fast, moving carefully</a:t>
             </a:r>
             <a:endParaRPr lang="en-US" sz="800" dirty="0"/>
           </a:p>
@@ -20460,7 +20526,7 @@
                 <a:ea typeface="Trebuchet MS" pitchFamily="34" charset="-122"/>
                 <a:cs typeface="Trebuchet MS" pitchFamily="34" charset="-120"/>
               </a:rPr>
-              <a:t>slowest</a:t>
+              <a:t>slowdown</a:t>
             </a:r>
             <a:endParaRPr lang="en-US" sz="2800" dirty="0"/>
           </a:p>
@@ -20711,7 +20777,7 @@
                 <a:ea typeface="Trebuchet MS" pitchFamily="34" charset="-122"/>
                 <a:cs typeface="Trebuchet MS" pitchFamily="34" charset="-120"/>
               </a:rPr>
-              <a:t>est</a:t>
+              <a:t>down</a:t>
             </a:r>
             <a:endParaRPr lang="en-US" sz="1300" dirty="0"/>
           </a:p>
@@ -20750,7 +20816,7 @@
                 <a:ea typeface="Calibri" pitchFamily="34" charset="-122"/>
                 <a:cs typeface="Calibri" pitchFamily="34" charset="-120"/>
               </a:rPr>
-              <a:t>the most</a:t>
+              <a:t>reduction or decrease</a:t>
             </a:r>
             <a:endParaRPr lang="en-US" sz="850" dirty="0"/>
           </a:p>
@@ -21014,7 +21080,7 @@
                 <a:ea typeface="Trebuchet MS" pitchFamily="34" charset="-122"/>
                 <a:cs typeface="Trebuchet MS" pitchFamily="34" charset="-120"/>
               </a:rPr>
-              <a:t>est</a:t>
+              <a:t>down</a:t>
             </a:r>
             <a:endParaRPr lang="en-US" sz="1400" dirty="0"/>
           </a:p>
@@ -21305,7 +21371,7 @@
                 <a:ea typeface="Trebuchet MS" pitchFamily="34" charset="-122"/>
                 <a:cs typeface="Trebuchet MS" pitchFamily="34" charset="-120"/>
               </a:rPr>
-              <a:t>e</a:t>
+              <a:t>d</a:t>
             </a:r>
             <a:endParaRPr lang="en-US" sz="900" dirty="0"/>
           </a:p>
@@ -21371,7 +21437,7 @@
                 <a:ea typeface="Trebuchet MS" pitchFamily="34" charset="-122"/>
                 <a:cs typeface="Trebuchet MS" pitchFamily="34" charset="-120"/>
               </a:rPr>
-              <a:t>s</a:t>
+              <a:t>ow</a:t>
             </a:r>
             <a:endParaRPr lang="en-US" sz="900" dirty="0"/>
           </a:p>
@@ -21437,7 +21503,7 @@
                 <a:ea typeface="Trebuchet MS" pitchFamily="34" charset="-122"/>
                 <a:cs typeface="Trebuchet MS" pitchFamily="34" charset="-120"/>
               </a:rPr>
-              <a:t>t</a:t>
+              <a:t>n</a:t>
             </a:r>
             <a:endParaRPr lang="en-US" sz="900" dirty="0"/>
           </a:p>
@@ -21729,7 +21795,7 @@
                 <a:ea typeface="Calibri" pitchFamily="34" charset="-122"/>
                 <a:cs typeface="Calibri" pitchFamily="34" charset="-120"/>
               </a:rPr>
-              <a:t>Word Labs  •  wordlabs.app  •  Root: 'slow' = not fast, taking time</a:t>
+              <a:t>Word Labs  •  wordlabs.app  •  Root: 'slow' = not fast, moving carefully</a:t>
             </a:r>
             <a:endParaRPr lang="en-US" sz="800" dirty="0"/>
           </a:p>
@@ -21868,7 +21934,7 @@
                 <a:ea typeface="Trebuchet MS" pitchFamily="34" charset="-122"/>
                 <a:cs typeface="Trebuchet MS" pitchFamily="34" charset="-120"/>
               </a:rPr>
-              <a:t>slowing</a:t>
+              <a:t>slower</a:t>
             </a:r>
             <a:endParaRPr lang="en-US" sz="2800" dirty="0"/>
           </a:p>
@@ -22556,7 +22622,7 @@
                 <a:ea typeface="Calibri" pitchFamily="34" charset="-122"/>
                 <a:cs typeface="Calibri" pitchFamily="34" charset="-120"/>
               </a:rPr>
-              <a:t>Word Labs  •  wordlabs.app  •  Root: 'slow' = not fast, taking time</a:t>
+              <a:t>Word Labs  •  wordlabs.app  •  Root: 'slow' = not fast, moving carefully</a:t>
             </a:r>
             <a:endParaRPr lang="en-US" sz="800" dirty="0"/>
           </a:p>
@@ -22695,7 +22761,7 @@
                 <a:ea typeface="Trebuchet MS" pitchFamily="34" charset="-122"/>
                 <a:cs typeface="Trebuchet MS" pitchFamily="34" charset="-120"/>
               </a:rPr>
-              <a:t>slowing</a:t>
+              <a:t>slower</a:t>
             </a:r>
             <a:endParaRPr lang="en-US" sz="2800" dirty="0"/>
           </a:p>
@@ -22946,7 +23012,7 @@
                 <a:ea typeface="Trebuchet MS" pitchFamily="34" charset="-122"/>
                 <a:cs typeface="Trebuchet MS" pitchFamily="34" charset="-120"/>
               </a:rPr>
-              <a:t>ing</a:t>
+              <a:t>er</a:t>
             </a:r>
             <a:endParaRPr lang="en-US" sz="1300" dirty="0"/>
           </a:p>
@@ -22985,7 +23051,7 @@
                 <a:ea typeface="Calibri" pitchFamily="34" charset="-122"/>
                 <a:cs typeface="Calibri" pitchFamily="34" charset="-120"/>
               </a:rPr>
-              <a:t>ongoing action</a:t>
+              <a:t>more, used for comparison</a:t>
             </a:r>
             <a:endParaRPr lang="en-US" sz="850" dirty="0"/>
           </a:p>
@@ -23541,7 +23607,7 @@
                 <a:ea typeface="Calibri" pitchFamily="34" charset="-122"/>
                 <a:cs typeface="Calibri" pitchFamily="34" charset="-120"/>
               </a:rPr>
-              <a:t>Word Labs  •  wordlabs.app  •  Root: 'slow' = not fast, taking time</a:t>
+              <a:t>Word Labs  •  wordlabs.app  •  Root: 'slow' = not fast, moving carefully</a:t>
             </a:r>
             <a:endParaRPr lang="en-US" sz="800" dirty="0"/>
           </a:p>
@@ -23614,7 +23680,7 @@
                 <a:ea typeface="Trebuchet MS" pitchFamily="34" charset="-122"/>
                 <a:cs typeface="Trebuchet MS" pitchFamily="34" charset="-120"/>
               </a:rPr>
-              <a:t>We are learning that the root 'slow' means 'not fast, taking time'.</a:t>
+              <a:t>We are learning that the root 'slow' means 'not fast, moving carefully'.</a:t>
             </a:r>
             <a:endParaRPr lang="en-US" sz="2000" dirty="0"/>
           </a:p>
@@ -24260,7 +24326,7 @@
                 <a:ea typeface="Calibri" pitchFamily="34" charset="-122"/>
                 <a:cs typeface="Calibri" pitchFamily="34" charset="-120"/>
               </a:rPr>
-              <a:t>Word Labs  •  wordlabs.app  •  Root: 'slow' = not fast, taking time</a:t>
+              <a:t>Word Labs  •  wordlabs.app  •  Root: 'slow' = not fast, moving carefully</a:t>
             </a:r>
             <a:endParaRPr lang="en-US" sz="800" dirty="0"/>
           </a:p>
@@ -24399,7 +24465,7 @@
                 <a:ea typeface="Trebuchet MS" pitchFamily="34" charset="-122"/>
                 <a:cs typeface="Trebuchet MS" pitchFamily="34" charset="-120"/>
               </a:rPr>
-              <a:t>slowing</a:t>
+              <a:t>slower</a:t>
             </a:r>
             <a:endParaRPr lang="en-US" sz="2800" dirty="0"/>
           </a:p>
@@ -24650,7 +24716,7 @@
                 <a:ea typeface="Trebuchet MS" pitchFamily="34" charset="-122"/>
                 <a:cs typeface="Trebuchet MS" pitchFamily="34" charset="-120"/>
               </a:rPr>
-              <a:t>ing</a:t>
+              <a:t>er</a:t>
             </a:r>
             <a:endParaRPr lang="en-US" sz="1300" dirty="0"/>
           </a:p>
@@ -24689,7 +24755,7 @@
                 <a:ea typeface="Calibri" pitchFamily="34" charset="-122"/>
                 <a:cs typeface="Calibri" pitchFamily="34" charset="-120"/>
               </a:rPr>
-              <a:t>ongoing action</a:t>
+              <a:t>more, used for comparison</a:t>
             </a:r>
             <a:endParaRPr lang="en-US" sz="850" dirty="0"/>
           </a:p>
@@ -24953,7 +25019,7 @@
                 <a:ea typeface="Trebuchet MS" pitchFamily="34" charset="-122"/>
                 <a:cs typeface="Trebuchet MS" pitchFamily="34" charset="-120"/>
               </a:rPr>
-              <a:t>ing</a:t>
+              <a:t>er</a:t>
             </a:r>
             <a:endParaRPr lang="en-US" sz="1400" dirty="0"/>
           </a:p>
@@ -25377,7 +25443,7 @@
                 <a:ea typeface="Calibri" pitchFamily="34" charset="-122"/>
                 <a:cs typeface="Calibri" pitchFamily="34" charset="-120"/>
               </a:rPr>
-              <a:t>Word Labs  •  wordlabs.app  •  Root: 'slow' = not fast, taking time</a:t>
+              <a:t>Word Labs  •  wordlabs.app  •  Root: 'slow' = not fast, moving carefully</a:t>
             </a:r>
             <a:endParaRPr lang="en-US" sz="800" dirty="0"/>
           </a:p>
@@ -25516,7 +25582,7 @@
                 <a:ea typeface="Trebuchet MS" pitchFamily="34" charset="-122"/>
                 <a:cs typeface="Trebuchet MS" pitchFamily="34" charset="-120"/>
               </a:rPr>
-              <a:t>slowing</a:t>
+              <a:t>slower</a:t>
             </a:r>
             <a:endParaRPr lang="en-US" sz="2800" dirty="0"/>
           </a:p>
@@ -25767,7 +25833,7 @@
                 <a:ea typeface="Trebuchet MS" pitchFamily="34" charset="-122"/>
                 <a:cs typeface="Trebuchet MS" pitchFamily="34" charset="-120"/>
               </a:rPr>
-              <a:t>ing</a:t>
+              <a:t>er</a:t>
             </a:r>
             <a:endParaRPr lang="en-US" sz="1300" dirty="0"/>
           </a:p>
@@ -25806,7 +25872,7 @@
                 <a:ea typeface="Calibri" pitchFamily="34" charset="-122"/>
                 <a:cs typeface="Calibri" pitchFamily="34" charset="-120"/>
               </a:rPr>
-              <a:t>ongoing action</a:t>
+              <a:t>more, used for comparison</a:t>
             </a:r>
             <a:endParaRPr lang="en-US" sz="850" dirty="0"/>
           </a:p>
@@ -26070,7 +26136,7 @@
                 <a:ea typeface="Trebuchet MS" pitchFamily="34" charset="-122"/>
                 <a:cs typeface="Trebuchet MS" pitchFamily="34" charset="-120"/>
               </a:rPr>
-              <a:t>ing</a:t>
+              <a:t>er</a:t>
             </a:r>
             <a:endParaRPr lang="en-US" sz="1400" dirty="0"/>
           </a:p>
@@ -26177,7 +26243,7 @@
         </p:nvSpPr>
         <p:spPr>
           <a:xfrm>
-            <a:off x="2670048" y="4169664"/>
+            <a:off x="3033522" y="4169664"/>
             <a:ext cx="685800" cy="475488"/>
           </a:xfrm>
           <a:prstGeom prst="rect">
@@ -26204,7 +26270,7 @@
         </p:nvSpPr>
         <p:spPr>
           <a:xfrm>
-            <a:off x="2670048" y="4169664"/>
+            <a:off x="3033522" y="4169664"/>
             <a:ext cx="685800" cy="475488"/>
           </a:xfrm>
           <a:prstGeom prst="rect">
@@ -26221,7 +26287,7 @@
               <a:buNone/>
             </a:pPr>
             <a:r>
-              <a:rPr lang="en-US" sz="900" b="1" dirty="0">
+              <a:rPr lang="en-US" sz="1000" b="1" dirty="0">
                 <a:solidFill>
                   <a:srgbClr val="9D174D"/>
                 </a:solidFill>
@@ -26231,7 +26297,7 @@
               </a:rPr>
               <a:t>sl</a:t>
             </a:r>
-            <a:endParaRPr lang="en-US" sz="900" dirty="0"/>
+            <a:endParaRPr lang="en-US" sz="1000" dirty="0"/>
           </a:p>
         </p:txBody>
       </p:sp>
@@ -26243,7 +26309,7 @@
         </p:nvSpPr>
         <p:spPr>
           <a:xfrm>
-            <a:off x="4123944" y="4169664"/>
+            <a:off x="4850892" y="4169664"/>
             <a:ext cx="685800" cy="475488"/>
           </a:xfrm>
           <a:prstGeom prst="rect">
@@ -26270,7 +26336,7 @@
         </p:nvSpPr>
         <p:spPr>
           <a:xfrm>
-            <a:off x="4123944" y="4169664"/>
+            <a:off x="4850892" y="4169664"/>
             <a:ext cx="685800" cy="475488"/>
           </a:xfrm>
           <a:prstGeom prst="rect">
@@ -26287,7 +26353,7 @@
               <a:buNone/>
             </a:pPr>
             <a:r>
-              <a:rPr lang="en-US" sz="900" b="1" dirty="0">
+              <a:rPr lang="en-US" sz="1000" b="1" dirty="0">
                 <a:solidFill>
                   <a:srgbClr val="9D174D"/>
                 </a:solidFill>
@@ -26297,7 +26363,7 @@
               </a:rPr>
               <a:t>ow</a:t>
             </a:r>
-            <a:endParaRPr lang="en-US" sz="900" dirty="0"/>
+            <a:endParaRPr lang="en-US" sz="1000" dirty="0"/>
           </a:p>
         </p:txBody>
       </p:sp>
@@ -26309,7 +26375,7 @@
         </p:nvSpPr>
         <p:spPr>
           <a:xfrm>
-            <a:off x="5577840" y="4169664"/>
+            <a:off x="6668262" y="4169664"/>
             <a:ext cx="685800" cy="475488"/>
           </a:xfrm>
           <a:prstGeom prst="rect">
@@ -26336,7 +26402,7 @@
         </p:nvSpPr>
         <p:spPr>
           <a:xfrm>
-            <a:off x="5577840" y="4169664"/>
+            <a:off x="6668262" y="4169664"/>
             <a:ext cx="685800" cy="475488"/>
           </a:xfrm>
           <a:prstGeom prst="rect">
@@ -26353,7 +26419,7 @@
               <a:buNone/>
             </a:pPr>
             <a:r>
-              <a:rPr lang="en-US" sz="900" b="1" dirty="0">
+              <a:rPr lang="en-US" sz="1000" b="1" dirty="0">
                 <a:solidFill>
                   <a:srgbClr val="9D174D"/>
                 </a:solidFill>
@@ -26361,75 +26427,9 @@
                 <a:ea typeface="Trebuchet MS" pitchFamily="34" charset="-122"/>
                 <a:cs typeface="Trebuchet MS" pitchFamily="34" charset="-120"/>
               </a:rPr>
-              <a:t>i</a:t>
-            </a:r>
-            <a:endParaRPr lang="en-US" sz="900" dirty="0"/>
-          </a:p>
-        </p:txBody>
-      </p:sp>
-      <p:sp>
-        <p:nvSpPr>
-          <p:cNvPr id="39" name="Shape 37"/>
-          <p:cNvSpPr/>
-          <p:nvPr/>
-        </p:nvSpPr>
-        <p:spPr>
-          <a:xfrm>
-            <a:off x="7031736" y="4169664"/>
-            <a:ext cx="685800" cy="475488"/>
-          </a:xfrm>
-          <a:prstGeom prst="rect">
-            <a:avLst>
-              <a:gd name="adj" fmla="val 7692"/>
-            </a:avLst>
-          </a:prstGeom>
-          <a:solidFill>
-            <a:srgbClr val="FFFFFF"/>
-          </a:solidFill>
-          <a:ln w="12700">
-            <a:solidFill>
-              <a:srgbClr val="DB2777"/>
-            </a:solidFill>
-            <a:prstDash val="solid"/>
-          </a:ln>
-        </p:spPr>
-      </p:sp>
-      <p:sp>
-        <p:nvSpPr>
-          <p:cNvPr id="40" name="Text 38"/>
-          <p:cNvSpPr/>
-          <p:nvPr/>
-        </p:nvSpPr>
-        <p:spPr>
-          <a:xfrm>
-            <a:off x="7031736" y="4169664"/>
-            <a:ext cx="685800" cy="475488"/>
-          </a:xfrm>
-          <a:prstGeom prst="rect">
-            <a:avLst/>
-          </a:prstGeom>
-          <a:noFill/>
-          <a:ln/>
-        </p:spPr>
-        <p:txBody>
-          <a:bodyPr wrap="square" lIns="0" tIns="0" rIns="0" bIns="0" rtlCol="0" anchor="ctr"/>
-          <a:lstStyle/>
-          <a:p>
-            <a:pPr algn="ctr" indent="0" marL="0">
-              <a:buNone/>
-            </a:pPr>
-            <a:r>
-              <a:rPr lang="en-US" sz="900" b="1" dirty="0">
-                <a:solidFill>
-                  <a:srgbClr val="9D174D"/>
-                </a:solidFill>
-                <a:latin typeface="Trebuchet MS" pitchFamily="34" charset="0"/>
-                <a:ea typeface="Trebuchet MS" pitchFamily="34" charset="-122"/>
-                <a:cs typeface="Trebuchet MS" pitchFamily="34" charset="-120"/>
-              </a:rPr>
-              <a:t>ng</a:t>
-            </a:r>
-            <a:endParaRPr lang="en-US" sz="900" dirty="0"/>
+              <a:t>er</a:t>
+            </a:r>
+            <a:endParaRPr lang="en-US" sz="1000" dirty="0"/>
           </a:p>
         </p:txBody>
       </p:sp>
@@ -26719,7 +26719,7 @@
                 <a:ea typeface="Calibri" pitchFamily="34" charset="-122"/>
                 <a:cs typeface="Calibri" pitchFamily="34" charset="-120"/>
               </a:rPr>
-              <a:t>Word Labs  •  wordlabs.app  •  Root: 'slow' = not fast, taking time</a:t>
+              <a:t>Word Labs  •  wordlabs.app  •  Root: 'slow' = not fast, moving carefully</a:t>
             </a:r>
             <a:endParaRPr lang="en-US" sz="800" dirty="0"/>
           </a:p>
@@ -26858,7 +26858,7 @@
                 <a:ea typeface="Trebuchet MS" pitchFamily="34" charset="-122"/>
                 <a:cs typeface="Trebuchet MS" pitchFamily="34" charset="-120"/>
               </a:rPr>
-              <a:t>slowness</a:t>
+              <a:t>slowest</a:t>
             </a:r>
             <a:endParaRPr lang="en-US" sz="2800" dirty="0"/>
           </a:p>
@@ -27546,7 +27546,7 @@
                 <a:ea typeface="Calibri" pitchFamily="34" charset="-122"/>
                 <a:cs typeface="Calibri" pitchFamily="34" charset="-120"/>
               </a:rPr>
-              <a:t>Word Labs  •  wordlabs.app  •  Root: 'slow' = not fast, taking time</a:t>
+              <a:t>Word Labs  •  wordlabs.app  •  Root: 'slow' = not fast, moving carefully</a:t>
             </a:r>
             <a:endParaRPr lang="en-US" sz="800" dirty="0"/>
           </a:p>
@@ -27685,7 +27685,7 @@
                 <a:ea typeface="Trebuchet MS" pitchFamily="34" charset="-122"/>
                 <a:cs typeface="Trebuchet MS" pitchFamily="34" charset="-120"/>
               </a:rPr>
-              <a:t>slowness</a:t>
+              <a:t>slowest</a:t>
             </a:r>
             <a:endParaRPr lang="en-US" sz="2800" dirty="0"/>
           </a:p>
@@ -27936,7 +27936,7 @@
                 <a:ea typeface="Trebuchet MS" pitchFamily="34" charset="-122"/>
                 <a:cs typeface="Trebuchet MS" pitchFamily="34" charset="-120"/>
               </a:rPr>
-              <a:t>ness</a:t>
+              <a:t>est</a:t>
             </a:r>
             <a:endParaRPr lang="en-US" sz="1300" dirty="0"/>
           </a:p>
@@ -27975,7 +27975,7 @@
                 <a:ea typeface="Calibri" pitchFamily="34" charset="-122"/>
                 <a:cs typeface="Calibri" pitchFamily="34" charset="-120"/>
               </a:rPr>
-              <a:t>quality or state of</a:t>
+              <a:t>most, the highest degree</a:t>
             </a:r>
             <a:endParaRPr lang="en-US" sz="850" dirty="0"/>
           </a:p>
@@ -28531,7 +28531,7 @@
                 <a:ea typeface="Calibri" pitchFamily="34" charset="-122"/>
                 <a:cs typeface="Calibri" pitchFamily="34" charset="-120"/>
               </a:rPr>
-              <a:t>Word Labs  •  wordlabs.app  •  Root: 'slow' = not fast, taking time</a:t>
+              <a:t>Word Labs  •  wordlabs.app  •  Root: 'slow' = not fast, moving carefully</a:t>
             </a:r>
             <a:endParaRPr lang="en-US" sz="800" dirty="0"/>
           </a:p>
@@ -28670,7 +28670,7 @@
                 <a:ea typeface="Trebuchet MS" pitchFamily="34" charset="-122"/>
                 <a:cs typeface="Trebuchet MS" pitchFamily="34" charset="-120"/>
               </a:rPr>
-              <a:t>slowness</a:t>
+              <a:t>slowest</a:t>
             </a:r>
             <a:endParaRPr lang="en-US" sz="2800" dirty="0"/>
           </a:p>
@@ -28921,7 +28921,7 @@
                 <a:ea typeface="Trebuchet MS" pitchFamily="34" charset="-122"/>
                 <a:cs typeface="Trebuchet MS" pitchFamily="34" charset="-120"/>
               </a:rPr>
-              <a:t>ness</a:t>
+              <a:t>est</a:t>
             </a:r>
             <a:endParaRPr lang="en-US" sz="1300" dirty="0"/>
           </a:p>
@@ -28960,7 +28960,7 @@
                 <a:ea typeface="Calibri" pitchFamily="34" charset="-122"/>
                 <a:cs typeface="Calibri" pitchFamily="34" charset="-120"/>
               </a:rPr>
-              <a:t>quality or state of</a:t>
+              <a:t>most, the highest degree</a:t>
             </a:r>
             <a:endParaRPr lang="en-US" sz="850" dirty="0"/>
           </a:p>
@@ -29224,7 +29224,7 @@
                 <a:ea typeface="Trebuchet MS" pitchFamily="34" charset="-122"/>
                 <a:cs typeface="Trebuchet MS" pitchFamily="34" charset="-120"/>
               </a:rPr>
-              <a:t>ness</a:t>
+              <a:t>est</a:t>
             </a:r>
             <a:endParaRPr lang="en-US" sz="1400" dirty="0"/>
           </a:p>
@@ -29648,7 +29648,7 @@
                 <a:ea typeface="Calibri" pitchFamily="34" charset="-122"/>
                 <a:cs typeface="Calibri" pitchFamily="34" charset="-120"/>
               </a:rPr>
-              <a:t>Word Labs  •  wordlabs.app  •  Root: 'slow' = not fast, taking time</a:t>
+              <a:t>Word Labs  •  wordlabs.app  •  Root: 'slow' = not fast, moving carefully</a:t>
             </a:r>
             <a:endParaRPr lang="en-US" sz="800" dirty="0"/>
           </a:p>
@@ -29787,7 +29787,7 @@
                 <a:ea typeface="Trebuchet MS" pitchFamily="34" charset="-122"/>
                 <a:cs typeface="Trebuchet MS" pitchFamily="34" charset="-120"/>
               </a:rPr>
-              <a:t>slowness</a:t>
+              <a:t>slowest</a:t>
             </a:r>
             <a:endParaRPr lang="en-US" sz="2800" dirty="0"/>
           </a:p>
@@ -30038,7 +30038,7 @@
                 <a:ea typeface="Trebuchet MS" pitchFamily="34" charset="-122"/>
                 <a:cs typeface="Trebuchet MS" pitchFamily="34" charset="-120"/>
               </a:rPr>
-              <a:t>ness</a:t>
+              <a:t>est</a:t>
             </a:r>
             <a:endParaRPr lang="en-US" sz="1300" dirty="0"/>
           </a:p>
@@ -30077,7 +30077,7 @@
                 <a:ea typeface="Calibri" pitchFamily="34" charset="-122"/>
                 <a:cs typeface="Calibri" pitchFamily="34" charset="-120"/>
               </a:rPr>
-              <a:t>quality or state of</a:t>
+              <a:t>most, the highest degree</a:t>
             </a:r>
             <a:endParaRPr lang="en-US" sz="850" dirty="0"/>
           </a:p>
@@ -30341,7 +30341,7 @@
                 <a:ea typeface="Trebuchet MS" pitchFamily="34" charset="-122"/>
                 <a:cs typeface="Trebuchet MS" pitchFamily="34" charset="-120"/>
               </a:rPr>
-              <a:t>ness</a:t>
+              <a:t>est</a:t>
             </a:r>
             <a:endParaRPr lang="en-US" sz="1400" dirty="0"/>
           </a:p>
@@ -30632,7 +30632,7 @@
                 <a:ea typeface="Trebuchet MS" pitchFamily="34" charset="-122"/>
                 <a:cs typeface="Trebuchet MS" pitchFamily="34" charset="-120"/>
               </a:rPr>
-              <a:t>n</a:t>
+              <a:t>e</a:t>
             </a:r>
             <a:endParaRPr lang="en-US" sz="900" dirty="0"/>
           </a:p>
@@ -30698,7 +30698,7 @@
                 <a:ea typeface="Trebuchet MS" pitchFamily="34" charset="-122"/>
                 <a:cs typeface="Trebuchet MS" pitchFamily="34" charset="-120"/>
               </a:rPr>
-              <a:t>e</a:t>
+              <a:t>s</a:t>
             </a:r>
             <a:endParaRPr lang="en-US" sz="900" dirty="0"/>
           </a:p>
@@ -30764,7 +30764,7 @@
                 <a:ea typeface="Trebuchet MS" pitchFamily="34" charset="-122"/>
                 <a:cs typeface="Trebuchet MS" pitchFamily="34" charset="-120"/>
               </a:rPr>
-              <a:t>ss</a:t>
+              <a:t>t</a:t>
             </a:r>
             <a:endParaRPr lang="en-US" sz="900" dirty="0"/>
           </a:p>
@@ -31056,7 +31056,7 @@
                 <a:ea typeface="Calibri" pitchFamily="34" charset="-122"/>
                 <a:cs typeface="Calibri" pitchFamily="34" charset="-120"/>
               </a:rPr>
-              <a:t>Word Labs  •  wordlabs.app  •  Root: 'slow' = not fast, taking time</a:t>
+              <a:t>Word Labs  •  wordlabs.app  •  Root: 'slow' = not fast, moving carefully</a:t>
             </a:r>
             <a:endParaRPr lang="en-US" sz="800" dirty="0"/>
           </a:p>
@@ -32225,7 +32225,7 @@
                 <a:ea typeface="Calibri" pitchFamily="34" charset="-122"/>
                 <a:cs typeface="Calibri" pitchFamily="34" charset="-120"/>
               </a:rPr>
-              <a:t>Word Labs  •  wordlabs.app  •  Root: 'slow' = not fast, taking time</a:t>
+              <a:t>Word Labs  •  wordlabs.app  •  Root: 'slow' = not fast, moving carefully</a:t>
             </a:r>
             <a:endParaRPr lang="en-US" sz="800" dirty="0"/>
           </a:p>
@@ -32718,7 +32718,7 @@
                 <a:ea typeface="Trebuchet MS" pitchFamily="34" charset="-122"/>
                 <a:cs typeface="Trebuchet MS" pitchFamily="34" charset="-120"/>
               </a:rPr>
-              <a:t>over-</a:t>
+              <a:t>out-</a:t>
             </a:r>
             <a:endParaRPr lang="en-US" sz="1300" dirty="0"/>
           </a:p>
@@ -32871,7 +32871,7 @@
                 <a:ea typeface="Trebuchet MS" pitchFamily="34" charset="-122"/>
                 <a:cs typeface="Trebuchet MS" pitchFamily="34" charset="-120"/>
               </a:rPr>
-              <a:t>go-</a:t>
+              <a:t>over-</a:t>
             </a:r>
             <a:endParaRPr lang="en-US" sz="1300" dirty="0"/>
           </a:p>
@@ -33024,7 +33024,7 @@
                 <a:ea typeface="Trebuchet MS" pitchFamily="34" charset="-122"/>
                 <a:cs typeface="Trebuchet MS" pitchFamily="34" charset="-120"/>
               </a:rPr>
-              <a:t>dead-</a:t>
+              <a:t>be-</a:t>
             </a:r>
             <a:endParaRPr lang="en-US" sz="1300" dirty="0"/>
           </a:p>
@@ -33177,7 +33177,7 @@
                 <a:ea typeface="Trebuchet MS" pitchFamily="34" charset="-122"/>
                 <a:cs typeface="Trebuchet MS" pitchFamily="34" charset="-120"/>
               </a:rPr>
-              <a:t>ultra-</a:t>
+              <a:t>re-</a:t>
             </a:r>
             <a:endParaRPr lang="en-US" sz="1300" dirty="0"/>
           </a:p>
@@ -33833,7 +33833,7 @@
                 <a:ea typeface="Trebuchet MS" pitchFamily="34" charset="-122"/>
                 <a:cs typeface="Trebuchet MS" pitchFamily="34" charset="-120"/>
               </a:rPr>
-              <a:t>slow-motion</a:t>
+              <a:t>outslow</a:t>
             </a:r>
             <a:endParaRPr lang="en-US" sz="1200" dirty="0"/>
           </a:p>
@@ -34125,7 +34125,7 @@
                 <a:ea typeface="Calibri" pitchFamily="34" charset="-122"/>
                 <a:cs typeface="Calibri" pitchFamily="34" charset="-120"/>
               </a:rPr>
-              <a:t>Word Labs  •  wordlabs.app  •  Root: 'slow' = not fast, taking time</a:t>
+              <a:t>Word Labs  •  wordlabs.app  •  Root: 'slow' = not fast, moving carefully</a:t>
             </a:r>
             <a:endParaRPr lang="en-US" sz="800" dirty="0"/>
           </a:p>
@@ -34289,7 +34289,7 @@
                 <a:ea typeface="Calibri" pitchFamily="34" charset="-122"/>
                 <a:cs typeface="Calibri" pitchFamily="34" charset="-120"/>
               </a:rPr>
-              <a:t>The core part of a word carrying its basic meaning. For example, 'slow' means 'not fast, taking time'.</a:t>
+              <a:t>The core part of a word carrying its basic meaning. For example, 'slow' means 'not fast, moving carefully'.</a:t>
             </a:r>
             <a:endParaRPr lang="en-US" sz="1350" dirty="0"/>
           </a:p>
@@ -34909,7 +34909,7 @@
                 <a:ea typeface="Calibri" pitchFamily="34" charset="-122"/>
                 <a:cs typeface="Calibri" pitchFamily="34" charset="-120"/>
               </a:rPr>
-              <a:t>Word Labs  •  wordlabs.app  •  Root: 'slow' = not fast, taking time</a:t>
+              <a:t>Word Labs  •  wordlabs.app  •  Root: 'slow' = not fast, moving carefully</a:t>
             </a:r>
             <a:endParaRPr lang="en-US" sz="800" dirty="0"/>
           </a:p>
@@ -35021,7 +35021,7 @@
                 <a:ea typeface="Calibri" pitchFamily="34" charset="-122"/>
                 <a:cs typeface="Calibri" pitchFamily="34" charset="-120"/>
               </a:rPr>
-              <a:t>1.  The word 'slowly' is made by adding the suffix '-ly' to the root 'slow'.</a:t>
+              <a:t>1.  The root 'slow' comes from ancient Greek.</a:t>
             </a:r>
             <a:endParaRPr lang="en-US" sz="1300" dirty="0"/>
           </a:p>
@@ -35044,11 +35044,11 @@
             </a:avLst>
           </a:prstGeom>
           <a:solidFill>
-            <a:srgbClr val="DCFCE7"/>
-          </a:solidFill>
-          <a:ln w="12700">
-            <a:solidFill>
-              <a:srgbClr val="16A34A"/>
+            <a:srgbClr val="FEE2E2"/>
+          </a:solidFill>
+          <a:ln w="12700">
+            <a:solidFill>
+              <a:srgbClr val="DC2626"/>
             </a:solidFill>
             <a:prstDash val="solid"/>
           </a:ln>
@@ -35081,13 +35081,13 @@
             <a:r>
               <a:rPr lang="en-US" sz="1100" b="1" dirty="0">
                 <a:solidFill>
-                  <a:srgbClr val="16A34A"/>
+                  <a:srgbClr val="DC2626"/>
                 </a:solidFill>
                 <a:latin typeface="Trebuchet MS" pitchFamily="34" charset="0"/>
                 <a:ea typeface="Trebuchet MS" pitchFamily="34" charset="-122"/>
                 <a:cs typeface="Trebuchet MS" pitchFamily="34" charset="-120"/>
               </a:rPr>
-              <a:t>TRUE</a:t>
+              <a:t>FALSE</a:t>
             </a:r>
             <a:endParaRPr lang="en-US" sz="1100" dirty="0"/>
           </a:p>
@@ -35160,7 +35160,7 @@
                 <a:ea typeface="Calibri" pitchFamily="34" charset="-122"/>
                 <a:cs typeface="Calibri" pitchFamily="34" charset="-120"/>
               </a:rPr>
-              <a:t>2.  The root 'slow' comes from ancient Greek.</a:t>
+              <a:t>2.  Adding '-ness' to 'slow' makes the word 'slowness', which means the quality of being slow.</a:t>
             </a:r>
             <a:endParaRPr lang="en-US" sz="1300" dirty="0"/>
           </a:p>
@@ -35183,11 +35183,11 @@
             </a:avLst>
           </a:prstGeom>
           <a:solidFill>
-            <a:srgbClr val="FEE2E2"/>
-          </a:solidFill>
-          <a:ln w="12700">
-            <a:solidFill>
-              <a:srgbClr val="DC2626"/>
+            <a:srgbClr val="DCFCE7"/>
+          </a:solidFill>
+          <a:ln w="12700">
+            <a:solidFill>
+              <a:srgbClr val="16A34A"/>
             </a:solidFill>
             <a:prstDash val="solid"/>
           </a:ln>
@@ -35220,13 +35220,13 @@
             <a:r>
               <a:rPr lang="en-US" sz="1100" b="1" dirty="0">
                 <a:solidFill>
-                  <a:srgbClr val="DC2626"/>
+                  <a:srgbClr val="16A34A"/>
                 </a:solidFill>
                 <a:latin typeface="Trebuchet MS" pitchFamily="34" charset="0"/>
                 <a:ea typeface="Trebuchet MS" pitchFamily="34" charset="-122"/>
                 <a:cs typeface="Trebuchet MS" pitchFamily="34" charset="-120"/>
               </a:rPr>
-              <a:t>FALSE</a:t>
+              <a:t>TRUE</a:t>
             </a:r>
             <a:endParaRPr lang="en-US" sz="1100" dirty="0"/>
           </a:p>
@@ -35299,7 +35299,7 @@
                 <a:ea typeface="Calibri" pitchFamily="34" charset="-122"/>
                 <a:cs typeface="Calibri" pitchFamily="34" charset="-120"/>
               </a:rPr>
-              <a:t>3.  Adding '-ness' to 'slow' creates a noun meaning the quality of being slow.</a:t>
+              <a:t>3.  The word 'slowly' is made from the root 'slow' and the suffix '-ly'.</a:t>
             </a:r>
             <a:endParaRPr lang="en-US" sz="1300" dirty="0"/>
           </a:p>
@@ -35438,7 +35438,7 @@
                 <a:ea typeface="Calibri" pitchFamily="34" charset="-122"/>
                 <a:cs typeface="Calibri" pitchFamily="34" charset="-120"/>
               </a:rPr>
-              <a:t>4.  The word 'slowest' uses the suffix '-est' to show the most extreme degree of slow.</a:t>
+              <a:t>4.  The word 'slowest' uses the suffix '-est' to show that something is the most slow of all.</a:t>
             </a:r>
             <a:endParaRPr lang="en-US" sz="1300" dirty="0"/>
           </a:p>
@@ -35577,7 +35577,7 @@
                 <a:ea typeface="Calibri" pitchFamily="34" charset="-122"/>
                 <a:cs typeface="Calibri" pitchFamily="34" charset="-120"/>
               </a:rPr>
-              <a:t>5.  The suffix '-ly' in 'slowly' changes the word into a noun.</a:t>
+              <a:t>5.  The root 'slow' means moving very quickly and with great speed.</a:t>
             </a:r>
             <a:endParaRPr lang="en-US" sz="1300" dirty="0"/>
           </a:p>
@@ -35935,7 +35935,7 @@
                 <a:ea typeface="Calibri" pitchFamily="34" charset="-122"/>
                 <a:cs typeface="Calibri" pitchFamily="34" charset="-120"/>
               </a:rPr>
-              <a:t>Word Labs  •  wordlabs.app  •  Root: 'slow' = not fast, taking time</a:t>
+              <a:t>Word Labs  •  wordlabs.app  •  Root: 'slow' = not fast, moving carefully</a:t>
             </a:r>
             <a:endParaRPr lang="en-US" sz="800" dirty="0"/>
           </a:p>
@@ -36072,7 +36072,7 @@
                 <a:ea typeface="Trebuchet MS" pitchFamily="34" charset="-122"/>
                 <a:cs typeface="Trebuchet MS" pitchFamily="34" charset="-120"/>
               </a:rPr>
-              <a:t>not fast, taking time</a:t>
+              <a:t>not fast, moving carefully</a:t>
             </a:r>
             <a:endParaRPr lang="en-US" sz="2000" dirty="0"/>
           </a:p>
@@ -36904,7 +36904,7 @@
                 <a:ea typeface="Calibri" pitchFamily="34" charset="-122"/>
                 <a:cs typeface="Calibri" pitchFamily="34" charset="-120"/>
               </a:rPr>
-              <a:t>Word Labs  •  wordlabs.app  •  Root: 'slow' = not fast, taking time</a:t>
+              <a:t>Word Labs  •  wordlabs.app  •  Root: 'slow' = not fast, moving carefully</a:t>
             </a:r>
             <a:endParaRPr lang="en-US" sz="800" dirty="0"/>
           </a:p>
@@ -37397,7 +37397,7 @@
                 <a:ea typeface="Trebuchet MS" pitchFamily="34" charset="-122"/>
                 <a:cs typeface="Trebuchet MS" pitchFamily="34" charset="-120"/>
               </a:rPr>
-              <a:t>over-</a:t>
+              <a:t>out-</a:t>
             </a:r>
             <a:endParaRPr lang="en-US" sz="1300" dirty="0"/>
           </a:p>
@@ -37550,7 +37550,7 @@
                 <a:ea typeface="Trebuchet MS" pitchFamily="34" charset="-122"/>
                 <a:cs typeface="Trebuchet MS" pitchFamily="34" charset="-120"/>
               </a:rPr>
-              <a:t>go-</a:t>
+              <a:t>over-</a:t>
             </a:r>
             <a:endParaRPr lang="en-US" sz="1300" dirty="0"/>
           </a:p>
@@ -37703,7 +37703,7 @@
                 <a:ea typeface="Trebuchet MS" pitchFamily="34" charset="-122"/>
                 <a:cs typeface="Trebuchet MS" pitchFamily="34" charset="-120"/>
               </a:rPr>
-              <a:t>dead-</a:t>
+              <a:t>be-</a:t>
             </a:r>
             <a:endParaRPr lang="en-US" sz="1300" dirty="0"/>
           </a:p>
@@ -37856,7 +37856,7 @@
                 <a:ea typeface="Trebuchet MS" pitchFamily="34" charset="-122"/>
                 <a:cs typeface="Trebuchet MS" pitchFamily="34" charset="-120"/>
               </a:rPr>
-              <a:t>ultra-</a:t>
+              <a:t>re-</a:t>
             </a:r>
             <a:endParaRPr lang="en-US" sz="1300" dirty="0"/>
           </a:p>
@@ -38678,7 +38678,7 @@
                 <a:ea typeface="Calibri" pitchFamily="34" charset="-122"/>
                 <a:cs typeface="Calibri" pitchFamily="34" charset="-120"/>
               </a:rPr>
-              <a:t>Word Labs  •  wordlabs.app  •  Root: 'slow' = not fast, taking time</a:t>
+              <a:t>Word Labs  •  wordlabs.app  •  Root: 'slow' = not fast, moving carefully</a:t>
             </a:r>
             <a:endParaRPr lang="en-US" sz="800" dirty="0"/>
           </a:p>
@@ -38856,7 +38856,7 @@
                 <a:ea typeface="Calibri" pitchFamily="34" charset="-122"/>
                 <a:cs typeface="Calibri" pitchFamily="34" charset="-120"/>
               </a:rPr>
-              <a:t>In a way that is not fast; at a gentle, unhurried pace.</a:t>
+              <a:t>Moving or happening at a speed that is not quick at all.</a:t>
             </a:r>
             <a:endParaRPr lang="en-US" sz="1200" dirty="0"/>
           </a:p>
@@ -38995,7 +38995,7 @@
                 <a:ea typeface="Calibri" pitchFamily="34" charset="-122"/>
                 <a:cs typeface="Calibri" pitchFamily="34" charset="-120"/>
               </a:rPr>
-              <a:t>Becoming less fast or making something go less fast.</a:t>
+              <a:t>Becoming less fast; reducing speed as you move or work.</a:t>
             </a:r>
             <a:endParaRPr lang="en-US" sz="1200" dirty="0"/>
           </a:p>
@@ -39134,7 +39134,7 @@
                 <a:ea typeface="Calibri" pitchFamily="34" charset="-122"/>
                 <a:cs typeface="Calibri" pitchFamily="34" charset="-120"/>
               </a:rPr>
-              <a:t>The least fast of all when comparing three or more things.</a:t>
+              <a:t>The most slow of all; moving less quickly than everything else being compared.</a:t>
             </a:r>
             <a:endParaRPr lang="en-US" sz="1200" dirty="0"/>
           </a:p>
@@ -39273,7 +39273,7 @@
                 <a:ea typeface="Calibri" pitchFamily="34" charset="-122"/>
                 <a:cs typeface="Calibri" pitchFamily="34" charset="-120"/>
               </a:rPr>
-              <a:t>When something starts moving or happening less quickly than before.</a:t>
+              <a:t>When something becomes less fast or less busy than it was before.</a:t>
             </a:r>
             <a:endParaRPr lang="en-US" sz="1200" dirty="0"/>
           </a:p>
@@ -39412,7 +39412,7 @@
                 <a:ea typeface="Calibri" pitchFamily="34" charset="-122"/>
                 <a:cs typeface="Calibri" pitchFamily="34" charset="-120"/>
               </a:rPr>
-              <a:t>Less fast than something else when comparing two things.</a:t>
+              <a:t>More slow than something else; not moving as quickly as another thing.</a:t>
             </a:r>
             <a:endParaRPr lang="en-US" sz="1200" dirty="0"/>
           </a:p>
@@ -39551,7 +39551,7 @@
                 <a:ea typeface="Calibri" pitchFamily="34" charset="-122"/>
                 <a:cs typeface="Calibri" pitchFamily="34" charset="-120"/>
               </a:rPr>
-              <a:t>Moving or doing something without speed, taking a long time.</a:t>
+              <a:t>In a way that is not fast; taking a long time to move or happen.</a:t>
             </a:r>
             <a:endParaRPr lang="en-US" sz="1200" dirty="0"/>
           </a:p>
@@ -39690,7 +39690,7 @@
                 <a:ea typeface="Calibri" pitchFamily="34" charset="-122"/>
                 <a:cs typeface="Calibri" pitchFamily="34" charset="-120"/>
               </a:rPr>
-              <a:t>The quality of not being fast or quick.</a:t>
+              <a:t>The quality of not being fast; the state of moving or doing things slowly.</a:t>
             </a:r>
             <a:endParaRPr lang="en-US" sz="1200" dirty="0"/>
           </a:p>
@@ -39982,7 +39982,7 @@
                 <a:ea typeface="Calibri" pitchFamily="34" charset="-122"/>
                 <a:cs typeface="Calibri" pitchFamily="34" charset="-120"/>
               </a:rPr>
-              <a:t>Word Labs  •  wordlabs.app  •  Root: 'slow' = not fast, taking time</a:t>
+              <a:t>Word Labs  •  wordlabs.app  •  Root: 'slow' = not fast, moving carefully</a:t>
             </a:r>
             <a:endParaRPr lang="en-US" sz="800" dirty="0"/>
           </a:p>
@@ -40185,7 +40185,7 @@
                 <a:ea typeface="Calibri" pitchFamily="34" charset="-122"/>
                 <a:cs typeface="Calibri" pitchFamily="34" charset="-120"/>
               </a:rPr>
-              <a:t>The tortoise moved slowly across the dusty track, but it never gave up.</a:t>
+              <a:t>The turtle moved slowly across the warm sand towards the ocean.</a:t>
             </a:r>
             <a:endParaRPr lang="en-US" sz="1500" dirty="0"/>
           </a:p>
@@ -40349,7 +40349,7 @@
                 <a:ea typeface="Calibri" pitchFamily="34" charset="-122"/>
                 <a:cs typeface="Calibri" pitchFamily="34" charset="-120"/>
               </a:rPr>
-              <a:t>The slowness of the internet connection made it hard to load the video for class.</a:t>
+              <a:t>The slowness of the traffic made us late for the school assembly.</a:t>
             </a:r>
             <a:endParaRPr lang="en-US" sz="1500" dirty="0"/>
           </a:p>
@@ -40513,7 +40513,7 @@
                 <a:ea typeface="Calibri" pitchFamily="34" charset="-122"/>
                 <a:cs typeface="Calibri" pitchFamily="34" charset="-120"/>
               </a:rPr>
-              <a:t>After the accident on the highway, traffic came to a slowdown near the tunnel.</a:t>
+              <a:t>She was the slowest runner in the race, but she never gave up.</a:t>
             </a:r>
             <a:endParaRPr lang="en-US" sz="1500" dirty="0"/>
           </a:p>

--- a/output/wordlabs-slow-3day.pptx
+++ b/output/wordlabs-slow-3day.pptx
@@ -4240,7 +4240,7 @@
                 <a:ea typeface="Calibri" pitchFamily="34" charset="-122"/>
                 <a:cs typeface="Calibri" pitchFamily="34" charset="-120"/>
               </a:rPr>
-              <a:t>"not fast, moving carefully"</a:t>
+              <a:t>"not fast"</a:t>
             </a:r>
             <a:endParaRPr lang="en-US" sz="2200" dirty="0"/>
           </a:p>
@@ -4279,7 +4279,7 @@
                 <a:ea typeface="Calibri" pitchFamily="34" charset="-122"/>
                 <a:cs typeface="Calibri" pitchFamily="34" charset="-120"/>
               </a:rPr>
-              <a:t>Origin: Old English: slaw</a:t>
+              <a:t>Origin: Anglo-Saxon (Old English) root</a:t>
             </a:r>
             <a:endParaRPr lang="en-US" sz="1300" dirty="0"/>
           </a:p>
@@ -5288,7 +5288,7 @@
                 <a:ea typeface="Calibri" pitchFamily="34" charset="-122"/>
                 <a:cs typeface="Calibri" pitchFamily="34" charset="-120"/>
               </a:rPr>
-              <a:t>Word Labs  •  wordlabs.app  •  Root: 'slow' = not fast, moving carefully</a:t>
+              <a:t>Word Labs  •  wordlabs.app  •  Root: 'slow' = not fast</a:t>
             </a:r>
             <a:endParaRPr lang="en-US" sz="800" dirty="0"/>
           </a:p>
@@ -5928,7 +5928,7 @@
                 <a:ea typeface="Calibri" pitchFamily="34" charset="-122"/>
                 <a:cs typeface="Calibri" pitchFamily="34" charset="-120"/>
               </a:rPr>
-              <a:t>Word Labs  •  wordlabs.app  •  Root: 'slow' = not fast, moving carefully</a:t>
+              <a:t>Word Labs  •  wordlabs.app  •  Root: 'slow' = not fast</a:t>
             </a:r>
             <a:endParaRPr lang="en-US" sz="800" dirty="0"/>
           </a:p>
@@ -6040,7 +6040,7 @@
                 <a:ea typeface="Calibri" pitchFamily="34" charset="-122"/>
                 <a:cs typeface="Calibri" pitchFamily="34" charset="-120"/>
               </a:rPr>
-              <a:t>The </a:t>
+              <a:t>The snail was much </a:t>
             </a:r>
             <a:pPr algn="l" indent="0" marL="0">
               <a:buNone/>
@@ -6057,7 +6057,7 @@
                 <a:ea typeface="Calibri" pitchFamily="34" charset="-122"/>
                 <a:cs typeface="Calibri" pitchFamily="34" charset="-120"/>
               </a:rPr>
-              <a:t>slowness</a:t>
+              <a:t>slower</a:t>
             </a:r>
             <a:pPr algn="l" indent="0" marL="0">
               <a:buNone/>
@@ -6071,7 +6071,7 @@
                 <a:ea typeface="Calibri" pitchFamily="34" charset="-122"/>
                 <a:cs typeface="Calibri" pitchFamily="34" charset="-120"/>
               </a:rPr>
-              <a:t> of the old computer was frustrating, so she carefully and </a:t>
+              <a:t> than the rabbit. She walked </a:t>
             </a:r>
             <a:pPr algn="l" indent="0" marL="0">
               <a:buNone/>
@@ -6102,7 +6102,7 @@
                 <a:ea typeface="Calibri" pitchFamily="34" charset="-122"/>
                 <a:cs typeface="Calibri" pitchFamily="34" charset="-120"/>
               </a:rPr>
-              <a:t> saved her work.</a:t>
+              <a:t> through the museum, looking at every painting.</a:t>
             </a:r>
             <a:endParaRPr lang="en-US" sz="1800" dirty="0"/>
           </a:p>
@@ -6257,7 +6257,7 @@
                 <a:ea typeface="Trebuchet MS" pitchFamily="34" charset="-122"/>
                 <a:cs typeface="Trebuchet MS" pitchFamily="34" charset="-120"/>
               </a:rPr>
-              <a:t>slowness</a:t>
+              <a:t>slower</a:t>
             </a:r>
             <a:endParaRPr lang="en-US" sz="1400" dirty="0"/>
           </a:p>
@@ -6716,7 +6716,7 @@
                 <a:ea typeface="Calibri" pitchFamily="34" charset="-122"/>
                 <a:cs typeface="Calibri" pitchFamily="34" charset="-120"/>
               </a:rPr>
-              <a:t>Word Labs  •  wordlabs.app  •  Root: 'slow' = not fast, moving carefully</a:t>
+              <a:t>Word Labs  •  wordlabs.app  •  Root: 'slow' = not fast</a:t>
             </a:r>
             <a:endParaRPr lang="en-US" sz="800" dirty="0"/>
           </a:p>
@@ -6855,7 +6855,7 @@
                 <a:ea typeface="Trebuchet MS" pitchFamily="34" charset="-122"/>
                 <a:cs typeface="Trebuchet MS" pitchFamily="34" charset="-120"/>
               </a:rPr>
-              <a:t>slowness</a:t>
+              <a:t>slower</a:t>
             </a:r>
             <a:endParaRPr lang="en-US" sz="2800" dirty="0"/>
           </a:p>
@@ -7543,7 +7543,7 @@
                 <a:ea typeface="Calibri" pitchFamily="34" charset="-122"/>
                 <a:cs typeface="Calibri" pitchFamily="34" charset="-120"/>
               </a:rPr>
-              <a:t>Word Labs  •  wordlabs.app  •  Root: 'slow' = not fast, moving carefully</a:t>
+              <a:t>Word Labs  •  wordlabs.app  •  Root: 'slow' = not fast</a:t>
             </a:r>
             <a:endParaRPr lang="en-US" sz="800" dirty="0"/>
           </a:p>
@@ -7682,7 +7682,7 @@
                 <a:ea typeface="Trebuchet MS" pitchFamily="34" charset="-122"/>
                 <a:cs typeface="Trebuchet MS" pitchFamily="34" charset="-120"/>
               </a:rPr>
-              <a:t>slowness</a:t>
+              <a:t>slower</a:t>
             </a:r>
             <a:endParaRPr lang="en-US" sz="2800" dirty="0"/>
           </a:p>
@@ -7933,7 +7933,7 @@
                 <a:ea typeface="Trebuchet MS" pitchFamily="34" charset="-122"/>
                 <a:cs typeface="Trebuchet MS" pitchFamily="34" charset="-120"/>
               </a:rPr>
-              <a:t>ness</a:t>
+              <a:t>er</a:t>
             </a:r>
             <a:endParaRPr lang="en-US" sz="1300" dirty="0"/>
           </a:p>
@@ -7972,7 +7972,7 @@
                 <a:ea typeface="Calibri" pitchFamily="34" charset="-122"/>
                 <a:cs typeface="Calibri" pitchFamily="34" charset="-120"/>
               </a:rPr>
-              <a:t>quality or state of</a:t>
+              <a:t>person who; more</a:t>
             </a:r>
             <a:endParaRPr lang="en-US" sz="850" dirty="0"/>
           </a:p>
@@ -8528,7 +8528,7 @@
                 <a:ea typeface="Calibri" pitchFamily="34" charset="-122"/>
                 <a:cs typeface="Calibri" pitchFamily="34" charset="-120"/>
               </a:rPr>
-              <a:t>Word Labs  •  wordlabs.app  •  Root: 'slow' = not fast, moving carefully</a:t>
+              <a:t>Word Labs  •  wordlabs.app  •  Root: 'slow' = not fast</a:t>
             </a:r>
             <a:endParaRPr lang="en-US" sz="800" dirty="0"/>
           </a:p>
@@ -8667,7 +8667,7 @@
                 <a:ea typeface="Trebuchet MS" pitchFamily="34" charset="-122"/>
                 <a:cs typeface="Trebuchet MS" pitchFamily="34" charset="-120"/>
               </a:rPr>
-              <a:t>slowness</a:t>
+              <a:t>slower</a:t>
             </a:r>
             <a:endParaRPr lang="en-US" sz="2800" dirty="0"/>
           </a:p>
@@ -8918,7 +8918,7 @@
                 <a:ea typeface="Trebuchet MS" pitchFamily="34" charset="-122"/>
                 <a:cs typeface="Trebuchet MS" pitchFamily="34" charset="-120"/>
               </a:rPr>
-              <a:t>ness</a:t>
+              <a:t>er</a:t>
             </a:r>
             <a:endParaRPr lang="en-US" sz="1300" dirty="0"/>
           </a:p>
@@ -8957,7 +8957,7 @@
                 <a:ea typeface="Calibri" pitchFamily="34" charset="-122"/>
                 <a:cs typeface="Calibri" pitchFamily="34" charset="-120"/>
               </a:rPr>
-              <a:t>quality or state of</a:t>
+              <a:t>person who; more</a:t>
             </a:r>
             <a:endParaRPr lang="en-US" sz="850" dirty="0"/>
           </a:p>
@@ -9221,7 +9221,7 @@
                 <a:ea typeface="Trebuchet MS" pitchFamily="34" charset="-122"/>
                 <a:cs typeface="Trebuchet MS" pitchFamily="34" charset="-120"/>
               </a:rPr>
-              <a:t>ness</a:t>
+              <a:t>er</a:t>
             </a:r>
             <a:endParaRPr lang="en-US" sz="1400" dirty="0"/>
           </a:p>
@@ -9645,7 +9645,7 @@
                 <a:ea typeface="Calibri" pitchFamily="34" charset="-122"/>
                 <a:cs typeface="Calibri" pitchFamily="34" charset="-120"/>
               </a:rPr>
-              <a:t>Word Labs  •  wordlabs.app  •  Root: 'slow' = not fast, moving carefully</a:t>
+              <a:t>Word Labs  •  wordlabs.app  •  Root: 'slow' = not fast</a:t>
             </a:r>
             <a:endParaRPr lang="en-US" sz="800" dirty="0"/>
           </a:p>
@@ -9784,7 +9784,7 @@
                 <a:ea typeface="Trebuchet MS" pitchFamily="34" charset="-122"/>
                 <a:cs typeface="Trebuchet MS" pitchFamily="34" charset="-120"/>
               </a:rPr>
-              <a:t>slowness</a:t>
+              <a:t>slower</a:t>
             </a:r>
             <a:endParaRPr lang="en-US" sz="2800" dirty="0"/>
           </a:p>
@@ -10035,7 +10035,7 @@
                 <a:ea typeface="Trebuchet MS" pitchFamily="34" charset="-122"/>
                 <a:cs typeface="Trebuchet MS" pitchFamily="34" charset="-120"/>
               </a:rPr>
-              <a:t>ness</a:t>
+              <a:t>er</a:t>
             </a:r>
             <a:endParaRPr lang="en-US" sz="1300" dirty="0"/>
           </a:p>
@@ -10074,7 +10074,7 @@
                 <a:ea typeface="Calibri" pitchFamily="34" charset="-122"/>
                 <a:cs typeface="Calibri" pitchFamily="34" charset="-120"/>
               </a:rPr>
-              <a:t>quality or state of</a:t>
+              <a:t>person who; more</a:t>
             </a:r>
             <a:endParaRPr lang="en-US" sz="850" dirty="0"/>
           </a:p>
@@ -10338,7 +10338,7 @@
                 <a:ea typeface="Trebuchet MS" pitchFamily="34" charset="-122"/>
                 <a:cs typeface="Trebuchet MS" pitchFamily="34" charset="-120"/>
               </a:rPr>
-              <a:t>ness</a:t>
+              <a:t>er</a:t>
             </a:r>
             <a:endParaRPr lang="en-US" sz="1400" dirty="0"/>
           </a:p>
@@ -10445,7 +10445,7 @@
         </p:nvSpPr>
         <p:spPr>
           <a:xfrm>
-            <a:off x="2427732" y="4169664"/>
+            <a:off x="2670048" y="4169664"/>
             <a:ext cx="685800" cy="475488"/>
           </a:xfrm>
           <a:prstGeom prst="rect">
@@ -10472,7 +10472,7 @@
         </p:nvSpPr>
         <p:spPr>
           <a:xfrm>
-            <a:off x="2427732" y="4169664"/>
+            <a:off x="2670048" y="4169664"/>
             <a:ext cx="685800" cy="475488"/>
           </a:xfrm>
           <a:prstGeom prst="rect">
@@ -10497,7 +10497,7 @@
                 <a:ea typeface="Trebuchet MS" pitchFamily="34" charset="-122"/>
                 <a:cs typeface="Trebuchet MS" pitchFamily="34" charset="-120"/>
               </a:rPr>
-              <a:t>sl</a:t>
+              <a:t>s</a:t>
             </a:r>
             <a:endParaRPr lang="en-US" sz="900" dirty="0"/>
           </a:p>
@@ -10511,7 +10511,7 @@
         </p:nvSpPr>
         <p:spPr>
           <a:xfrm>
-            <a:off x="3639312" y="4169664"/>
+            <a:off x="4123944" y="4169664"/>
             <a:ext cx="685800" cy="475488"/>
           </a:xfrm>
           <a:prstGeom prst="rect">
@@ -10538,7 +10538,7 @@
         </p:nvSpPr>
         <p:spPr>
           <a:xfrm>
-            <a:off x="3639312" y="4169664"/>
+            <a:off x="4123944" y="4169664"/>
             <a:ext cx="685800" cy="475488"/>
           </a:xfrm>
           <a:prstGeom prst="rect">
@@ -10563,7 +10563,7 @@
                 <a:ea typeface="Trebuchet MS" pitchFamily="34" charset="-122"/>
                 <a:cs typeface="Trebuchet MS" pitchFamily="34" charset="-120"/>
               </a:rPr>
-              <a:t>ow</a:t>
+              <a:t>l</a:t>
             </a:r>
             <a:endParaRPr lang="en-US" sz="900" dirty="0"/>
           </a:p>
@@ -10577,7 +10577,7 @@
         </p:nvSpPr>
         <p:spPr>
           <a:xfrm>
-            <a:off x="4850892" y="4169664"/>
+            <a:off x="5577840" y="4169664"/>
             <a:ext cx="685800" cy="475488"/>
           </a:xfrm>
           <a:prstGeom prst="rect">
@@ -10604,7 +10604,7 @@
         </p:nvSpPr>
         <p:spPr>
           <a:xfrm>
-            <a:off x="4850892" y="4169664"/>
+            <a:off x="5577840" y="4169664"/>
             <a:ext cx="685800" cy="475488"/>
           </a:xfrm>
           <a:prstGeom prst="rect">
@@ -10629,7 +10629,7 @@
                 <a:ea typeface="Trebuchet MS" pitchFamily="34" charset="-122"/>
                 <a:cs typeface="Trebuchet MS" pitchFamily="34" charset="-120"/>
               </a:rPr>
-              <a:t>n</a:t>
+              <a:t>ow</a:t>
             </a:r>
             <a:endParaRPr lang="en-US" sz="900" dirty="0"/>
           </a:p>
@@ -10643,7 +10643,7 @@
         </p:nvSpPr>
         <p:spPr>
           <a:xfrm>
-            <a:off x="6062472" y="4169664"/>
+            <a:off x="7031736" y="4169664"/>
             <a:ext cx="685800" cy="475488"/>
           </a:xfrm>
           <a:prstGeom prst="rect">
@@ -10670,7 +10670,7 @@
         </p:nvSpPr>
         <p:spPr>
           <a:xfrm>
-            <a:off x="6062472" y="4169664"/>
+            <a:off x="7031736" y="4169664"/>
             <a:ext cx="685800" cy="475488"/>
           </a:xfrm>
           <a:prstGeom prst="rect">
@@ -10695,73 +10695,7 @@
                 <a:ea typeface="Trebuchet MS" pitchFamily="34" charset="-122"/>
                 <a:cs typeface="Trebuchet MS" pitchFamily="34" charset="-120"/>
               </a:rPr>
-              <a:t>e</a:t>
-            </a:r>
-            <a:endParaRPr lang="en-US" sz="900" dirty="0"/>
-          </a:p>
-        </p:txBody>
-      </p:sp>
-      <p:sp>
-        <p:nvSpPr>
-          <p:cNvPr id="41" name="Shape 39"/>
-          <p:cNvSpPr/>
-          <p:nvPr/>
-        </p:nvSpPr>
-        <p:spPr>
-          <a:xfrm>
-            <a:off x="7274052" y="4169664"/>
-            <a:ext cx="685800" cy="475488"/>
-          </a:xfrm>
-          <a:prstGeom prst="rect">
-            <a:avLst>
-              <a:gd name="adj" fmla="val 7692"/>
-            </a:avLst>
-          </a:prstGeom>
-          <a:solidFill>
-            <a:srgbClr val="FFFFFF"/>
-          </a:solidFill>
-          <a:ln w="12700">
-            <a:solidFill>
-              <a:srgbClr val="DB2777"/>
-            </a:solidFill>
-            <a:prstDash val="solid"/>
-          </a:ln>
-        </p:spPr>
-      </p:sp>
-      <p:sp>
-        <p:nvSpPr>
-          <p:cNvPr id="42" name="Text 40"/>
-          <p:cNvSpPr/>
-          <p:nvPr/>
-        </p:nvSpPr>
-        <p:spPr>
-          <a:xfrm>
-            <a:off x="7274052" y="4169664"/>
-            <a:ext cx="685800" cy="475488"/>
-          </a:xfrm>
-          <a:prstGeom prst="rect">
-            <a:avLst/>
-          </a:prstGeom>
-          <a:noFill/>
-          <a:ln/>
-        </p:spPr>
-        <p:txBody>
-          <a:bodyPr wrap="square" lIns="0" tIns="0" rIns="0" bIns="0" rtlCol="0" anchor="ctr"/>
-          <a:lstStyle/>
-          <a:p>
-            <a:pPr algn="ctr" indent="0" marL="0">
-              <a:buNone/>
-            </a:pPr>
-            <a:r>
-              <a:rPr lang="en-US" sz="900" b="1" dirty="0">
-                <a:solidFill>
-                  <a:srgbClr val="9D174D"/>
-                </a:solidFill>
-                <a:latin typeface="Trebuchet MS" pitchFamily="34" charset="0"/>
-                <a:ea typeface="Trebuchet MS" pitchFamily="34" charset="-122"/>
-                <a:cs typeface="Trebuchet MS" pitchFamily="34" charset="-120"/>
-              </a:rPr>
-              <a:t>ss</a:t>
+              <a:t>er</a:t>
             </a:r>
             <a:endParaRPr lang="en-US" sz="900" dirty="0"/>
           </a:p>
@@ -11053,7 +10987,7 @@
                 <a:ea typeface="Calibri" pitchFamily="34" charset="-122"/>
                 <a:cs typeface="Calibri" pitchFamily="34" charset="-120"/>
               </a:rPr>
-              <a:t>Word Labs  •  wordlabs.app  •  Root: 'slow' = not fast, moving carefully</a:t>
+              <a:t>Word Labs  •  wordlabs.app  •  Root: 'slow' = not fast</a:t>
             </a:r>
             <a:endParaRPr lang="en-US" sz="800" dirty="0"/>
           </a:p>
@@ -11880,7 +11814,7 @@
                 <a:ea typeface="Calibri" pitchFamily="34" charset="-122"/>
                 <a:cs typeface="Calibri" pitchFamily="34" charset="-120"/>
               </a:rPr>
-              <a:t>Word Labs  •  wordlabs.app  •  Root: 'slow' = not fast, moving carefully</a:t>
+              <a:t>Word Labs  •  wordlabs.app  •  Root: 'slow' = not fast</a:t>
             </a:r>
             <a:endParaRPr lang="en-US" sz="800" dirty="0"/>
           </a:p>
@@ -12309,7 +12243,7 @@
                 <a:ea typeface="Calibri" pitchFamily="34" charset="-122"/>
                 <a:cs typeface="Calibri" pitchFamily="34" charset="-120"/>
               </a:rPr>
-              <a:t>in the manner of</a:t>
+              <a:t>in a way</a:t>
             </a:r>
             <a:endParaRPr lang="en-US" sz="850" dirty="0"/>
           </a:p>
@@ -12865,7 +12799,7 @@
                 <a:ea typeface="Calibri" pitchFamily="34" charset="-122"/>
                 <a:cs typeface="Calibri" pitchFamily="34" charset="-120"/>
               </a:rPr>
-              <a:t>Word Labs  •  wordlabs.app  •  Root: 'slow' = not fast, moving carefully</a:t>
+              <a:t>Word Labs  •  wordlabs.app  •  Root: 'slow' = not fast</a:t>
             </a:r>
             <a:endParaRPr lang="en-US" sz="800" dirty="0"/>
           </a:p>
@@ -13294,7 +13228,7 @@
                 <a:ea typeface="Calibri" pitchFamily="34" charset="-122"/>
                 <a:cs typeface="Calibri" pitchFamily="34" charset="-120"/>
               </a:rPr>
-              <a:t>in the manner of</a:t>
+              <a:t>in a way</a:t>
             </a:r>
             <a:endParaRPr lang="en-US" sz="850" dirty="0"/>
           </a:p>
@@ -13891,7 +13825,7 @@
                 <a:ea typeface="Calibri" pitchFamily="34" charset="-122"/>
                 <a:cs typeface="Calibri" pitchFamily="34" charset="-120"/>
               </a:rPr>
-              <a:t>Root 'slow' — not fast, moving carefully</a:t>
+              <a:t>Root 'slow' — not fast</a:t>
             </a:r>
             <a:endParaRPr lang="en-US" sz="1600" dirty="0"/>
           </a:p>
@@ -14247,7 +14181,7 @@
                 <a:ea typeface="Calibri" pitchFamily="34" charset="-122"/>
                 <a:cs typeface="Calibri" pitchFamily="34" charset="-120"/>
               </a:rPr>
-              <a:t>Word Labs  •  wordlabs.app  •  Root: 'slow' = not fast, moving carefully</a:t>
+              <a:t>Word Labs  •  wordlabs.app  •  Root: 'slow' = not fast</a:t>
             </a:r>
             <a:endParaRPr lang="en-US" sz="800" dirty="0"/>
           </a:p>
@@ -14676,7 +14610,7 @@
                 <a:ea typeface="Calibri" pitchFamily="34" charset="-122"/>
                 <a:cs typeface="Calibri" pitchFamily="34" charset="-120"/>
               </a:rPr>
-              <a:t>in the manner of</a:t>
+              <a:t>in a way</a:t>
             </a:r>
             <a:endParaRPr lang="en-US" sz="850" dirty="0"/>
           </a:p>
@@ -15047,7 +14981,7 @@
         </p:nvSpPr>
         <p:spPr>
           <a:xfrm>
-            <a:off x="2670048" y="4169664"/>
+            <a:off x="2427732" y="4169664"/>
             <a:ext cx="685800" cy="475488"/>
           </a:xfrm>
           <a:prstGeom prst="rect">
@@ -15074,7 +15008,7 @@
         </p:nvSpPr>
         <p:spPr>
           <a:xfrm>
-            <a:off x="2670048" y="4169664"/>
+            <a:off x="2427732" y="4169664"/>
             <a:ext cx="685800" cy="475488"/>
           </a:xfrm>
           <a:prstGeom prst="rect">
@@ -15099,7 +15033,7 @@
                 <a:ea typeface="Trebuchet MS" pitchFamily="34" charset="-122"/>
                 <a:cs typeface="Trebuchet MS" pitchFamily="34" charset="-120"/>
               </a:rPr>
-              <a:t>sl</a:t>
+              <a:t>s</a:t>
             </a:r>
             <a:endParaRPr lang="en-US" sz="900" dirty="0"/>
           </a:p>
@@ -15113,7 +15047,7 @@
         </p:nvSpPr>
         <p:spPr>
           <a:xfrm>
-            <a:off x="4123944" y="4169664"/>
+            <a:off x="3639312" y="4169664"/>
             <a:ext cx="685800" cy="475488"/>
           </a:xfrm>
           <a:prstGeom prst="rect">
@@ -15140,7 +15074,7 @@
         </p:nvSpPr>
         <p:spPr>
           <a:xfrm>
-            <a:off x="4123944" y="4169664"/>
+            <a:off x="3639312" y="4169664"/>
             <a:ext cx="685800" cy="475488"/>
           </a:xfrm>
           <a:prstGeom prst="rect">
@@ -15165,7 +15099,7 @@
                 <a:ea typeface="Trebuchet MS" pitchFamily="34" charset="-122"/>
                 <a:cs typeface="Trebuchet MS" pitchFamily="34" charset="-120"/>
               </a:rPr>
-              <a:t>ow</a:t>
+              <a:t>l</a:t>
             </a:r>
             <a:endParaRPr lang="en-US" sz="900" dirty="0"/>
           </a:p>
@@ -15179,7 +15113,7 @@
         </p:nvSpPr>
         <p:spPr>
           <a:xfrm>
-            <a:off x="5577840" y="4169664"/>
+            <a:off x="4850892" y="4169664"/>
             <a:ext cx="685800" cy="475488"/>
           </a:xfrm>
           <a:prstGeom prst="rect">
@@ -15206,7 +15140,7 @@
         </p:nvSpPr>
         <p:spPr>
           <a:xfrm>
-            <a:off x="5577840" y="4169664"/>
+            <a:off x="4850892" y="4169664"/>
             <a:ext cx="685800" cy="475488"/>
           </a:xfrm>
           <a:prstGeom prst="rect">
@@ -15231,7 +15165,7 @@
                 <a:ea typeface="Trebuchet MS" pitchFamily="34" charset="-122"/>
                 <a:cs typeface="Trebuchet MS" pitchFamily="34" charset="-120"/>
               </a:rPr>
-              <a:t>l</a:t>
+              <a:t>ow</a:t>
             </a:r>
             <a:endParaRPr lang="en-US" sz="900" dirty="0"/>
           </a:p>
@@ -15245,7 +15179,7 @@
         </p:nvSpPr>
         <p:spPr>
           <a:xfrm>
-            <a:off x="7031736" y="4169664"/>
+            <a:off x="6062472" y="4169664"/>
             <a:ext cx="685800" cy="475488"/>
           </a:xfrm>
           <a:prstGeom prst="rect">
@@ -15272,7 +15206,73 @@
         </p:nvSpPr>
         <p:spPr>
           <a:xfrm>
-            <a:off x="7031736" y="4169664"/>
+            <a:off x="6062472" y="4169664"/>
+            <a:ext cx="685800" cy="475488"/>
+          </a:xfrm>
+          <a:prstGeom prst="rect">
+            <a:avLst/>
+          </a:prstGeom>
+          <a:noFill/>
+          <a:ln/>
+        </p:spPr>
+        <p:txBody>
+          <a:bodyPr wrap="square" lIns="0" tIns="0" rIns="0" bIns="0" rtlCol="0" anchor="ctr"/>
+          <a:lstStyle/>
+          <a:p>
+            <a:pPr algn="ctr" indent="0" marL="0">
+              <a:buNone/>
+            </a:pPr>
+            <a:r>
+              <a:rPr lang="en-US" sz="900" b="1" dirty="0">
+                <a:solidFill>
+                  <a:srgbClr val="9D174D"/>
+                </a:solidFill>
+                <a:latin typeface="Trebuchet MS" pitchFamily="34" charset="0"/>
+                <a:ea typeface="Trebuchet MS" pitchFamily="34" charset="-122"/>
+                <a:cs typeface="Trebuchet MS" pitchFamily="34" charset="-120"/>
+              </a:rPr>
+              <a:t>l</a:t>
+            </a:r>
+            <a:endParaRPr lang="en-US" sz="900" dirty="0"/>
+          </a:p>
+        </p:txBody>
+      </p:sp>
+      <p:sp>
+        <p:nvSpPr>
+          <p:cNvPr id="41" name="Shape 39"/>
+          <p:cNvSpPr/>
+          <p:nvPr/>
+        </p:nvSpPr>
+        <p:spPr>
+          <a:xfrm>
+            <a:off x="7274052" y="4169664"/>
+            <a:ext cx="685800" cy="475488"/>
+          </a:xfrm>
+          <a:prstGeom prst="rect">
+            <a:avLst>
+              <a:gd name="adj" fmla="val 7692"/>
+            </a:avLst>
+          </a:prstGeom>
+          <a:solidFill>
+            <a:srgbClr val="FFFFFF"/>
+          </a:solidFill>
+          <a:ln w="12700">
+            <a:solidFill>
+              <a:srgbClr val="DB2777"/>
+            </a:solidFill>
+            <a:prstDash val="solid"/>
+          </a:ln>
+        </p:spPr>
+      </p:sp>
+      <p:sp>
+        <p:nvSpPr>
+          <p:cNvPr id="42" name="Text 40"/>
+          <p:cNvSpPr/>
+          <p:nvPr/>
+        </p:nvSpPr>
+        <p:spPr>
+          <a:xfrm>
+            <a:off x="7274052" y="4169664"/>
             <a:ext cx="685800" cy="475488"/>
           </a:xfrm>
           <a:prstGeom prst="rect">
@@ -15871,7 +15871,7 @@
                 <a:ea typeface="Calibri" pitchFamily="34" charset="-122"/>
                 <a:cs typeface="Calibri" pitchFamily="34" charset="-120"/>
               </a:rPr>
-              <a:t>Word Labs  •  wordlabs.app  •  Root: 'slow' = not fast, moving carefully</a:t>
+              <a:t>Word Labs  •  wordlabs.app  •  Root: 'slow' = not fast</a:t>
             </a:r>
             <a:endParaRPr lang="en-US" sz="800" dirty="0"/>
           </a:p>
@@ -16205,7 +16205,7 @@
                 <a:ea typeface="Trebuchet MS" pitchFamily="34" charset="-122"/>
                 <a:cs typeface="Trebuchet MS" pitchFamily="34" charset="-120"/>
               </a:rPr>
-              <a:t>2</a:t>
+              <a:t>0</a:t>
             </a:r>
             <a:pPr algn="ctr" indent="0" marL="0">
               <a:buNone/>
@@ -16219,7 +16219,7 @@
                 <a:ea typeface="Trebuchet MS" pitchFamily="34" charset="-122"/>
                 <a:cs typeface="Trebuchet MS" pitchFamily="34" charset="-120"/>
               </a:rPr>
-              <a:t>  punctuation marks</a:t>
+              <a:t>  punctuation mark</a:t>
             </a:r>
             <a:endParaRPr lang="en-US" sz="2800" dirty="0"/>
           </a:p>
@@ -16511,7 +16511,7 @@
                 <a:ea typeface="Calibri" pitchFamily="34" charset="-122"/>
                 <a:cs typeface="Calibri" pitchFamily="34" charset="-120"/>
               </a:rPr>
-              <a:t>Word Labs  •  wordlabs.app  •  Root: 'slow' = not fast, moving carefully</a:t>
+              <a:t>Word Labs  •  wordlabs.app  •  Root: 'slow' = not fast</a:t>
             </a:r>
             <a:endParaRPr lang="en-US" sz="800" dirty="0"/>
           </a:p>
@@ -16623,7 +16623,7 @@
                 <a:ea typeface="Calibri" pitchFamily="34" charset="-122"/>
                 <a:cs typeface="Calibri" pitchFamily="34" charset="-120"/>
               </a:rPr>
-              <a:t>The </a:t>
+              <a:t>The tortoise was the </a:t>
             </a:r>
             <a:pPr algn="l" indent="0" marL="0">
               <a:buNone/>
@@ -16640,7 +16640,7 @@
                 <a:ea typeface="Calibri" pitchFamily="34" charset="-122"/>
                 <a:cs typeface="Calibri" pitchFamily="34" charset="-120"/>
               </a:rPr>
-              <a:t>slowdown</a:t>
+              <a:t>slowest</a:t>
             </a:r>
             <a:pPr algn="l" indent="0" marL="0">
               <a:buNone/>
@@ -16654,7 +16654,7 @@
                 <a:ea typeface="Calibri" pitchFamily="34" charset="-122"/>
                 <a:cs typeface="Calibri" pitchFamily="34" charset="-120"/>
               </a:rPr>
-              <a:t> in traffic meant the </a:t>
+              <a:t> animal in the race. The train was </a:t>
             </a:r>
             <a:pPr algn="l" indent="0" marL="0">
               <a:buNone/>
@@ -16671,7 +16671,7 @@
                 <a:ea typeface="Calibri" pitchFamily="34" charset="-122"/>
                 <a:cs typeface="Calibri" pitchFamily="34" charset="-120"/>
               </a:rPr>
-              <a:t>slower</a:t>
+              <a:t>slowing</a:t>
             </a:r>
             <a:pPr algn="l" indent="0" marL="0">
               <a:buNone/>
@@ -16685,7 +16685,7 @@
                 <a:ea typeface="Calibri" pitchFamily="34" charset="-122"/>
                 <a:cs typeface="Calibri" pitchFamily="34" charset="-120"/>
               </a:rPr>
-              <a:t> drivers arrived late, but the </a:t>
+              <a:t> as it neared the station. The </a:t>
             </a:r>
             <a:pPr algn="l" indent="0" marL="0">
               <a:buNone/>
@@ -16702,7 +16702,7 @@
                 <a:ea typeface="Calibri" pitchFamily="34" charset="-122"/>
                 <a:cs typeface="Calibri" pitchFamily="34" charset="-120"/>
               </a:rPr>
-              <a:t>slowest</a:t>
+              <a:t>slowness</a:t>
             </a:r>
             <a:pPr algn="l" indent="0" marL="0">
               <a:buNone/>
@@ -16716,7 +16716,7 @@
                 <a:ea typeface="Calibri" pitchFamily="34" charset="-122"/>
                 <a:cs typeface="Calibri" pitchFamily="34" charset="-120"/>
               </a:rPr>
-              <a:t> one missed the show completely!</a:t>
+              <a:t> of the traffic made them late for school.</a:t>
             </a:r>
             <a:endParaRPr lang="en-US" sz="1800" dirty="0"/>
           </a:p>
@@ -16871,7 +16871,7 @@
                 <a:ea typeface="Trebuchet MS" pitchFamily="34" charset="-122"/>
                 <a:cs typeface="Trebuchet MS" pitchFamily="34" charset="-120"/>
               </a:rPr>
-              <a:t>slowdown</a:t>
+              <a:t>slowest</a:t>
             </a:r>
             <a:endParaRPr lang="en-US" sz="1400" dirty="0"/>
           </a:p>
@@ -16999,7 +16999,7 @@
                 <a:ea typeface="Trebuchet MS" pitchFamily="34" charset="-122"/>
                 <a:cs typeface="Trebuchet MS" pitchFamily="34" charset="-120"/>
               </a:rPr>
-              <a:t>slower</a:t>
+              <a:t>slowing</a:t>
             </a:r>
             <a:endParaRPr lang="en-US" sz="1400" dirty="0"/>
           </a:p>
@@ -17127,7 +17127,7 @@
                 <a:ea typeface="Trebuchet MS" pitchFamily="34" charset="-122"/>
                 <a:cs typeface="Trebuchet MS" pitchFamily="34" charset="-120"/>
               </a:rPr>
-              <a:t>slowest</a:t>
+              <a:t>slowness</a:t>
             </a:r>
             <a:endParaRPr lang="en-US" sz="1400" dirty="0"/>
           </a:p>
@@ -17458,7 +17458,7 @@
                 <a:ea typeface="Calibri" pitchFamily="34" charset="-122"/>
                 <a:cs typeface="Calibri" pitchFamily="34" charset="-120"/>
               </a:rPr>
-              <a:t>Word Labs  •  wordlabs.app  •  Root: 'slow' = not fast, moving carefully</a:t>
+              <a:t>Word Labs  •  wordlabs.app  •  Root: 'slow' = not fast</a:t>
             </a:r>
             <a:endParaRPr lang="en-US" sz="800" dirty="0"/>
           </a:p>
@@ -17597,7 +17597,7 @@
                 <a:ea typeface="Trebuchet MS" pitchFamily="34" charset="-122"/>
                 <a:cs typeface="Trebuchet MS" pitchFamily="34" charset="-120"/>
               </a:rPr>
-              <a:t>slowdown</a:t>
+              <a:t>slowest</a:t>
             </a:r>
             <a:endParaRPr lang="en-US" sz="2800" dirty="0"/>
           </a:p>
@@ -18285,7 +18285,7 @@
                 <a:ea typeface="Calibri" pitchFamily="34" charset="-122"/>
                 <a:cs typeface="Calibri" pitchFamily="34" charset="-120"/>
               </a:rPr>
-              <a:t>Word Labs  •  wordlabs.app  •  Root: 'slow' = not fast, moving carefully</a:t>
+              <a:t>Word Labs  •  wordlabs.app  •  Root: 'slow' = not fast</a:t>
             </a:r>
             <a:endParaRPr lang="en-US" sz="800" dirty="0"/>
           </a:p>
@@ -18424,7 +18424,7 @@
                 <a:ea typeface="Trebuchet MS" pitchFamily="34" charset="-122"/>
                 <a:cs typeface="Trebuchet MS" pitchFamily="34" charset="-120"/>
               </a:rPr>
-              <a:t>slowdown</a:t>
+              <a:t>slowest</a:t>
             </a:r>
             <a:endParaRPr lang="en-US" sz="2800" dirty="0"/>
           </a:p>
@@ -18675,7 +18675,7 @@
                 <a:ea typeface="Trebuchet MS" pitchFamily="34" charset="-122"/>
                 <a:cs typeface="Trebuchet MS" pitchFamily="34" charset="-120"/>
               </a:rPr>
-              <a:t>down</a:t>
+              <a:t>est</a:t>
             </a:r>
             <a:endParaRPr lang="en-US" sz="1300" dirty="0"/>
           </a:p>
@@ -18714,7 +18714,7 @@
                 <a:ea typeface="Calibri" pitchFamily="34" charset="-122"/>
                 <a:cs typeface="Calibri" pitchFamily="34" charset="-120"/>
               </a:rPr>
-              <a:t>reduction or decrease</a:t>
+              <a:t>most</a:t>
             </a:r>
             <a:endParaRPr lang="en-US" sz="850" dirty="0"/>
           </a:p>
@@ -19270,7 +19270,7 @@
                 <a:ea typeface="Calibri" pitchFamily="34" charset="-122"/>
                 <a:cs typeface="Calibri" pitchFamily="34" charset="-120"/>
               </a:rPr>
-              <a:t>Word Labs  •  wordlabs.app  •  Root: 'slow' = not fast, moving carefully</a:t>
+              <a:t>Word Labs  •  wordlabs.app  •  Root: 'slow' = not fast</a:t>
             </a:r>
             <a:endParaRPr lang="en-US" sz="800" dirty="0"/>
           </a:p>
@@ -19409,7 +19409,7 @@
                 <a:ea typeface="Trebuchet MS" pitchFamily="34" charset="-122"/>
                 <a:cs typeface="Trebuchet MS" pitchFamily="34" charset="-120"/>
               </a:rPr>
-              <a:t>slowdown</a:t>
+              <a:t>slowest</a:t>
             </a:r>
             <a:endParaRPr lang="en-US" sz="2800" dirty="0"/>
           </a:p>
@@ -19660,7 +19660,7 @@
                 <a:ea typeface="Trebuchet MS" pitchFamily="34" charset="-122"/>
                 <a:cs typeface="Trebuchet MS" pitchFamily="34" charset="-120"/>
               </a:rPr>
-              <a:t>down</a:t>
+              <a:t>est</a:t>
             </a:r>
             <a:endParaRPr lang="en-US" sz="1300" dirty="0"/>
           </a:p>
@@ -19699,7 +19699,7 @@
                 <a:ea typeface="Calibri" pitchFamily="34" charset="-122"/>
                 <a:cs typeface="Calibri" pitchFamily="34" charset="-120"/>
               </a:rPr>
-              <a:t>reduction or decrease</a:t>
+              <a:t>most</a:t>
             </a:r>
             <a:endParaRPr lang="en-US" sz="850" dirty="0"/>
           </a:p>
@@ -19963,7 +19963,7 @@
                 <a:ea typeface="Trebuchet MS" pitchFamily="34" charset="-122"/>
                 <a:cs typeface="Trebuchet MS" pitchFamily="34" charset="-120"/>
               </a:rPr>
-              <a:t>down</a:t>
+              <a:t>est</a:t>
             </a:r>
             <a:endParaRPr lang="en-US" sz="1400" dirty="0"/>
           </a:p>
@@ -20387,7 +20387,7 @@
                 <a:ea typeface="Calibri" pitchFamily="34" charset="-122"/>
                 <a:cs typeface="Calibri" pitchFamily="34" charset="-120"/>
               </a:rPr>
-              <a:t>Word Labs  •  wordlabs.app  •  Root: 'slow' = not fast, moving carefully</a:t>
+              <a:t>Word Labs  •  wordlabs.app  •  Root: 'slow' = not fast</a:t>
             </a:r>
             <a:endParaRPr lang="en-US" sz="800" dirty="0"/>
           </a:p>
@@ -20526,7 +20526,7 @@
                 <a:ea typeface="Trebuchet MS" pitchFamily="34" charset="-122"/>
                 <a:cs typeface="Trebuchet MS" pitchFamily="34" charset="-120"/>
               </a:rPr>
-              <a:t>slowdown</a:t>
+              <a:t>slowest</a:t>
             </a:r>
             <a:endParaRPr lang="en-US" sz="2800" dirty="0"/>
           </a:p>
@@ -20777,7 +20777,7 @@
                 <a:ea typeface="Trebuchet MS" pitchFamily="34" charset="-122"/>
                 <a:cs typeface="Trebuchet MS" pitchFamily="34" charset="-120"/>
               </a:rPr>
-              <a:t>down</a:t>
+              <a:t>est</a:t>
             </a:r>
             <a:endParaRPr lang="en-US" sz="1300" dirty="0"/>
           </a:p>
@@ -20816,7 +20816,7 @@
                 <a:ea typeface="Calibri" pitchFamily="34" charset="-122"/>
                 <a:cs typeface="Calibri" pitchFamily="34" charset="-120"/>
               </a:rPr>
-              <a:t>reduction or decrease</a:t>
+              <a:t>most</a:t>
             </a:r>
             <a:endParaRPr lang="en-US" sz="850" dirty="0"/>
           </a:p>
@@ -21080,7 +21080,7 @@
                 <a:ea typeface="Trebuchet MS" pitchFamily="34" charset="-122"/>
                 <a:cs typeface="Trebuchet MS" pitchFamily="34" charset="-120"/>
               </a:rPr>
-              <a:t>down</a:t>
+              <a:t>est</a:t>
             </a:r>
             <a:endParaRPr lang="en-US" sz="1400" dirty="0"/>
           </a:p>
@@ -21187,7 +21187,7 @@
         </p:nvSpPr>
         <p:spPr>
           <a:xfrm>
-            <a:off x="2427732" y="4169664"/>
+            <a:off x="2254649" y="4169664"/>
             <a:ext cx="685800" cy="475488"/>
           </a:xfrm>
           <a:prstGeom prst="rect">
@@ -21214,7 +21214,7 @@
         </p:nvSpPr>
         <p:spPr>
           <a:xfrm>
-            <a:off x="2427732" y="4169664"/>
+            <a:off x="2254649" y="4169664"/>
             <a:ext cx="685800" cy="475488"/>
           </a:xfrm>
           <a:prstGeom prst="rect">
@@ -21239,7 +21239,7 @@
                 <a:ea typeface="Trebuchet MS" pitchFamily="34" charset="-122"/>
                 <a:cs typeface="Trebuchet MS" pitchFamily="34" charset="-120"/>
               </a:rPr>
-              <a:t>sl</a:t>
+              <a:t>s</a:t>
             </a:r>
             <a:endParaRPr lang="en-US" sz="900" dirty="0"/>
           </a:p>
@@ -21253,7 +21253,7 @@
         </p:nvSpPr>
         <p:spPr>
           <a:xfrm>
-            <a:off x="3639312" y="4169664"/>
+            <a:off x="3293146" y="4169664"/>
             <a:ext cx="685800" cy="475488"/>
           </a:xfrm>
           <a:prstGeom prst="rect">
@@ -21280,7 +21280,7 @@
         </p:nvSpPr>
         <p:spPr>
           <a:xfrm>
-            <a:off x="3639312" y="4169664"/>
+            <a:off x="3293146" y="4169664"/>
             <a:ext cx="685800" cy="475488"/>
           </a:xfrm>
           <a:prstGeom prst="rect">
@@ -21305,7 +21305,7 @@
                 <a:ea typeface="Trebuchet MS" pitchFamily="34" charset="-122"/>
                 <a:cs typeface="Trebuchet MS" pitchFamily="34" charset="-120"/>
               </a:rPr>
-              <a:t>ow</a:t>
+              <a:t>l</a:t>
             </a:r>
             <a:endParaRPr lang="en-US" sz="900" dirty="0"/>
           </a:p>
@@ -21319,7 +21319,7 @@
         </p:nvSpPr>
         <p:spPr>
           <a:xfrm>
-            <a:off x="4850892" y="4169664"/>
+            <a:off x="4331643" y="4169664"/>
             <a:ext cx="685800" cy="475488"/>
           </a:xfrm>
           <a:prstGeom prst="rect">
@@ -21346,7 +21346,7 @@
         </p:nvSpPr>
         <p:spPr>
           <a:xfrm>
-            <a:off x="4850892" y="4169664"/>
+            <a:off x="4331643" y="4169664"/>
             <a:ext cx="685800" cy="475488"/>
           </a:xfrm>
           <a:prstGeom prst="rect">
@@ -21371,7 +21371,7 @@
                 <a:ea typeface="Trebuchet MS" pitchFamily="34" charset="-122"/>
                 <a:cs typeface="Trebuchet MS" pitchFamily="34" charset="-120"/>
               </a:rPr>
-              <a:t>d</a:t>
+              <a:t>ow</a:t>
             </a:r>
             <a:endParaRPr lang="en-US" sz="900" dirty="0"/>
           </a:p>
@@ -21385,7 +21385,7 @@
         </p:nvSpPr>
         <p:spPr>
           <a:xfrm>
-            <a:off x="6062472" y="4169664"/>
+            <a:off x="5370141" y="4169664"/>
             <a:ext cx="685800" cy="475488"/>
           </a:xfrm>
           <a:prstGeom prst="rect">
@@ -21412,7 +21412,7 @@
         </p:nvSpPr>
         <p:spPr>
           <a:xfrm>
-            <a:off x="6062472" y="4169664"/>
+            <a:off x="5370141" y="4169664"/>
             <a:ext cx="685800" cy="475488"/>
           </a:xfrm>
           <a:prstGeom prst="rect">
@@ -21437,7 +21437,7 @@
                 <a:ea typeface="Trebuchet MS" pitchFamily="34" charset="-122"/>
                 <a:cs typeface="Trebuchet MS" pitchFamily="34" charset="-120"/>
               </a:rPr>
-              <a:t>ow</a:t>
+              <a:t>e</a:t>
             </a:r>
             <a:endParaRPr lang="en-US" sz="900" dirty="0"/>
           </a:p>
@@ -21451,7 +21451,7 @@
         </p:nvSpPr>
         <p:spPr>
           <a:xfrm>
-            <a:off x="7274052" y="4169664"/>
+            <a:off x="6408638" y="4169664"/>
             <a:ext cx="685800" cy="475488"/>
           </a:xfrm>
           <a:prstGeom prst="rect">
@@ -21478,7 +21478,7 @@
         </p:nvSpPr>
         <p:spPr>
           <a:xfrm>
-            <a:off x="7274052" y="4169664"/>
+            <a:off x="6408638" y="4169664"/>
             <a:ext cx="685800" cy="475488"/>
           </a:xfrm>
           <a:prstGeom prst="rect">
@@ -21503,7 +21503,73 @@
                 <a:ea typeface="Trebuchet MS" pitchFamily="34" charset="-122"/>
                 <a:cs typeface="Trebuchet MS" pitchFamily="34" charset="-120"/>
               </a:rPr>
-              <a:t>n</a:t>
+              <a:t>s</a:t>
+            </a:r>
+            <a:endParaRPr lang="en-US" sz="900" dirty="0"/>
+          </a:p>
+        </p:txBody>
+      </p:sp>
+      <p:sp>
+        <p:nvSpPr>
+          <p:cNvPr id="43" name="Shape 41"/>
+          <p:cNvSpPr/>
+          <p:nvPr/>
+        </p:nvSpPr>
+        <p:spPr>
+          <a:xfrm>
+            <a:off x="7447135" y="4169664"/>
+            <a:ext cx="685800" cy="475488"/>
+          </a:xfrm>
+          <a:prstGeom prst="rect">
+            <a:avLst>
+              <a:gd name="adj" fmla="val 7692"/>
+            </a:avLst>
+          </a:prstGeom>
+          <a:solidFill>
+            <a:srgbClr val="FFFFFF"/>
+          </a:solidFill>
+          <a:ln w="12700">
+            <a:solidFill>
+              <a:srgbClr val="DB2777"/>
+            </a:solidFill>
+            <a:prstDash val="solid"/>
+          </a:ln>
+        </p:spPr>
+      </p:sp>
+      <p:sp>
+        <p:nvSpPr>
+          <p:cNvPr id="44" name="Text 42"/>
+          <p:cNvSpPr/>
+          <p:nvPr/>
+        </p:nvSpPr>
+        <p:spPr>
+          <a:xfrm>
+            <a:off x="7447135" y="4169664"/>
+            <a:ext cx="685800" cy="475488"/>
+          </a:xfrm>
+          <a:prstGeom prst="rect">
+            <a:avLst/>
+          </a:prstGeom>
+          <a:noFill/>
+          <a:ln/>
+        </p:spPr>
+        <p:txBody>
+          <a:bodyPr wrap="square" lIns="0" tIns="0" rIns="0" bIns="0" rtlCol="0" anchor="ctr"/>
+          <a:lstStyle/>
+          <a:p>
+            <a:pPr algn="ctr" indent="0" marL="0">
+              <a:buNone/>
+            </a:pPr>
+            <a:r>
+              <a:rPr lang="en-US" sz="900" b="1" dirty="0">
+                <a:solidFill>
+                  <a:srgbClr val="9D174D"/>
+                </a:solidFill>
+                <a:latin typeface="Trebuchet MS" pitchFamily="34" charset="0"/>
+                <a:ea typeface="Trebuchet MS" pitchFamily="34" charset="-122"/>
+                <a:cs typeface="Trebuchet MS" pitchFamily="34" charset="-120"/>
+              </a:rPr>
+              <a:t>t</a:t>
             </a:r>
             <a:endParaRPr lang="en-US" sz="900" dirty="0"/>
           </a:p>
@@ -21795,7 +21861,7 @@
                 <a:ea typeface="Calibri" pitchFamily="34" charset="-122"/>
                 <a:cs typeface="Calibri" pitchFamily="34" charset="-120"/>
               </a:rPr>
-              <a:t>Word Labs  •  wordlabs.app  •  Root: 'slow' = not fast, moving carefully</a:t>
+              <a:t>Word Labs  •  wordlabs.app  •  Root: 'slow' = not fast</a:t>
             </a:r>
             <a:endParaRPr lang="en-US" sz="800" dirty="0"/>
           </a:p>
@@ -21934,7 +22000,7 @@
                 <a:ea typeface="Trebuchet MS" pitchFamily="34" charset="-122"/>
                 <a:cs typeface="Trebuchet MS" pitchFamily="34" charset="-120"/>
               </a:rPr>
-              <a:t>slower</a:t>
+              <a:t>slowing</a:t>
             </a:r>
             <a:endParaRPr lang="en-US" sz="2800" dirty="0"/>
           </a:p>
@@ -22622,7 +22688,7 @@
                 <a:ea typeface="Calibri" pitchFamily="34" charset="-122"/>
                 <a:cs typeface="Calibri" pitchFamily="34" charset="-120"/>
               </a:rPr>
-              <a:t>Word Labs  •  wordlabs.app  •  Root: 'slow' = not fast, moving carefully</a:t>
+              <a:t>Word Labs  •  wordlabs.app  •  Root: 'slow' = not fast</a:t>
             </a:r>
             <a:endParaRPr lang="en-US" sz="800" dirty="0"/>
           </a:p>
@@ -22761,7 +22827,7 @@
                 <a:ea typeface="Trebuchet MS" pitchFamily="34" charset="-122"/>
                 <a:cs typeface="Trebuchet MS" pitchFamily="34" charset="-120"/>
               </a:rPr>
-              <a:t>slower</a:t>
+              <a:t>slowing</a:t>
             </a:r>
             <a:endParaRPr lang="en-US" sz="2800" dirty="0"/>
           </a:p>
@@ -23012,7 +23078,7 @@
                 <a:ea typeface="Trebuchet MS" pitchFamily="34" charset="-122"/>
                 <a:cs typeface="Trebuchet MS" pitchFamily="34" charset="-120"/>
               </a:rPr>
-              <a:t>er</a:t>
+              <a:t>ing</a:t>
             </a:r>
             <a:endParaRPr lang="en-US" sz="1300" dirty="0"/>
           </a:p>
@@ -23051,7 +23117,7 @@
                 <a:ea typeface="Calibri" pitchFamily="34" charset="-122"/>
                 <a:cs typeface="Calibri" pitchFamily="34" charset="-120"/>
               </a:rPr>
-              <a:t>more, used for comparison</a:t>
+              <a:t>happening now</a:t>
             </a:r>
             <a:endParaRPr lang="en-US" sz="850" dirty="0"/>
           </a:p>
@@ -23607,7 +23673,7 @@
                 <a:ea typeface="Calibri" pitchFamily="34" charset="-122"/>
                 <a:cs typeface="Calibri" pitchFamily="34" charset="-120"/>
               </a:rPr>
-              <a:t>Word Labs  •  wordlabs.app  •  Root: 'slow' = not fast, moving carefully</a:t>
+              <a:t>Word Labs  •  wordlabs.app  •  Root: 'slow' = not fast</a:t>
             </a:r>
             <a:endParaRPr lang="en-US" sz="800" dirty="0"/>
           </a:p>
@@ -23680,7 +23746,7 @@
                 <a:ea typeface="Trebuchet MS" pitchFamily="34" charset="-122"/>
                 <a:cs typeface="Trebuchet MS" pitchFamily="34" charset="-120"/>
               </a:rPr>
-              <a:t>We are learning that the root 'slow' means 'not fast, moving carefully'.</a:t>
+              <a:t>We are learning that the root 'slow' means 'not fast'.</a:t>
             </a:r>
             <a:endParaRPr lang="en-US" sz="2000" dirty="0"/>
           </a:p>
@@ -24326,7 +24392,7 @@
                 <a:ea typeface="Calibri" pitchFamily="34" charset="-122"/>
                 <a:cs typeface="Calibri" pitchFamily="34" charset="-120"/>
               </a:rPr>
-              <a:t>Word Labs  •  wordlabs.app  •  Root: 'slow' = not fast, moving carefully</a:t>
+              <a:t>Word Labs  •  wordlabs.app  •  Root: 'slow' = not fast</a:t>
             </a:r>
             <a:endParaRPr lang="en-US" sz="800" dirty="0"/>
           </a:p>
@@ -24465,7 +24531,7 @@
                 <a:ea typeface="Trebuchet MS" pitchFamily="34" charset="-122"/>
                 <a:cs typeface="Trebuchet MS" pitchFamily="34" charset="-120"/>
               </a:rPr>
-              <a:t>slower</a:t>
+              <a:t>slowing</a:t>
             </a:r>
             <a:endParaRPr lang="en-US" sz="2800" dirty="0"/>
           </a:p>
@@ -24716,7 +24782,7 @@
                 <a:ea typeface="Trebuchet MS" pitchFamily="34" charset="-122"/>
                 <a:cs typeface="Trebuchet MS" pitchFamily="34" charset="-120"/>
               </a:rPr>
-              <a:t>er</a:t>
+              <a:t>ing</a:t>
             </a:r>
             <a:endParaRPr lang="en-US" sz="1300" dirty="0"/>
           </a:p>
@@ -24755,7 +24821,7 @@
                 <a:ea typeface="Calibri" pitchFamily="34" charset="-122"/>
                 <a:cs typeface="Calibri" pitchFamily="34" charset="-120"/>
               </a:rPr>
-              <a:t>more, used for comparison</a:t>
+              <a:t>happening now</a:t>
             </a:r>
             <a:endParaRPr lang="en-US" sz="850" dirty="0"/>
           </a:p>
@@ -25019,7 +25085,7 @@
                 <a:ea typeface="Trebuchet MS" pitchFamily="34" charset="-122"/>
                 <a:cs typeface="Trebuchet MS" pitchFamily="34" charset="-120"/>
               </a:rPr>
-              <a:t>er</a:t>
+              <a:t>ing</a:t>
             </a:r>
             <a:endParaRPr lang="en-US" sz="1400" dirty="0"/>
           </a:p>
@@ -25443,7 +25509,7 @@
                 <a:ea typeface="Calibri" pitchFamily="34" charset="-122"/>
                 <a:cs typeface="Calibri" pitchFamily="34" charset="-120"/>
               </a:rPr>
-              <a:t>Word Labs  •  wordlabs.app  •  Root: 'slow' = not fast, moving carefully</a:t>
+              <a:t>Word Labs  •  wordlabs.app  •  Root: 'slow' = not fast</a:t>
             </a:r>
             <a:endParaRPr lang="en-US" sz="800" dirty="0"/>
           </a:p>
@@ -25582,7 +25648,7 @@
                 <a:ea typeface="Trebuchet MS" pitchFamily="34" charset="-122"/>
                 <a:cs typeface="Trebuchet MS" pitchFamily="34" charset="-120"/>
               </a:rPr>
-              <a:t>slower</a:t>
+              <a:t>slowing</a:t>
             </a:r>
             <a:endParaRPr lang="en-US" sz="2800" dirty="0"/>
           </a:p>
@@ -25833,7 +25899,7 @@
                 <a:ea typeface="Trebuchet MS" pitchFamily="34" charset="-122"/>
                 <a:cs typeface="Trebuchet MS" pitchFamily="34" charset="-120"/>
               </a:rPr>
-              <a:t>er</a:t>
+              <a:t>ing</a:t>
             </a:r>
             <a:endParaRPr lang="en-US" sz="1300" dirty="0"/>
           </a:p>
@@ -25872,7 +25938,7 @@
                 <a:ea typeface="Calibri" pitchFamily="34" charset="-122"/>
                 <a:cs typeface="Calibri" pitchFamily="34" charset="-120"/>
               </a:rPr>
-              <a:t>more, used for comparison</a:t>
+              <a:t>happening now</a:t>
             </a:r>
             <a:endParaRPr lang="en-US" sz="850" dirty="0"/>
           </a:p>
@@ -26136,7 +26202,7 @@
                 <a:ea typeface="Trebuchet MS" pitchFamily="34" charset="-122"/>
                 <a:cs typeface="Trebuchet MS" pitchFamily="34" charset="-120"/>
               </a:rPr>
-              <a:t>er</a:t>
+              <a:t>ing</a:t>
             </a:r>
             <a:endParaRPr lang="en-US" sz="1400" dirty="0"/>
           </a:p>
@@ -26243,7 +26309,7 @@
         </p:nvSpPr>
         <p:spPr>
           <a:xfrm>
-            <a:off x="3033522" y="4169664"/>
+            <a:off x="2427732" y="4169664"/>
             <a:ext cx="685800" cy="475488"/>
           </a:xfrm>
           <a:prstGeom prst="rect">
@@ -26270,7 +26336,7 @@
         </p:nvSpPr>
         <p:spPr>
           <a:xfrm>
-            <a:off x="3033522" y="4169664"/>
+            <a:off x="2427732" y="4169664"/>
             <a:ext cx="685800" cy="475488"/>
           </a:xfrm>
           <a:prstGeom prst="rect">
@@ -26287,7 +26353,7 @@
               <a:buNone/>
             </a:pPr>
             <a:r>
-              <a:rPr lang="en-US" sz="1000" b="1" dirty="0">
+              <a:rPr lang="en-US" sz="900" b="1" dirty="0">
                 <a:solidFill>
                   <a:srgbClr val="9D174D"/>
                 </a:solidFill>
@@ -26295,9 +26361,9 @@
                 <a:ea typeface="Trebuchet MS" pitchFamily="34" charset="-122"/>
                 <a:cs typeface="Trebuchet MS" pitchFamily="34" charset="-120"/>
               </a:rPr>
-              <a:t>sl</a:t>
-            </a:r>
-            <a:endParaRPr lang="en-US" sz="1000" dirty="0"/>
+              <a:t>s</a:t>
+            </a:r>
+            <a:endParaRPr lang="en-US" sz="900" dirty="0"/>
           </a:p>
         </p:txBody>
       </p:sp>
@@ -26309,7 +26375,7 @@
         </p:nvSpPr>
         <p:spPr>
           <a:xfrm>
-            <a:off x="4850892" y="4169664"/>
+            <a:off x="3639312" y="4169664"/>
             <a:ext cx="685800" cy="475488"/>
           </a:xfrm>
           <a:prstGeom prst="rect">
@@ -26336,7 +26402,7 @@
         </p:nvSpPr>
         <p:spPr>
           <a:xfrm>
-            <a:off x="4850892" y="4169664"/>
+            <a:off x="3639312" y="4169664"/>
             <a:ext cx="685800" cy="475488"/>
           </a:xfrm>
           <a:prstGeom prst="rect">
@@ -26353,7 +26419,7 @@
               <a:buNone/>
             </a:pPr>
             <a:r>
-              <a:rPr lang="en-US" sz="1000" b="1" dirty="0">
+              <a:rPr lang="en-US" sz="900" b="1" dirty="0">
                 <a:solidFill>
                   <a:srgbClr val="9D174D"/>
                 </a:solidFill>
@@ -26361,9 +26427,9 @@
                 <a:ea typeface="Trebuchet MS" pitchFamily="34" charset="-122"/>
                 <a:cs typeface="Trebuchet MS" pitchFamily="34" charset="-120"/>
               </a:rPr>
-              <a:t>ow</a:t>
-            </a:r>
-            <a:endParaRPr lang="en-US" sz="1000" dirty="0"/>
+              <a:t>l</a:t>
+            </a:r>
+            <a:endParaRPr lang="en-US" sz="900" dirty="0"/>
           </a:p>
         </p:txBody>
       </p:sp>
@@ -26375,7 +26441,7 @@
         </p:nvSpPr>
         <p:spPr>
           <a:xfrm>
-            <a:off x="6668262" y="4169664"/>
+            <a:off x="4850892" y="4169664"/>
             <a:ext cx="685800" cy="475488"/>
           </a:xfrm>
           <a:prstGeom prst="rect">
@@ -26402,7 +26468,7 @@
         </p:nvSpPr>
         <p:spPr>
           <a:xfrm>
-            <a:off x="6668262" y="4169664"/>
+            <a:off x="4850892" y="4169664"/>
             <a:ext cx="685800" cy="475488"/>
           </a:xfrm>
           <a:prstGeom prst="rect">
@@ -26419,7 +26485,7 @@
               <a:buNone/>
             </a:pPr>
             <a:r>
-              <a:rPr lang="en-US" sz="1000" b="1" dirty="0">
+              <a:rPr lang="en-US" sz="900" b="1" dirty="0">
                 <a:solidFill>
                   <a:srgbClr val="9D174D"/>
                 </a:solidFill>
@@ -26427,9 +26493,141 @@
                 <a:ea typeface="Trebuchet MS" pitchFamily="34" charset="-122"/>
                 <a:cs typeface="Trebuchet MS" pitchFamily="34" charset="-120"/>
               </a:rPr>
-              <a:t>er</a:t>
-            </a:r>
-            <a:endParaRPr lang="en-US" sz="1000" dirty="0"/>
+              <a:t>ow</a:t>
+            </a:r>
+            <a:endParaRPr lang="en-US" sz="900" dirty="0"/>
+          </a:p>
+        </p:txBody>
+      </p:sp>
+      <p:sp>
+        <p:nvSpPr>
+          <p:cNvPr id="39" name="Shape 37"/>
+          <p:cNvSpPr/>
+          <p:nvPr/>
+        </p:nvSpPr>
+        <p:spPr>
+          <a:xfrm>
+            <a:off x="6062472" y="4169664"/>
+            <a:ext cx="685800" cy="475488"/>
+          </a:xfrm>
+          <a:prstGeom prst="rect">
+            <a:avLst>
+              <a:gd name="adj" fmla="val 7692"/>
+            </a:avLst>
+          </a:prstGeom>
+          <a:solidFill>
+            <a:srgbClr val="FFFFFF"/>
+          </a:solidFill>
+          <a:ln w="12700">
+            <a:solidFill>
+              <a:srgbClr val="DB2777"/>
+            </a:solidFill>
+            <a:prstDash val="solid"/>
+          </a:ln>
+        </p:spPr>
+      </p:sp>
+      <p:sp>
+        <p:nvSpPr>
+          <p:cNvPr id="40" name="Text 38"/>
+          <p:cNvSpPr/>
+          <p:nvPr/>
+        </p:nvSpPr>
+        <p:spPr>
+          <a:xfrm>
+            <a:off x="6062472" y="4169664"/>
+            <a:ext cx="685800" cy="475488"/>
+          </a:xfrm>
+          <a:prstGeom prst="rect">
+            <a:avLst/>
+          </a:prstGeom>
+          <a:noFill/>
+          <a:ln/>
+        </p:spPr>
+        <p:txBody>
+          <a:bodyPr wrap="square" lIns="0" tIns="0" rIns="0" bIns="0" rtlCol="0" anchor="ctr"/>
+          <a:lstStyle/>
+          <a:p>
+            <a:pPr algn="ctr" indent="0" marL="0">
+              <a:buNone/>
+            </a:pPr>
+            <a:r>
+              <a:rPr lang="en-US" sz="900" b="1" dirty="0">
+                <a:solidFill>
+                  <a:srgbClr val="9D174D"/>
+                </a:solidFill>
+                <a:latin typeface="Trebuchet MS" pitchFamily="34" charset="0"/>
+                <a:ea typeface="Trebuchet MS" pitchFamily="34" charset="-122"/>
+                <a:cs typeface="Trebuchet MS" pitchFamily="34" charset="-120"/>
+              </a:rPr>
+              <a:t>i</a:t>
+            </a:r>
+            <a:endParaRPr lang="en-US" sz="900" dirty="0"/>
+          </a:p>
+        </p:txBody>
+      </p:sp>
+      <p:sp>
+        <p:nvSpPr>
+          <p:cNvPr id="41" name="Shape 39"/>
+          <p:cNvSpPr/>
+          <p:nvPr/>
+        </p:nvSpPr>
+        <p:spPr>
+          <a:xfrm>
+            <a:off x="7274052" y="4169664"/>
+            <a:ext cx="685800" cy="475488"/>
+          </a:xfrm>
+          <a:prstGeom prst="rect">
+            <a:avLst>
+              <a:gd name="adj" fmla="val 7692"/>
+            </a:avLst>
+          </a:prstGeom>
+          <a:solidFill>
+            <a:srgbClr val="FFFFFF"/>
+          </a:solidFill>
+          <a:ln w="12700">
+            <a:solidFill>
+              <a:srgbClr val="DB2777"/>
+            </a:solidFill>
+            <a:prstDash val="solid"/>
+          </a:ln>
+        </p:spPr>
+      </p:sp>
+      <p:sp>
+        <p:nvSpPr>
+          <p:cNvPr id="42" name="Text 40"/>
+          <p:cNvSpPr/>
+          <p:nvPr/>
+        </p:nvSpPr>
+        <p:spPr>
+          <a:xfrm>
+            <a:off x="7274052" y="4169664"/>
+            <a:ext cx="685800" cy="475488"/>
+          </a:xfrm>
+          <a:prstGeom prst="rect">
+            <a:avLst/>
+          </a:prstGeom>
+          <a:noFill/>
+          <a:ln/>
+        </p:spPr>
+        <p:txBody>
+          <a:bodyPr wrap="square" lIns="0" tIns="0" rIns="0" bIns="0" rtlCol="0" anchor="ctr"/>
+          <a:lstStyle/>
+          <a:p>
+            <a:pPr algn="ctr" indent="0" marL="0">
+              <a:buNone/>
+            </a:pPr>
+            <a:r>
+              <a:rPr lang="en-US" sz="900" b="1" dirty="0">
+                <a:solidFill>
+                  <a:srgbClr val="9D174D"/>
+                </a:solidFill>
+                <a:latin typeface="Trebuchet MS" pitchFamily="34" charset="0"/>
+                <a:ea typeface="Trebuchet MS" pitchFamily="34" charset="-122"/>
+                <a:cs typeface="Trebuchet MS" pitchFamily="34" charset="-120"/>
+              </a:rPr>
+              <a:t>ng</a:t>
+            </a:r>
+            <a:endParaRPr lang="en-US" sz="900" dirty="0"/>
           </a:p>
         </p:txBody>
       </p:sp>
@@ -26719,7 +26917,7 @@
                 <a:ea typeface="Calibri" pitchFamily="34" charset="-122"/>
                 <a:cs typeface="Calibri" pitchFamily="34" charset="-120"/>
               </a:rPr>
-              <a:t>Word Labs  •  wordlabs.app  •  Root: 'slow' = not fast, moving carefully</a:t>
+              <a:t>Word Labs  •  wordlabs.app  •  Root: 'slow' = not fast</a:t>
             </a:r>
             <a:endParaRPr lang="en-US" sz="800" dirty="0"/>
           </a:p>
@@ -26858,7 +27056,7 @@
                 <a:ea typeface="Trebuchet MS" pitchFamily="34" charset="-122"/>
                 <a:cs typeface="Trebuchet MS" pitchFamily="34" charset="-120"/>
               </a:rPr>
-              <a:t>slowest</a:t>
+              <a:t>slowness</a:t>
             </a:r>
             <a:endParaRPr lang="en-US" sz="2800" dirty="0"/>
           </a:p>
@@ -27546,7 +27744,7 @@
                 <a:ea typeface="Calibri" pitchFamily="34" charset="-122"/>
                 <a:cs typeface="Calibri" pitchFamily="34" charset="-120"/>
               </a:rPr>
-              <a:t>Word Labs  •  wordlabs.app  •  Root: 'slow' = not fast, moving carefully</a:t>
+              <a:t>Word Labs  •  wordlabs.app  •  Root: 'slow' = not fast</a:t>
             </a:r>
             <a:endParaRPr lang="en-US" sz="800" dirty="0"/>
           </a:p>
@@ -27685,7 +27883,7 @@
                 <a:ea typeface="Trebuchet MS" pitchFamily="34" charset="-122"/>
                 <a:cs typeface="Trebuchet MS" pitchFamily="34" charset="-120"/>
               </a:rPr>
-              <a:t>slowest</a:t>
+              <a:t>slowness</a:t>
             </a:r>
             <a:endParaRPr lang="en-US" sz="2800" dirty="0"/>
           </a:p>
@@ -27936,7 +28134,7 @@
                 <a:ea typeface="Trebuchet MS" pitchFamily="34" charset="-122"/>
                 <a:cs typeface="Trebuchet MS" pitchFamily="34" charset="-120"/>
               </a:rPr>
-              <a:t>est</a:t>
+              <a:t>ness</a:t>
             </a:r>
             <a:endParaRPr lang="en-US" sz="1300" dirty="0"/>
           </a:p>
@@ -27975,7 +28173,7 @@
                 <a:ea typeface="Calibri" pitchFamily="34" charset="-122"/>
                 <a:cs typeface="Calibri" pitchFamily="34" charset="-120"/>
               </a:rPr>
-              <a:t>most, the highest degree</a:t>
+              <a:t>state of</a:t>
             </a:r>
             <a:endParaRPr lang="en-US" sz="850" dirty="0"/>
           </a:p>
@@ -28531,7 +28729,7 @@
                 <a:ea typeface="Calibri" pitchFamily="34" charset="-122"/>
                 <a:cs typeface="Calibri" pitchFamily="34" charset="-120"/>
               </a:rPr>
-              <a:t>Word Labs  •  wordlabs.app  •  Root: 'slow' = not fast, moving carefully</a:t>
+              <a:t>Word Labs  •  wordlabs.app  •  Root: 'slow' = not fast</a:t>
             </a:r>
             <a:endParaRPr lang="en-US" sz="800" dirty="0"/>
           </a:p>
@@ -28670,7 +28868,7 @@
                 <a:ea typeface="Trebuchet MS" pitchFamily="34" charset="-122"/>
                 <a:cs typeface="Trebuchet MS" pitchFamily="34" charset="-120"/>
               </a:rPr>
-              <a:t>slowest</a:t>
+              <a:t>slowness</a:t>
             </a:r>
             <a:endParaRPr lang="en-US" sz="2800" dirty="0"/>
           </a:p>
@@ -28921,7 +29119,7 @@
                 <a:ea typeface="Trebuchet MS" pitchFamily="34" charset="-122"/>
                 <a:cs typeface="Trebuchet MS" pitchFamily="34" charset="-120"/>
               </a:rPr>
-              <a:t>est</a:t>
+              <a:t>ness</a:t>
             </a:r>
             <a:endParaRPr lang="en-US" sz="1300" dirty="0"/>
           </a:p>
@@ -28960,7 +29158,7 @@
                 <a:ea typeface="Calibri" pitchFamily="34" charset="-122"/>
                 <a:cs typeface="Calibri" pitchFamily="34" charset="-120"/>
               </a:rPr>
-              <a:t>most, the highest degree</a:t>
+              <a:t>state of</a:t>
             </a:r>
             <a:endParaRPr lang="en-US" sz="850" dirty="0"/>
           </a:p>
@@ -29224,7 +29422,7 @@
                 <a:ea typeface="Trebuchet MS" pitchFamily="34" charset="-122"/>
                 <a:cs typeface="Trebuchet MS" pitchFamily="34" charset="-120"/>
               </a:rPr>
-              <a:t>est</a:t>
+              <a:t>ness</a:t>
             </a:r>
             <a:endParaRPr lang="en-US" sz="1400" dirty="0"/>
           </a:p>
@@ -29648,7 +29846,7 @@
                 <a:ea typeface="Calibri" pitchFamily="34" charset="-122"/>
                 <a:cs typeface="Calibri" pitchFamily="34" charset="-120"/>
               </a:rPr>
-              <a:t>Word Labs  •  wordlabs.app  •  Root: 'slow' = not fast, moving carefully</a:t>
+              <a:t>Word Labs  •  wordlabs.app  •  Root: 'slow' = not fast</a:t>
             </a:r>
             <a:endParaRPr lang="en-US" sz="800" dirty="0"/>
           </a:p>
@@ -29787,7 +29985,7 @@
                 <a:ea typeface="Trebuchet MS" pitchFamily="34" charset="-122"/>
                 <a:cs typeface="Trebuchet MS" pitchFamily="34" charset="-120"/>
               </a:rPr>
-              <a:t>slowest</a:t>
+              <a:t>slowness</a:t>
             </a:r>
             <a:endParaRPr lang="en-US" sz="2800" dirty="0"/>
           </a:p>
@@ -30038,7 +30236,7 @@
                 <a:ea typeface="Trebuchet MS" pitchFamily="34" charset="-122"/>
                 <a:cs typeface="Trebuchet MS" pitchFamily="34" charset="-120"/>
               </a:rPr>
-              <a:t>est</a:t>
+              <a:t>ness</a:t>
             </a:r>
             <a:endParaRPr lang="en-US" sz="1300" dirty="0"/>
           </a:p>
@@ -30077,7 +30275,7 @@
                 <a:ea typeface="Calibri" pitchFamily="34" charset="-122"/>
                 <a:cs typeface="Calibri" pitchFamily="34" charset="-120"/>
               </a:rPr>
-              <a:t>most, the highest degree</a:t>
+              <a:t>state of</a:t>
             </a:r>
             <a:endParaRPr lang="en-US" sz="850" dirty="0"/>
           </a:p>
@@ -30341,7 +30539,7 @@
                 <a:ea typeface="Trebuchet MS" pitchFamily="34" charset="-122"/>
                 <a:cs typeface="Trebuchet MS" pitchFamily="34" charset="-120"/>
               </a:rPr>
-              <a:t>est</a:t>
+              <a:t>ness</a:t>
             </a:r>
             <a:endParaRPr lang="en-US" sz="1400" dirty="0"/>
           </a:p>
@@ -30448,7 +30646,7 @@
         </p:nvSpPr>
         <p:spPr>
           <a:xfrm>
-            <a:off x="2427732" y="4169664"/>
+            <a:off x="2124837" y="4169664"/>
             <a:ext cx="685800" cy="475488"/>
           </a:xfrm>
           <a:prstGeom prst="rect">
@@ -30475,7 +30673,7 @@
         </p:nvSpPr>
         <p:spPr>
           <a:xfrm>
-            <a:off x="2427732" y="4169664"/>
+            <a:off x="2124837" y="4169664"/>
             <a:ext cx="685800" cy="475488"/>
           </a:xfrm>
           <a:prstGeom prst="rect">
@@ -30500,7 +30698,7 @@
                 <a:ea typeface="Trebuchet MS" pitchFamily="34" charset="-122"/>
                 <a:cs typeface="Trebuchet MS" pitchFamily="34" charset="-120"/>
               </a:rPr>
-              <a:t>sl</a:t>
+              <a:t>s</a:t>
             </a:r>
             <a:endParaRPr lang="en-US" sz="900" dirty="0"/>
           </a:p>
@@ -30514,7 +30712,7 @@
         </p:nvSpPr>
         <p:spPr>
           <a:xfrm>
-            <a:off x="3639312" y="4169664"/>
+            <a:off x="3033522" y="4169664"/>
             <a:ext cx="685800" cy="475488"/>
           </a:xfrm>
           <a:prstGeom prst="rect">
@@ -30541,7 +30739,7 @@
         </p:nvSpPr>
         <p:spPr>
           <a:xfrm>
-            <a:off x="3639312" y="4169664"/>
+            <a:off x="3033522" y="4169664"/>
             <a:ext cx="685800" cy="475488"/>
           </a:xfrm>
           <a:prstGeom prst="rect">
@@ -30566,7 +30764,7 @@
                 <a:ea typeface="Trebuchet MS" pitchFamily="34" charset="-122"/>
                 <a:cs typeface="Trebuchet MS" pitchFamily="34" charset="-120"/>
               </a:rPr>
-              <a:t>ow</a:t>
+              <a:t>l</a:t>
             </a:r>
             <a:endParaRPr lang="en-US" sz="900" dirty="0"/>
           </a:p>
@@ -30580,7 +30778,7 @@
         </p:nvSpPr>
         <p:spPr>
           <a:xfrm>
-            <a:off x="4850892" y="4169664"/>
+            <a:off x="3942207" y="4169664"/>
             <a:ext cx="685800" cy="475488"/>
           </a:xfrm>
           <a:prstGeom prst="rect">
@@ -30607,7 +30805,7 @@
         </p:nvSpPr>
         <p:spPr>
           <a:xfrm>
-            <a:off x="4850892" y="4169664"/>
+            <a:off x="3942207" y="4169664"/>
             <a:ext cx="685800" cy="475488"/>
           </a:xfrm>
           <a:prstGeom prst="rect">
@@ -30632,7 +30830,7 @@
                 <a:ea typeface="Trebuchet MS" pitchFamily="34" charset="-122"/>
                 <a:cs typeface="Trebuchet MS" pitchFamily="34" charset="-120"/>
               </a:rPr>
-              <a:t>e</a:t>
+              <a:t>ow</a:t>
             </a:r>
             <a:endParaRPr lang="en-US" sz="900" dirty="0"/>
           </a:p>
@@ -30646,7 +30844,7 @@
         </p:nvSpPr>
         <p:spPr>
           <a:xfrm>
-            <a:off x="6062472" y="4169664"/>
+            <a:off x="4850892" y="4169664"/>
             <a:ext cx="685800" cy="475488"/>
           </a:xfrm>
           <a:prstGeom prst="rect">
@@ -30673,7 +30871,7 @@
         </p:nvSpPr>
         <p:spPr>
           <a:xfrm>
-            <a:off x="6062472" y="4169664"/>
+            <a:off x="4850892" y="4169664"/>
             <a:ext cx="685800" cy="475488"/>
           </a:xfrm>
           <a:prstGeom prst="rect">
@@ -30698,7 +30896,7 @@
                 <a:ea typeface="Trebuchet MS" pitchFamily="34" charset="-122"/>
                 <a:cs typeface="Trebuchet MS" pitchFamily="34" charset="-120"/>
               </a:rPr>
-              <a:t>s</a:t>
+              <a:t>n</a:t>
             </a:r>
             <a:endParaRPr lang="en-US" sz="900" dirty="0"/>
           </a:p>
@@ -30712,7 +30910,7 @@
         </p:nvSpPr>
         <p:spPr>
           <a:xfrm>
-            <a:off x="7274052" y="4169664"/>
+            <a:off x="5759577" y="4169664"/>
             <a:ext cx="685800" cy="475488"/>
           </a:xfrm>
           <a:prstGeom prst="rect">
@@ -30739,7 +30937,7 @@
         </p:nvSpPr>
         <p:spPr>
           <a:xfrm>
-            <a:off x="7274052" y="4169664"/>
+            <a:off x="5759577" y="4169664"/>
             <a:ext cx="685800" cy="475488"/>
           </a:xfrm>
           <a:prstGeom prst="rect">
@@ -30764,7 +30962,139 @@
                 <a:ea typeface="Trebuchet MS" pitchFamily="34" charset="-122"/>
                 <a:cs typeface="Trebuchet MS" pitchFamily="34" charset="-120"/>
               </a:rPr>
-              <a:t>t</a:t>
+              <a:t>e</a:t>
+            </a:r>
+            <a:endParaRPr lang="en-US" sz="900" dirty="0"/>
+          </a:p>
+        </p:txBody>
+      </p:sp>
+      <p:sp>
+        <p:nvSpPr>
+          <p:cNvPr id="43" name="Shape 41"/>
+          <p:cNvSpPr/>
+          <p:nvPr/>
+        </p:nvSpPr>
+        <p:spPr>
+          <a:xfrm>
+            <a:off x="6668262" y="4169664"/>
+            <a:ext cx="685800" cy="475488"/>
+          </a:xfrm>
+          <a:prstGeom prst="rect">
+            <a:avLst>
+              <a:gd name="adj" fmla="val 7692"/>
+            </a:avLst>
+          </a:prstGeom>
+          <a:solidFill>
+            <a:srgbClr val="FFFFFF"/>
+          </a:solidFill>
+          <a:ln w="12700">
+            <a:solidFill>
+              <a:srgbClr val="DB2777"/>
+            </a:solidFill>
+            <a:prstDash val="solid"/>
+          </a:ln>
+        </p:spPr>
+      </p:sp>
+      <p:sp>
+        <p:nvSpPr>
+          <p:cNvPr id="44" name="Text 42"/>
+          <p:cNvSpPr/>
+          <p:nvPr/>
+        </p:nvSpPr>
+        <p:spPr>
+          <a:xfrm>
+            <a:off x="6668262" y="4169664"/>
+            <a:ext cx="685800" cy="475488"/>
+          </a:xfrm>
+          <a:prstGeom prst="rect">
+            <a:avLst/>
+          </a:prstGeom>
+          <a:noFill/>
+          <a:ln/>
+        </p:spPr>
+        <p:txBody>
+          <a:bodyPr wrap="square" lIns="0" tIns="0" rIns="0" bIns="0" rtlCol="0" anchor="ctr"/>
+          <a:lstStyle/>
+          <a:p>
+            <a:pPr algn="ctr" indent="0" marL="0">
+              <a:buNone/>
+            </a:pPr>
+            <a:r>
+              <a:rPr lang="en-US" sz="900" b="1" dirty="0">
+                <a:solidFill>
+                  <a:srgbClr val="9D174D"/>
+                </a:solidFill>
+                <a:latin typeface="Trebuchet MS" pitchFamily="34" charset="0"/>
+                <a:ea typeface="Trebuchet MS" pitchFamily="34" charset="-122"/>
+                <a:cs typeface="Trebuchet MS" pitchFamily="34" charset="-120"/>
+              </a:rPr>
+              <a:t>s</a:t>
+            </a:r>
+            <a:endParaRPr lang="en-US" sz="900" dirty="0"/>
+          </a:p>
+        </p:txBody>
+      </p:sp>
+      <p:sp>
+        <p:nvSpPr>
+          <p:cNvPr id="45" name="Shape 43"/>
+          <p:cNvSpPr/>
+          <p:nvPr/>
+        </p:nvSpPr>
+        <p:spPr>
+          <a:xfrm>
+            <a:off x="7576947" y="4169664"/>
+            <a:ext cx="685800" cy="475488"/>
+          </a:xfrm>
+          <a:prstGeom prst="rect">
+            <a:avLst>
+              <a:gd name="adj" fmla="val 7692"/>
+            </a:avLst>
+          </a:prstGeom>
+          <a:solidFill>
+            <a:srgbClr val="FFFFFF"/>
+          </a:solidFill>
+          <a:ln w="12700">
+            <a:solidFill>
+              <a:srgbClr val="DB2777"/>
+            </a:solidFill>
+            <a:prstDash val="solid"/>
+          </a:ln>
+        </p:spPr>
+      </p:sp>
+      <p:sp>
+        <p:nvSpPr>
+          <p:cNvPr id="46" name="Text 44"/>
+          <p:cNvSpPr/>
+          <p:nvPr/>
+        </p:nvSpPr>
+        <p:spPr>
+          <a:xfrm>
+            <a:off x="7576947" y="4169664"/>
+            <a:ext cx="685800" cy="475488"/>
+          </a:xfrm>
+          <a:prstGeom prst="rect">
+            <a:avLst/>
+          </a:prstGeom>
+          <a:noFill/>
+          <a:ln/>
+        </p:spPr>
+        <p:txBody>
+          <a:bodyPr wrap="square" lIns="0" tIns="0" rIns="0" bIns="0" rtlCol="0" anchor="ctr"/>
+          <a:lstStyle/>
+          <a:p>
+            <a:pPr algn="ctr" indent="0" marL="0">
+              <a:buNone/>
+            </a:pPr>
+            <a:r>
+              <a:rPr lang="en-US" sz="900" b="1" dirty="0">
+                <a:solidFill>
+                  <a:srgbClr val="9D174D"/>
+                </a:solidFill>
+                <a:latin typeface="Trebuchet MS" pitchFamily="34" charset="0"/>
+                <a:ea typeface="Trebuchet MS" pitchFamily="34" charset="-122"/>
+                <a:cs typeface="Trebuchet MS" pitchFamily="34" charset="-120"/>
+              </a:rPr>
+              <a:t>s</a:t>
             </a:r>
             <a:endParaRPr lang="en-US" sz="900" dirty="0"/>
           </a:p>
@@ -31056,7 +31386,7 @@
                 <a:ea typeface="Calibri" pitchFamily="34" charset="-122"/>
                 <a:cs typeface="Calibri" pitchFamily="34" charset="-120"/>
               </a:rPr>
-              <a:t>Word Labs  •  wordlabs.app  •  Root: 'slow' = not fast, moving carefully</a:t>
+              <a:t>Word Labs  •  wordlabs.app  •  Root: 'slow' = not fast</a:t>
             </a:r>
             <a:endParaRPr lang="en-US" sz="800" dirty="0"/>
           </a:p>
@@ -32225,7 +32555,7 @@
                 <a:ea typeface="Calibri" pitchFamily="34" charset="-122"/>
                 <a:cs typeface="Calibri" pitchFamily="34" charset="-120"/>
               </a:rPr>
-              <a:t>Word Labs  •  wordlabs.app  •  Root: 'slow' = not fast, moving carefully</a:t>
+              <a:t>Word Labs  •  wordlabs.app  •  Root: 'slow' = not fast</a:t>
             </a:r>
             <a:endParaRPr lang="en-US" sz="800" dirty="0"/>
           </a:p>
@@ -32483,7 +32813,7 @@
             <a:avLst/>
           </a:prstGeom>
           <a:solidFill>
-            <a:srgbClr val="DDD6FE"/>
+            <a:srgbClr val="F8FAFC"/>
           </a:solidFill>
           <a:ln w="12700">
             <a:solidFill>
@@ -32495,14 +32825,39 @@
       </p:sp>
       <p:sp>
         <p:nvSpPr>
-          <p:cNvPr id="18" name="Text 16"/>
-          <p:cNvSpPr/>
-          <p:nvPr/>
-        </p:nvSpPr>
-        <p:spPr>
-          <a:xfrm>
-            <a:off x="365760" y="1563624"/>
-            <a:ext cx="2468880" cy="402336"/>
+          <p:cNvPr id="18" name="Shape 16"/>
+          <p:cNvSpPr/>
+          <p:nvPr/>
+        </p:nvSpPr>
+        <p:spPr>
+          <a:xfrm>
+            <a:off x="2971800" y="1563624"/>
+            <a:ext cx="2834640" cy="402336"/>
+          </a:xfrm>
+          <a:prstGeom prst="rect">
+            <a:avLst/>
+          </a:prstGeom>
+          <a:solidFill>
+            <a:srgbClr val="CCFBF1"/>
+          </a:solidFill>
+          <a:ln w="12700">
+            <a:solidFill>
+              <a:srgbClr val="E2E8F0"/>
+            </a:solidFill>
+            <a:prstDash val="solid"/>
+          </a:ln>
+        </p:spPr>
+      </p:sp>
+      <p:sp>
+        <p:nvSpPr>
+          <p:cNvPr id="19" name="Text 17"/>
+          <p:cNvSpPr/>
+          <p:nvPr/>
+        </p:nvSpPr>
+        <p:spPr>
+          <a:xfrm>
+            <a:off x="2971800" y="1563624"/>
+            <a:ext cx="2834640" cy="402336"/>
           </a:xfrm>
           <a:prstGeom prst="rect">
             <a:avLst/>
@@ -32520,13 +32875,13 @@
             <a:r>
               <a:rPr lang="en-US" sz="1300" b="1" dirty="0">
                 <a:solidFill>
-                  <a:srgbClr val="4C1D95"/>
+                  <a:srgbClr val="0F766E"/>
                 </a:solidFill>
                 <a:latin typeface="Trebuchet MS" pitchFamily="34" charset="0"/>
                 <a:ea typeface="Trebuchet MS" pitchFamily="34" charset="-122"/>
                 <a:cs typeface="Trebuchet MS" pitchFamily="34" charset="-120"/>
               </a:rPr>
-              <a:t>un-</a:t>
+              <a:t>slow</a:t>
             </a:r>
             <a:endParaRPr lang="en-US" sz="1300" dirty="0"/>
           </a:p>
@@ -32534,20 +32889,20 @@
       </p:sp>
       <p:sp>
         <p:nvSpPr>
-          <p:cNvPr id="19" name="Shape 17"/>
-          <p:cNvSpPr/>
-          <p:nvPr/>
-        </p:nvSpPr>
-        <p:spPr>
-          <a:xfrm>
-            <a:off x="2971800" y="1563624"/>
+          <p:cNvPr id="20" name="Shape 18"/>
+          <p:cNvSpPr/>
+          <p:nvPr/>
+        </p:nvSpPr>
+        <p:spPr>
+          <a:xfrm>
+            <a:off x="5943600" y="1563624"/>
             <a:ext cx="2834640" cy="402336"/>
           </a:xfrm>
           <a:prstGeom prst="rect">
             <a:avLst/>
           </a:prstGeom>
           <a:solidFill>
-            <a:srgbClr val="CCFBF1"/>
+            <a:srgbClr val="FCE7F3"/>
           </a:solidFill>
           <a:ln w="12700">
             <a:solidFill>
@@ -32559,13 +32914,13 @@
       </p:sp>
       <p:sp>
         <p:nvSpPr>
-          <p:cNvPr id="20" name="Text 18"/>
-          <p:cNvSpPr/>
-          <p:nvPr/>
-        </p:nvSpPr>
-        <p:spPr>
-          <a:xfrm>
-            <a:off x="2971800" y="1563624"/>
+          <p:cNvPr id="21" name="Text 19"/>
+          <p:cNvSpPr/>
+          <p:nvPr/>
+        </p:nvSpPr>
+        <p:spPr>
+          <a:xfrm>
+            <a:off x="5943600" y="1563624"/>
             <a:ext cx="2834640" cy="402336"/>
           </a:xfrm>
           <a:prstGeom prst="rect">
@@ -32584,13 +32939,13 @@
             <a:r>
               <a:rPr lang="en-US" sz="1300" b="1" dirty="0">
                 <a:solidFill>
-                  <a:srgbClr val="0F766E"/>
+                  <a:srgbClr val="9D174D"/>
                 </a:solidFill>
                 <a:latin typeface="Trebuchet MS" pitchFamily="34" charset="0"/>
                 <a:ea typeface="Trebuchet MS" pitchFamily="34" charset="-122"/>
                 <a:cs typeface="Trebuchet MS" pitchFamily="34" charset="-120"/>
               </a:rPr>
-              <a:t>slow</a:t>
+              <a:t>-ed</a:t>
             </a:r>
             <a:endParaRPr lang="en-US" sz="1300" dirty="0"/>
           </a:p>
@@ -32598,19 +32953,69 @@
       </p:sp>
       <p:sp>
         <p:nvSpPr>
-          <p:cNvPr id="21" name="Shape 19"/>
-          <p:cNvSpPr/>
-          <p:nvPr/>
-        </p:nvSpPr>
-        <p:spPr>
-          <a:xfrm>
-            <a:off x="5943600" y="1563624"/>
+          <p:cNvPr id="22" name="Shape 20"/>
+          <p:cNvSpPr/>
+          <p:nvPr/>
+        </p:nvSpPr>
+        <p:spPr>
+          <a:xfrm>
+            <a:off x="365760" y="1984248"/>
+            <a:ext cx="2468880" cy="402336"/>
+          </a:xfrm>
+          <a:prstGeom prst="rect">
+            <a:avLst/>
+          </a:prstGeom>
+          <a:solidFill>
+            <a:srgbClr val="F1F5F9"/>
+          </a:solidFill>
+          <a:ln w="12700">
+            <a:solidFill>
+              <a:srgbClr val="E2E8F0"/>
+            </a:solidFill>
+            <a:prstDash val="solid"/>
+          </a:ln>
+        </p:spPr>
+      </p:sp>
+      <p:sp>
+        <p:nvSpPr>
+          <p:cNvPr id="23" name="Shape 21"/>
+          <p:cNvSpPr/>
+          <p:nvPr/>
+        </p:nvSpPr>
+        <p:spPr>
+          <a:xfrm>
+            <a:off x="2971800" y="1984248"/>
             <a:ext cx="2834640" cy="402336"/>
           </a:xfrm>
           <a:prstGeom prst="rect">
             <a:avLst/>
           </a:prstGeom>
           <a:solidFill>
+            <a:srgbClr val="F1F5F9"/>
+          </a:solidFill>
+          <a:ln w="12700">
+            <a:solidFill>
+              <a:srgbClr val="E2E8F0"/>
+            </a:solidFill>
+            <a:prstDash val="solid"/>
+          </a:ln>
+        </p:spPr>
+      </p:sp>
+      <p:sp>
+        <p:nvSpPr>
+          <p:cNvPr id="24" name="Shape 22"/>
+          <p:cNvSpPr/>
+          <p:nvPr/>
+        </p:nvSpPr>
+        <p:spPr>
+          <a:xfrm>
+            <a:off x="5943600" y="1984248"/>
+            <a:ext cx="2834640" cy="402336"/>
+          </a:xfrm>
+          <a:prstGeom prst="rect">
+            <a:avLst/>
+          </a:prstGeom>
+          <a:solidFill>
             <a:srgbClr val="FCE7F3"/>
           </a:solidFill>
           <a:ln w="12700">
@@ -32623,13 +33028,13 @@
       </p:sp>
       <p:sp>
         <p:nvSpPr>
-          <p:cNvPr id="22" name="Text 20"/>
-          <p:cNvSpPr/>
-          <p:nvPr/>
-        </p:nvSpPr>
-        <p:spPr>
-          <a:xfrm>
-            <a:off x="5943600" y="1563624"/>
+          <p:cNvPr id="25" name="Text 23"/>
+          <p:cNvSpPr/>
+          <p:nvPr/>
+        </p:nvSpPr>
+        <p:spPr>
+          <a:xfrm>
+            <a:off x="5943600" y="1984248"/>
             <a:ext cx="2834640" cy="402336"/>
           </a:xfrm>
           <a:prstGeom prst="rect">
@@ -32654,7 +33059,7 @@
                 <a:ea typeface="Trebuchet MS" pitchFamily="34" charset="-122"/>
                 <a:cs typeface="Trebuchet MS" pitchFamily="34" charset="-120"/>
               </a:rPr>
-              <a:t>-ly</a:t>
+              <a:t>-er</a:t>
             </a:r>
             <a:endParaRPr lang="en-US" sz="1300" dirty="0"/>
           </a:p>
@@ -32662,20 +33067,20 @@
       </p:sp>
       <p:sp>
         <p:nvSpPr>
-          <p:cNvPr id="23" name="Shape 21"/>
-          <p:cNvSpPr/>
-          <p:nvPr/>
-        </p:nvSpPr>
-        <p:spPr>
-          <a:xfrm>
-            <a:off x="365760" y="1984248"/>
+          <p:cNvPr id="26" name="Shape 24"/>
+          <p:cNvSpPr/>
+          <p:nvPr/>
+        </p:nvSpPr>
+        <p:spPr>
+          <a:xfrm>
+            <a:off x="365760" y="2404872"/>
             <a:ext cx="2468880" cy="402336"/>
           </a:xfrm>
           <a:prstGeom prst="rect">
             <a:avLst/>
           </a:prstGeom>
           <a:solidFill>
-            <a:srgbClr val="DDD6FE"/>
+            <a:srgbClr val="F8FAFC"/>
           </a:solidFill>
           <a:ln w="12700">
             <a:solidFill>
@@ -32687,14 +33092,64 @@
       </p:sp>
       <p:sp>
         <p:nvSpPr>
-          <p:cNvPr id="24" name="Text 22"/>
-          <p:cNvSpPr/>
-          <p:nvPr/>
-        </p:nvSpPr>
-        <p:spPr>
-          <a:xfrm>
-            <a:off x="365760" y="1984248"/>
-            <a:ext cx="2468880" cy="402336"/>
+          <p:cNvPr id="27" name="Shape 25"/>
+          <p:cNvSpPr/>
+          <p:nvPr/>
+        </p:nvSpPr>
+        <p:spPr>
+          <a:xfrm>
+            <a:off x="2971800" y="2404872"/>
+            <a:ext cx="2834640" cy="402336"/>
+          </a:xfrm>
+          <a:prstGeom prst="rect">
+            <a:avLst/>
+          </a:prstGeom>
+          <a:solidFill>
+            <a:srgbClr val="F8FAFC"/>
+          </a:solidFill>
+          <a:ln w="12700">
+            <a:solidFill>
+              <a:srgbClr val="E2E8F0"/>
+            </a:solidFill>
+            <a:prstDash val="solid"/>
+          </a:ln>
+        </p:spPr>
+      </p:sp>
+      <p:sp>
+        <p:nvSpPr>
+          <p:cNvPr id="28" name="Shape 26"/>
+          <p:cNvSpPr/>
+          <p:nvPr/>
+        </p:nvSpPr>
+        <p:spPr>
+          <a:xfrm>
+            <a:off x="5943600" y="2404872"/>
+            <a:ext cx="2834640" cy="402336"/>
+          </a:xfrm>
+          <a:prstGeom prst="rect">
+            <a:avLst/>
+          </a:prstGeom>
+          <a:solidFill>
+            <a:srgbClr val="FCE7F3"/>
+          </a:solidFill>
+          <a:ln w="12700">
+            <a:solidFill>
+              <a:srgbClr val="E2E8F0"/>
+            </a:solidFill>
+            <a:prstDash val="solid"/>
+          </a:ln>
+        </p:spPr>
+      </p:sp>
+      <p:sp>
+        <p:nvSpPr>
+          <p:cNvPr id="29" name="Text 27"/>
+          <p:cNvSpPr/>
+          <p:nvPr/>
+        </p:nvSpPr>
+        <p:spPr>
+          <a:xfrm>
+            <a:off x="5943600" y="2404872"/>
+            <a:ext cx="2834640" cy="402336"/>
           </a:xfrm>
           <a:prstGeom prst="rect">
             <a:avLst/>
@@ -32712,13 +33167,13 @@
             <a:r>
               <a:rPr lang="en-US" sz="1300" b="1" dirty="0">
                 <a:solidFill>
-                  <a:srgbClr val="4C1D95"/>
+                  <a:srgbClr val="9D174D"/>
                 </a:solidFill>
                 <a:latin typeface="Trebuchet MS" pitchFamily="34" charset="0"/>
                 <a:ea typeface="Trebuchet MS" pitchFamily="34" charset="-122"/>
                 <a:cs typeface="Trebuchet MS" pitchFamily="34" charset="-120"/>
               </a:rPr>
-              <a:t>out-</a:t>
+              <a:t>-est</a:t>
             </a:r>
             <a:endParaRPr lang="en-US" sz="1300" dirty="0"/>
           </a:p>
@@ -32726,13 +33181,38 @@
       </p:sp>
       <p:sp>
         <p:nvSpPr>
-          <p:cNvPr id="25" name="Shape 23"/>
-          <p:cNvSpPr/>
-          <p:nvPr/>
-        </p:nvSpPr>
-        <p:spPr>
-          <a:xfrm>
-            <a:off x="2971800" y="1984248"/>
+          <p:cNvPr id="30" name="Shape 28"/>
+          <p:cNvSpPr/>
+          <p:nvPr/>
+        </p:nvSpPr>
+        <p:spPr>
+          <a:xfrm>
+            <a:off x="365760" y="2825496"/>
+            <a:ext cx="2468880" cy="402336"/>
+          </a:xfrm>
+          <a:prstGeom prst="rect">
+            <a:avLst/>
+          </a:prstGeom>
+          <a:solidFill>
+            <a:srgbClr val="F1F5F9"/>
+          </a:solidFill>
+          <a:ln w="12700">
+            <a:solidFill>
+              <a:srgbClr val="E2E8F0"/>
+            </a:solidFill>
+            <a:prstDash val="solid"/>
+          </a:ln>
+        </p:spPr>
+      </p:sp>
+      <p:sp>
+        <p:nvSpPr>
+          <p:cNvPr id="31" name="Shape 29"/>
+          <p:cNvSpPr/>
+          <p:nvPr/>
+        </p:nvSpPr>
+        <p:spPr>
+          <a:xfrm>
+            <a:off x="2971800" y="2825496"/>
             <a:ext cx="2834640" cy="402336"/>
           </a:xfrm>
           <a:prstGeom prst="rect">
@@ -32751,13 +33231,13 @@
       </p:sp>
       <p:sp>
         <p:nvSpPr>
-          <p:cNvPr id="26" name="Shape 24"/>
-          <p:cNvSpPr/>
-          <p:nvPr/>
-        </p:nvSpPr>
-        <p:spPr>
-          <a:xfrm>
-            <a:off x="5943600" y="1984248"/>
+          <p:cNvPr id="32" name="Shape 30"/>
+          <p:cNvSpPr/>
+          <p:nvPr/>
+        </p:nvSpPr>
+        <p:spPr>
+          <a:xfrm>
+            <a:off x="5943600" y="2825496"/>
             <a:ext cx="2834640" cy="402336"/>
           </a:xfrm>
           <a:prstGeom prst="rect">
@@ -32776,13 +33256,13 @@
       </p:sp>
       <p:sp>
         <p:nvSpPr>
-          <p:cNvPr id="27" name="Text 25"/>
-          <p:cNvSpPr/>
-          <p:nvPr/>
-        </p:nvSpPr>
-        <p:spPr>
-          <a:xfrm>
-            <a:off x="5943600" y="1984248"/>
+          <p:cNvPr id="33" name="Text 31"/>
+          <p:cNvSpPr/>
+          <p:nvPr/>
+        </p:nvSpPr>
+        <p:spPr>
+          <a:xfrm>
+            <a:off x="5943600" y="2825496"/>
             <a:ext cx="2834640" cy="402336"/>
           </a:xfrm>
           <a:prstGeom prst="rect">
@@ -32807,7 +33287,7 @@
                 <a:ea typeface="Trebuchet MS" pitchFamily="34" charset="-122"/>
                 <a:cs typeface="Trebuchet MS" pitchFamily="34" charset="-120"/>
               </a:rPr>
-              <a:t>-ness</a:t>
+              <a:t>-ing</a:t>
             </a:r>
             <a:endParaRPr lang="en-US" sz="1300" dirty="0"/>
           </a:p>
@@ -32815,20 +33295,20 @@
       </p:sp>
       <p:sp>
         <p:nvSpPr>
-          <p:cNvPr id="28" name="Shape 26"/>
-          <p:cNvSpPr/>
-          <p:nvPr/>
-        </p:nvSpPr>
-        <p:spPr>
-          <a:xfrm>
-            <a:off x="365760" y="2404872"/>
+          <p:cNvPr id="34" name="Shape 32"/>
+          <p:cNvSpPr/>
+          <p:nvPr/>
+        </p:nvSpPr>
+        <p:spPr>
+          <a:xfrm>
+            <a:off x="365760" y="3246120"/>
             <a:ext cx="2468880" cy="402336"/>
           </a:xfrm>
           <a:prstGeom prst="rect">
             <a:avLst/>
           </a:prstGeom>
           <a:solidFill>
-            <a:srgbClr val="DDD6FE"/>
+            <a:srgbClr val="F8FAFC"/>
           </a:solidFill>
           <a:ln w="12700">
             <a:solidFill>
@@ -32840,14 +33320,64 @@
       </p:sp>
       <p:sp>
         <p:nvSpPr>
-          <p:cNvPr id="29" name="Text 27"/>
-          <p:cNvSpPr/>
-          <p:nvPr/>
-        </p:nvSpPr>
-        <p:spPr>
-          <a:xfrm>
-            <a:off x="365760" y="2404872"/>
-            <a:ext cx="2468880" cy="402336"/>
+          <p:cNvPr id="35" name="Shape 33"/>
+          <p:cNvSpPr/>
+          <p:nvPr/>
+        </p:nvSpPr>
+        <p:spPr>
+          <a:xfrm>
+            <a:off x="2971800" y="3246120"/>
+            <a:ext cx="2834640" cy="402336"/>
+          </a:xfrm>
+          <a:prstGeom prst="rect">
+            <a:avLst/>
+          </a:prstGeom>
+          <a:solidFill>
+            <a:srgbClr val="F8FAFC"/>
+          </a:solidFill>
+          <a:ln w="12700">
+            <a:solidFill>
+              <a:srgbClr val="E2E8F0"/>
+            </a:solidFill>
+            <a:prstDash val="solid"/>
+          </a:ln>
+        </p:spPr>
+      </p:sp>
+      <p:sp>
+        <p:nvSpPr>
+          <p:cNvPr id="36" name="Shape 34"/>
+          <p:cNvSpPr/>
+          <p:nvPr/>
+        </p:nvSpPr>
+        <p:spPr>
+          <a:xfrm>
+            <a:off x="5943600" y="3246120"/>
+            <a:ext cx="2834640" cy="402336"/>
+          </a:xfrm>
+          <a:prstGeom prst="rect">
+            <a:avLst/>
+          </a:prstGeom>
+          <a:solidFill>
+            <a:srgbClr val="FCE7F3"/>
+          </a:solidFill>
+          <a:ln w="12700">
+            <a:solidFill>
+              <a:srgbClr val="E2E8F0"/>
+            </a:solidFill>
+            <a:prstDash val="solid"/>
+          </a:ln>
+        </p:spPr>
+      </p:sp>
+      <p:sp>
+        <p:nvSpPr>
+          <p:cNvPr id="37" name="Text 35"/>
+          <p:cNvSpPr/>
+          <p:nvPr/>
+        </p:nvSpPr>
+        <p:spPr>
+          <a:xfrm>
+            <a:off x="5943600" y="3246120"/>
+            <a:ext cx="2834640" cy="402336"/>
           </a:xfrm>
           <a:prstGeom prst="rect">
             <a:avLst/>
@@ -32865,13 +33395,13 @@
             <a:r>
               <a:rPr lang="en-US" sz="1300" b="1" dirty="0">
                 <a:solidFill>
-                  <a:srgbClr val="4C1D95"/>
+                  <a:srgbClr val="9D174D"/>
                 </a:solidFill>
                 <a:latin typeface="Trebuchet MS" pitchFamily="34" charset="0"/>
                 <a:ea typeface="Trebuchet MS" pitchFamily="34" charset="-122"/>
                 <a:cs typeface="Trebuchet MS" pitchFamily="34" charset="-120"/>
               </a:rPr>
-              <a:t>over-</a:t>
+              <a:t>-ly</a:t>
             </a:r>
             <a:endParaRPr lang="en-US" sz="1300" dirty="0"/>
           </a:p>
@@ -32879,20 +33409,45 @@
       </p:sp>
       <p:sp>
         <p:nvSpPr>
-          <p:cNvPr id="30" name="Shape 28"/>
-          <p:cNvSpPr/>
-          <p:nvPr/>
-        </p:nvSpPr>
-        <p:spPr>
-          <a:xfrm>
-            <a:off x="2971800" y="2404872"/>
+          <p:cNvPr id="38" name="Shape 36"/>
+          <p:cNvSpPr/>
+          <p:nvPr/>
+        </p:nvSpPr>
+        <p:spPr>
+          <a:xfrm>
+            <a:off x="365760" y="3666744"/>
+            <a:ext cx="2468880" cy="402336"/>
+          </a:xfrm>
+          <a:prstGeom prst="rect">
+            <a:avLst/>
+          </a:prstGeom>
+          <a:solidFill>
+            <a:srgbClr val="F1F5F9"/>
+          </a:solidFill>
+          <a:ln w="12700">
+            <a:solidFill>
+              <a:srgbClr val="E2E8F0"/>
+            </a:solidFill>
+            <a:prstDash val="solid"/>
+          </a:ln>
+        </p:spPr>
+      </p:sp>
+      <p:sp>
+        <p:nvSpPr>
+          <p:cNvPr id="39" name="Shape 37"/>
+          <p:cNvSpPr/>
+          <p:nvPr/>
+        </p:nvSpPr>
+        <p:spPr>
+          <a:xfrm>
+            <a:off x="2971800" y="3666744"/>
             <a:ext cx="2834640" cy="402336"/>
           </a:xfrm>
           <a:prstGeom prst="rect">
             <a:avLst/>
           </a:prstGeom>
           <a:solidFill>
-            <a:srgbClr val="F8FAFC"/>
+            <a:srgbClr val="F1F5F9"/>
           </a:solidFill>
           <a:ln w="12700">
             <a:solidFill>
@@ -32904,13 +33459,13 @@
       </p:sp>
       <p:sp>
         <p:nvSpPr>
-          <p:cNvPr id="31" name="Shape 29"/>
-          <p:cNvSpPr/>
-          <p:nvPr/>
-        </p:nvSpPr>
-        <p:spPr>
-          <a:xfrm>
-            <a:off x="5943600" y="2404872"/>
+          <p:cNvPr id="40" name="Shape 38"/>
+          <p:cNvSpPr/>
+          <p:nvPr/>
+        </p:nvSpPr>
+        <p:spPr>
+          <a:xfrm>
+            <a:off x="5943600" y="3666744"/>
             <a:ext cx="2834640" cy="402336"/>
           </a:xfrm>
           <a:prstGeom prst="rect">
@@ -32929,13 +33484,13 @@
       </p:sp>
       <p:sp>
         <p:nvSpPr>
-          <p:cNvPr id="32" name="Text 30"/>
-          <p:cNvSpPr/>
-          <p:nvPr/>
-        </p:nvSpPr>
-        <p:spPr>
-          <a:xfrm>
-            <a:off x="5943600" y="2404872"/>
+          <p:cNvPr id="41" name="Text 39"/>
+          <p:cNvSpPr/>
+          <p:nvPr/>
+        </p:nvSpPr>
+        <p:spPr>
+          <a:xfrm>
+            <a:off x="5943600" y="3666744"/>
             <a:ext cx="2834640" cy="402336"/>
           </a:xfrm>
           <a:prstGeom prst="rect">
@@ -32960,7 +33515,7 @@
                 <a:ea typeface="Trebuchet MS" pitchFamily="34" charset="-122"/>
                 <a:cs typeface="Trebuchet MS" pitchFamily="34" charset="-120"/>
               </a:rPr>
-              <a:t>-er</a:t>
+              <a:t>-ness</a:t>
             </a:r>
             <a:endParaRPr lang="en-US" sz="1300" dirty="0"/>
           </a:p>
@@ -32968,39 +33523,14 @@
       </p:sp>
       <p:sp>
         <p:nvSpPr>
-          <p:cNvPr id="33" name="Shape 31"/>
-          <p:cNvSpPr/>
-          <p:nvPr/>
-        </p:nvSpPr>
-        <p:spPr>
-          <a:xfrm>
-            <a:off x="365760" y="2825496"/>
-            <a:ext cx="2468880" cy="402336"/>
-          </a:xfrm>
-          <a:prstGeom prst="rect">
-            <a:avLst/>
-          </a:prstGeom>
-          <a:solidFill>
-            <a:srgbClr val="DDD6FE"/>
-          </a:solidFill>
-          <a:ln w="12700">
-            <a:solidFill>
-              <a:srgbClr val="E2E8F0"/>
-            </a:solidFill>
-            <a:prstDash val="solid"/>
-          </a:ln>
-        </p:spPr>
-      </p:sp>
-      <p:sp>
-        <p:nvSpPr>
-          <p:cNvPr id="34" name="Text 32"/>
-          <p:cNvSpPr/>
-          <p:nvPr/>
-        </p:nvSpPr>
-        <p:spPr>
-          <a:xfrm>
-            <a:off x="365760" y="2825496"/>
-            <a:ext cx="2468880" cy="402336"/>
+          <p:cNvPr id="42" name="Text 40"/>
+          <p:cNvSpPr/>
+          <p:nvPr/>
+        </p:nvSpPr>
+        <p:spPr>
+          <a:xfrm>
+            <a:off x="365760" y="3611880"/>
+            <a:ext cx="1828800" cy="347472"/>
           </a:xfrm>
           <a:prstGeom prst="rect">
             <a:avLst/>
@@ -33012,84 +33542,61 @@
           <a:bodyPr wrap="square" lIns="0" tIns="0" rIns="0" bIns="0" rtlCol="0" anchor="ctr"/>
           <a:lstStyle/>
           <a:p>
-            <a:pPr algn="ctr" indent="0" marL="0">
-              <a:buNone/>
-            </a:pPr>
-            <a:r>
-              <a:rPr lang="en-US" sz="1300" b="1" dirty="0">
-                <a:solidFill>
-                  <a:srgbClr val="4C1D95"/>
+            <a:pPr algn="l" indent="0" marL="0">
+              <a:buNone/>
+            </a:pPr>
+            <a:r>
+              <a:rPr lang="en-US" sz="1200" b="1" dirty="0">
+                <a:solidFill>
+                  <a:srgbClr val="0F172A"/>
                 </a:solidFill>
                 <a:latin typeface="Trebuchet MS" pitchFamily="34" charset="0"/>
                 <a:ea typeface="Trebuchet MS" pitchFamily="34" charset="-122"/>
                 <a:cs typeface="Trebuchet MS" pitchFamily="34" charset="-120"/>
               </a:rPr>
-              <a:t>be-</a:t>
-            </a:r>
-            <a:endParaRPr lang="en-US" sz="1300" dirty="0"/>
-          </a:p>
-        </p:txBody>
-      </p:sp>
-      <p:sp>
-        <p:nvSpPr>
-          <p:cNvPr id="35" name="Shape 33"/>
-          <p:cNvSpPr/>
-          <p:nvPr/>
-        </p:nvSpPr>
-        <p:spPr>
-          <a:xfrm>
-            <a:off x="2971800" y="2825496"/>
-            <a:ext cx="2834640" cy="402336"/>
-          </a:xfrm>
-          <a:prstGeom prst="rect">
-            <a:avLst/>
-          </a:prstGeom>
-          <a:solidFill>
-            <a:srgbClr val="F1F5F9"/>
-          </a:solidFill>
-          <a:ln w="12700">
-            <a:solidFill>
-              <a:srgbClr val="E2E8F0"/>
-            </a:solidFill>
-            <a:prstDash val="solid"/>
-          </a:ln>
-        </p:spPr>
-      </p:sp>
-      <p:sp>
-        <p:nvSpPr>
-          <p:cNvPr id="36" name="Shape 34"/>
-          <p:cNvSpPr/>
-          <p:nvPr/>
-        </p:nvSpPr>
-        <p:spPr>
-          <a:xfrm>
-            <a:off x="5943600" y="2825496"/>
-            <a:ext cx="2834640" cy="402336"/>
-          </a:xfrm>
-          <a:prstGeom prst="rect">
-            <a:avLst/>
-          </a:prstGeom>
-          <a:solidFill>
-            <a:srgbClr val="FCE7F3"/>
-          </a:solidFill>
-          <a:ln w="12700">
-            <a:solidFill>
-              <a:srgbClr val="E2E8F0"/>
-            </a:solidFill>
-            <a:prstDash val="solid"/>
-          </a:ln>
-        </p:spPr>
-      </p:sp>
-      <p:sp>
-        <p:nvSpPr>
-          <p:cNvPr id="37" name="Text 35"/>
-          <p:cNvSpPr/>
-          <p:nvPr/>
-        </p:nvSpPr>
-        <p:spPr>
-          <a:xfrm>
-            <a:off x="5943600" y="2825496"/>
-            <a:ext cx="2834640" cy="402336"/>
+              <a:t>Sample words:</a:t>
+            </a:r>
+            <a:endParaRPr lang="en-US" sz="1200" dirty="0"/>
+          </a:p>
+        </p:txBody>
+      </p:sp>
+      <p:sp>
+        <p:nvSpPr>
+          <p:cNvPr id="43" name="Shape 41"/>
+          <p:cNvSpPr/>
+          <p:nvPr/>
+        </p:nvSpPr>
+        <p:spPr>
+          <a:xfrm>
+            <a:off x="365760" y="4023360"/>
+            <a:ext cx="2011680" cy="402336"/>
+          </a:xfrm>
+          <a:prstGeom prst="rect">
+            <a:avLst>
+              <a:gd name="adj" fmla="val 13636"/>
+            </a:avLst>
+          </a:prstGeom>
+          <a:solidFill>
+            <a:srgbClr val="EEF2FF"/>
+          </a:solidFill>
+          <a:ln w="12700">
+            <a:solidFill>
+              <a:srgbClr val="6366F1"/>
+            </a:solidFill>
+            <a:prstDash val="solid"/>
+          </a:ln>
+        </p:spPr>
+      </p:sp>
+      <p:sp>
+        <p:nvSpPr>
+          <p:cNvPr id="44" name="Text 42"/>
+          <p:cNvSpPr/>
+          <p:nvPr/>
+        </p:nvSpPr>
+        <p:spPr>
+          <a:xfrm>
+            <a:off x="365760" y="4023360"/>
+            <a:ext cx="2011680" cy="402336"/>
           </a:xfrm>
           <a:prstGeom prst="rect">
             <a:avLst/>
@@ -33105,55 +33612,57 @@
               <a:buNone/>
             </a:pPr>
             <a:r>
-              <a:rPr lang="en-US" sz="1300" b="1" dirty="0">
-                <a:solidFill>
-                  <a:srgbClr val="9D174D"/>
+              <a:rPr lang="en-US" sz="1200" b="1" dirty="0">
+                <a:solidFill>
+                  <a:srgbClr val="4338CA"/>
                 </a:solidFill>
                 <a:latin typeface="Trebuchet MS" pitchFamily="34" charset="0"/>
                 <a:ea typeface="Trebuchet MS" pitchFamily="34" charset="-122"/>
                 <a:cs typeface="Trebuchet MS" pitchFamily="34" charset="-120"/>
               </a:rPr>
-              <a:t>-est</a:t>
-            </a:r>
-            <a:endParaRPr lang="en-US" sz="1300" dirty="0"/>
-          </a:p>
-        </p:txBody>
-      </p:sp>
-      <p:sp>
-        <p:nvSpPr>
-          <p:cNvPr id="38" name="Shape 36"/>
-          <p:cNvSpPr/>
-          <p:nvPr/>
-        </p:nvSpPr>
-        <p:spPr>
-          <a:xfrm>
-            <a:off x="365760" y="3246120"/>
-            <a:ext cx="2468880" cy="402336"/>
-          </a:xfrm>
-          <a:prstGeom prst="rect">
-            <a:avLst/>
-          </a:prstGeom>
-          <a:solidFill>
-            <a:srgbClr val="DDD6FE"/>
-          </a:solidFill>
-          <a:ln w="12700">
-            <a:solidFill>
-              <a:srgbClr val="E2E8F0"/>
-            </a:solidFill>
-            <a:prstDash val="solid"/>
-          </a:ln>
-        </p:spPr>
-      </p:sp>
-      <p:sp>
-        <p:nvSpPr>
-          <p:cNvPr id="39" name="Text 37"/>
-          <p:cNvSpPr/>
-          <p:nvPr/>
-        </p:nvSpPr>
-        <p:spPr>
-          <a:xfrm>
-            <a:off x="365760" y="3246120"/>
-            <a:ext cx="2468880" cy="402336"/>
+              <a:t>slow</a:t>
+            </a:r>
+            <a:endParaRPr lang="en-US" sz="1200" dirty="0"/>
+          </a:p>
+        </p:txBody>
+      </p:sp>
+      <p:sp>
+        <p:nvSpPr>
+          <p:cNvPr id="45" name="Shape 43"/>
+          <p:cNvSpPr/>
+          <p:nvPr/>
+        </p:nvSpPr>
+        <p:spPr>
+          <a:xfrm>
+            <a:off x="2542032" y="4023360"/>
+            <a:ext cx="2011680" cy="402336"/>
+          </a:xfrm>
+          <a:prstGeom prst="rect">
+            <a:avLst>
+              <a:gd name="adj" fmla="val 13636"/>
+            </a:avLst>
+          </a:prstGeom>
+          <a:solidFill>
+            <a:srgbClr val="EEF2FF"/>
+          </a:solidFill>
+          <a:ln w="12700">
+            <a:solidFill>
+              <a:srgbClr val="6366F1"/>
+            </a:solidFill>
+            <a:prstDash val="solid"/>
+          </a:ln>
+        </p:spPr>
+      </p:sp>
+      <p:sp>
+        <p:nvSpPr>
+          <p:cNvPr id="46" name="Text 44"/>
+          <p:cNvSpPr/>
+          <p:nvPr/>
+        </p:nvSpPr>
+        <p:spPr>
+          <a:xfrm>
+            <a:off x="2542032" y="4023360"/>
+            <a:ext cx="2011680" cy="402336"/>
           </a:xfrm>
           <a:prstGeom prst="rect">
             <a:avLst/>
@@ -33169,671 +33678,15 @@
               <a:buNone/>
             </a:pPr>
             <a:r>
-              <a:rPr lang="en-US" sz="1300" b="1" dirty="0">
-                <a:solidFill>
-                  <a:srgbClr val="4C1D95"/>
+              <a:rPr lang="en-US" sz="1200" b="1" dirty="0">
+                <a:solidFill>
+                  <a:srgbClr val="4338CA"/>
                 </a:solidFill>
                 <a:latin typeface="Trebuchet MS" pitchFamily="34" charset="0"/>
                 <a:ea typeface="Trebuchet MS" pitchFamily="34" charset="-122"/>
                 <a:cs typeface="Trebuchet MS" pitchFamily="34" charset="-120"/>
               </a:rPr>
-              <a:t>re-</a:t>
-            </a:r>
-            <a:endParaRPr lang="en-US" sz="1300" dirty="0"/>
-          </a:p>
-        </p:txBody>
-      </p:sp>
-      <p:sp>
-        <p:nvSpPr>
-          <p:cNvPr id="40" name="Shape 38"/>
-          <p:cNvSpPr/>
-          <p:nvPr/>
-        </p:nvSpPr>
-        <p:spPr>
-          <a:xfrm>
-            <a:off x="2971800" y="3246120"/>
-            <a:ext cx="2834640" cy="402336"/>
-          </a:xfrm>
-          <a:prstGeom prst="rect">
-            <a:avLst/>
-          </a:prstGeom>
-          <a:solidFill>
-            <a:srgbClr val="F8FAFC"/>
-          </a:solidFill>
-          <a:ln w="12700">
-            <a:solidFill>
-              <a:srgbClr val="E2E8F0"/>
-            </a:solidFill>
-            <a:prstDash val="solid"/>
-          </a:ln>
-        </p:spPr>
-      </p:sp>
-      <p:sp>
-        <p:nvSpPr>
-          <p:cNvPr id="41" name="Shape 39"/>
-          <p:cNvSpPr/>
-          <p:nvPr/>
-        </p:nvSpPr>
-        <p:spPr>
-          <a:xfrm>
-            <a:off x="5943600" y="3246120"/>
-            <a:ext cx="2834640" cy="402336"/>
-          </a:xfrm>
-          <a:prstGeom prst="rect">
-            <a:avLst/>
-          </a:prstGeom>
-          <a:solidFill>
-            <a:srgbClr val="FCE7F3"/>
-          </a:solidFill>
-          <a:ln w="12700">
-            <a:solidFill>
-              <a:srgbClr val="E2E8F0"/>
-            </a:solidFill>
-            <a:prstDash val="solid"/>
-          </a:ln>
-        </p:spPr>
-      </p:sp>
-      <p:sp>
-        <p:nvSpPr>
-          <p:cNvPr id="42" name="Text 40"/>
-          <p:cNvSpPr/>
-          <p:nvPr/>
-        </p:nvSpPr>
-        <p:spPr>
-          <a:xfrm>
-            <a:off x="5943600" y="3246120"/>
-            <a:ext cx="2834640" cy="402336"/>
-          </a:xfrm>
-          <a:prstGeom prst="rect">
-            <a:avLst/>
-          </a:prstGeom>
-          <a:noFill/>
-          <a:ln/>
-        </p:spPr>
-        <p:txBody>
-          <a:bodyPr wrap="square" lIns="0" tIns="0" rIns="0" bIns="0" rtlCol="0" anchor="ctr"/>
-          <a:lstStyle/>
-          <a:p>
-            <a:pPr algn="ctr" indent="0" marL="0">
-              <a:buNone/>
-            </a:pPr>
-            <a:r>
-              <a:rPr lang="en-US" sz="1300" b="1" dirty="0">
-                <a:solidFill>
-                  <a:srgbClr val="9D174D"/>
-                </a:solidFill>
-                <a:latin typeface="Trebuchet MS" pitchFamily="34" charset="0"/>
-                <a:ea typeface="Trebuchet MS" pitchFamily="34" charset="-122"/>
-                <a:cs typeface="Trebuchet MS" pitchFamily="34" charset="-120"/>
-              </a:rPr>
-              <a:t>-ing</a:t>
-            </a:r>
-            <a:endParaRPr lang="en-US" sz="1300" dirty="0"/>
-          </a:p>
-        </p:txBody>
-      </p:sp>
-      <p:sp>
-        <p:nvSpPr>
-          <p:cNvPr id="43" name="Text 41"/>
-          <p:cNvSpPr/>
-          <p:nvPr/>
-        </p:nvSpPr>
-        <p:spPr>
-          <a:xfrm>
-            <a:off x="365760" y="3611880"/>
-            <a:ext cx="1828800" cy="347472"/>
-          </a:xfrm>
-          <a:prstGeom prst="rect">
-            <a:avLst/>
-          </a:prstGeom>
-          <a:noFill/>
-          <a:ln/>
-        </p:spPr>
-        <p:txBody>
-          <a:bodyPr wrap="square" lIns="0" tIns="0" rIns="0" bIns="0" rtlCol="0" anchor="ctr"/>
-          <a:lstStyle/>
-          <a:p>
-            <a:pPr algn="l" indent="0" marL="0">
-              <a:buNone/>
-            </a:pPr>
-            <a:r>
-              <a:rPr lang="en-US" sz="1200" b="1" dirty="0">
-                <a:solidFill>
-                  <a:srgbClr val="0F172A"/>
-                </a:solidFill>
-                <a:latin typeface="Trebuchet MS" pitchFamily="34" charset="0"/>
-                <a:ea typeface="Trebuchet MS" pitchFamily="34" charset="-122"/>
-                <a:cs typeface="Trebuchet MS" pitchFamily="34" charset="-120"/>
-              </a:rPr>
-              <a:t>Sample words:</a:t>
-            </a:r>
-            <a:endParaRPr lang="en-US" sz="1200" dirty="0"/>
-          </a:p>
-        </p:txBody>
-      </p:sp>
-      <p:sp>
-        <p:nvSpPr>
-          <p:cNvPr id="44" name="Shape 42"/>
-          <p:cNvSpPr/>
-          <p:nvPr/>
-        </p:nvSpPr>
-        <p:spPr>
-          <a:xfrm>
-            <a:off x="365760" y="4023360"/>
-            <a:ext cx="2011680" cy="402336"/>
-          </a:xfrm>
-          <a:prstGeom prst="rect">
-            <a:avLst>
-              <a:gd name="adj" fmla="val 13636"/>
-            </a:avLst>
-          </a:prstGeom>
-          <a:solidFill>
-            <a:srgbClr val="EEF2FF"/>
-          </a:solidFill>
-          <a:ln w="12700">
-            <a:solidFill>
-              <a:srgbClr val="6366F1"/>
-            </a:solidFill>
-            <a:prstDash val="solid"/>
-          </a:ln>
-        </p:spPr>
-      </p:sp>
-      <p:sp>
-        <p:nvSpPr>
-          <p:cNvPr id="45" name="Text 43"/>
-          <p:cNvSpPr/>
-          <p:nvPr/>
-        </p:nvSpPr>
-        <p:spPr>
-          <a:xfrm>
-            <a:off x="365760" y="4023360"/>
-            <a:ext cx="2011680" cy="402336"/>
-          </a:xfrm>
-          <a:prstGeom prst="rect">
-            <a:avLst/>
-          </a:prstGeom>
-          <a:noFill/>
-          <a:ln/>
-        </p:spPr>
-        <p:txBody>
-          <a:bodyPr wrap="square" lIns="0" tIns="0" rIns="0" bIns="0" rtlCol="0" anchor="ctr"/>
-          <a:lstStyle/>
-          <a:p>
-            <a:pPr algn="ctr" indent="0" marL="0">
-              <a:buNone/>
-            </a:pPr>
-            <a:r>
-              <a:rPr lang="en-US" sz="1200" b="1" dirty="0">
-                <a:solidFill>
-                  <a:srgbClr val="4338CA"/>
-                </a:solidFill>
-                <a:latin typeface="Trebuchet MS" pitchFamily="34" charset="0"/>
-                <a:ea typeface="Trebuchet MS" pitchFamily="34" charset="-122"/>
-                <a:cs typeface="Trebuchet MS" pitchFamily="34" charset="-120"/>
-              </a:rPr>
-              <a:t>slowly</a:t>
-            </a:r>
-            <a:endParaRPr lang="en-US" sz="1200" dirty="0"/>
-          </a:p>
-        </p:txBody>
-      </p:sp>
-      <p:sp>
-        <p:nvSpPr>
-          <p:cNvPr id="46" name="Shape 44"/>
-          <p:cNvSpPr/>
-          <p:nvPr/>
-        </p:nvSpPr>
-        <p:spPr>
-          <a:xfrm>
-            <a:off x="2542032" y="4023360"/>
-            <a:ext cx="2011680" cy="402336"/>
-          </a:xfrm>
-          <a:prstGeom prst="rect">
-            <a:avLst>
-              <a:gd name="adj" fmla="val 13636"/>
-            </a:avLst>
-          </a:prstGeom>
-          <a:solidFill>
-            <a:srgbClr val="EEF2FF"/>
-          </a:solidFill>
-          <a:ln w="12700">
-            <a:solidFill>
-              <a:srgbClr val="6366F1"/>
-            </a:solidFill>
-            <a:prstDash val="solid"/>
-          </a:ln>
-        </p:spPr>
-      </p:sp>
-      <p:sp>
-        <p:nvSpPr>
-          <p:cNvPr id="47" name="Text 45"/>
-          <p:cNvSpPr/>
-          <p:nvPr/>
-        </p:nvSpPr>
-        <p:spPr>
-          <a:xfrm>
-            <a:off x="2542032" y="4023360"/>
-            <a:ext cx="2011680" cy="402336"/>
-          </a:xfrm>
-          <a:prstGeom prst="rect">
-            <a:avLst/>
-          </a:prstGeom>
-          <a:noFill/>
-          <a:ln/>
-        </p:spPr>
-        <p:txBody>
-          <a:bodyPr wrap="square" lIns="0" tIns="0" rIns="0" bIns="0" rtlCol="0" anchor="ctr"/>
-          <a:lstStyle/>
-          <a:p>
-            <a:pPr algn="ctr" indent="0" marL="0">
-              <a:buNone/>
-            </a:pPr>
-            <a:r>
-              <a:rPr lang="en-US" sz="1200" b="1" dirty="0">
-                <a:solidFill>
-                  <a:srgbClr val="4338CA"/>
-                </a:solidFill>
-                <a:latin typeface="Trebuchet MS" pitchFamily="34" charset="0"/>
-                <a:ea typeface="Trebuchet MS" pitchFamily="34" charset="-122"/>
-                <a:cs typeface="Trebuchet MS" pitchFamily="34" charset="-120"/>
-              </a:rPr>
-              <a:t>slowness</a:t>
-            </a:r>
-            <a:endParaRPr lang="en-US" sz="1200" dirty="0"/>
-          </a:p>
-        </p:txBody>
-      </p:sp>
-      <p:sp>
-        <p:nvSpPr>
-          <p:cNvPr id="48" name="Shape 46"/>
-          <p:cNvSpPr/>
-          <p:nvPr/>
-        </p:nvSpPr>
-        <p:spPr>
-          <a:xfrm>
-            <a:off x="4718304" y="4023360"/>
-            <a:ext cx="2011680" cy="402336"/>
-          </a:xfrm>
-          <a:prstGeom prst="rect">
-            <a:avLst>
-              <a:gd name="adj" fmla="val 13636"/>
-            </a:avLst>
-          </a:prstGeom>
-          <a:solidFill>
-            <a:srgbClr val="EEF2FF"/>
-          </a:solidFill>
-          <a:ln w="12700">
-            <a:solidFill>
-              <a:srgbClr val="6366F1"/>
-            </a:solidFill>
-            <a:prstDash val="solid"/>
-          </a:ln>
-        </p:spPr>
-      </p:sp>
-      <p:sp>
-        <p:nvSpPr>
-          <p:cNvPr id="49" name="Text 47"/>
-          <p:cNvSpPr/>
-          <p:nvPr/>
-        </p:nvSpPr>
-        <p:spPr>
-          <a:xfrm>
-            <a:off x="4718304" y="4023360"/>
-            <a:ext cx="2011680" cy="402336"/>
-          </a:xfrm>
-          <a:prstGeom prst="rect">
-            <a:avLst/>
-          </a:prstGeom>
-          <a:noFill/>
-          <a:ln/>
-        </p:spPr>
-        <p:txBody>
-          <a:bodyPr wrap="square" lIns="0" tIns="0" rIns="0" bIns="0" rtlCol="0" anchor="ctr"/>
-          <a:lstStyle/>
-          <a:p>
-            <a:pPr algn="ctr" indent="0" marL="0">
-              <a:buNone/>
-            </a:pPr>
-            <a:r>
-              <a:rPr lang="en-US" sz="1200" b="1" dirty="0">
-                <a:solidFill>
-                  <a:srgbClr val="4338CA"/>
-                </a:solidFill>
-                <a:latin typeface="Trebuchet MS" pitchFamily="34" charset="0"/>
-                <a:ea typeface="Trebuchet MS" pitchFamily="34" charset="-122"/>
-                <a:cs typeface="Trebuchet MS" pitchFamily="34" charset="-120"/>
-              </a:rPr>
-              <a:t>slower</a:t>
-            </a:r>
-            <a:endParaRPr lang="en-US" sz="1200" dirty="0"/>
-          </a:p>
-        </p:txBody>
-      </p:sp>
-      <p:sp>
-        <p:nvSpPr>
-          <p:cNvPr id="50" name="Shape 48"/>
-          <p:cNvSpPr/>
-          <p:nvPr/>
-        </p:nvSpPr>
-        <p:spPr>
-          <a:xfrm>
-            <a:off x="6894576" y="4023360"/>
-            <a:ext cx="2011680" cy="402336"/>
-          </a:xfrm>
-          <a:prstGeom prst="rect">
-            <a:avLst>
-              <a:gd name="adj" fmla="val 13636"/>
-            </a:avLst>
-          </a:prstGeom>
-          <a:solidFill>
-            <a:srgbClr val="EEF2FF"/>
-          </a:solidFill>
-          <a:ln w="12700">
-            <a:solidFill>
-              <a:srgbClr val="6366F1"/>
-            </a:solidFill>
-            <a:prstDash val="solid"/>
-          </a:ln>
-        </p:spPr>
-      </p:sp>
-      <p:sp>
-        <p:nvSpPr>
-          <p:cNvPr id="51" name="Text 49"/>
-          <p:cNvSpPr/>
-          <p:nvPr/>
-        </p:nvSpPr>
-        <p:spPr>
-          <a:xfrm>
-            <a:off x="6894576" y="4023360"/>
-            <a:ext cx="2011680" cy="402336"/>
-          </a:xfrm>
-          <a:prstGeom prst="rect">
-            <a:avLst/>
-          </a:prstGeom>
-          <a:noFill/>
-          <a:ln/>
-        </p:spPr>
-        <p:txBody>
-          <a:bodyPr wrap="square" lIns="0" tIns="0" rIns="0" bIns="0" rtlCol="0" anchor="ctr"/>
-          <a:lstStyle/>
-          <a:p>
-            <a:pPr algn="ctr" indent="0" marL="0">
-              <a:buNone/>
-            </a:pPr>
-            <a:r>
-              <a:rPr lang="en-US" sz="1200" b="1" dirty="0">
-                <a:solidFill>
-                  <a:srgbClr val="4338CA"/>
-                </a:solidFill>
-                <a:latin typeface="Trebuchet MS" pitchFamily="34" charset="0"/>
-                <a:ea typeface="Trebuchet MS" pitchFamily="34" charset="-122"/>
-                <a:cs typeface="Trebuchet MS" pitchFamily="34" charset="-120"/>
-              </a:rPr>
-              <a:t>slowest</a:t>
-            </a:r>
-            <a:endParaRPr lang="en-US" sz="1200" dirty="0"/>
-          </a:p>
-        </p:txBody>
-      </p:sp>
-      <p:sp>
-        <p:nvSpPr>
-          <p:cNvPr id="52" name="Shape 50"/>
-          <p:cNvSpPr/>
-          <p:nvPr/>
-        </p:nvSpPr>
-        <p:spPr>
-          <a:xfrm>
-            <a:off x="365760" y="4498848"/>
-            <a:ext cx="2011680" cy="402336"/>
-          </a:xfrm>
-          <a:prstGeom prst="rect">
-            <a:avLst>
-              <a:gd name="adj" fmla="val 13636"/>
-            </a:avLst>
-          </a:prstGeom>
-          <a:solidFill>
-            <a:srgbClr val="EEF2FF"/>
-          </a:solidFill>
-          <a:ln w="12700">
-            <a:solidFill>
-              <a:srgbClr val="6366F1"/>
-            </a:solidFill>
-            <a:prstDash val="solid"/>
-          </a:ln>
-        </p:spPr>
-      </p:sp>
-      <p:sp>
-        <p:nvSpPr>
-          <p:cNvPr id="53" name="Text 51"/>
-          <p:cNvSpPr/>
-          <p:nvPr/>
-        </p:nvSpPr>
-        <p:spPr>
-          <a:xfrm>
-            <a:off x="365760" y="4498848"/>
-            <a:ext cx="2011680" cy="402336"/>
-          </a:xfrm>
-          <a:prstGeom prst="rect">
-            <a:avLst/>
-          </a:prstGeom>
-          <a:noFill/>
-          <a:ln/>
-        </p:spPr>
-        <p:txBody>
-          <a:bodyPr wrap="square" lIns="0" tIns="0" rIns="0" bIns="0" rtlCol="0" anchor="ctr"/>
-          <a:lstStyle/>
-          <a:p>
-            <a:pPr algn="ctr" indent="0" marL="0">
-              <a:buNone/>
-            </a:pPr>
-            <a:r>
-              <a:rPr lang="en-US" sz="1200" b="1" dirty="0">
-                <a:solidFill>
-                  <a:srgbClr val="4338CA"/>
-                </a:solidFill>
-                <a:latin typeface="Trebuchet MS" pitchFamily="34" charset="0"/>
-                <a:ea typeface="Trebuchet MS" pitchFamily="34" charset="-122"/>
-                <a:cs typeface="Trebuchet MS" pitchFamily="34" charset="-120"/>
-              </a:rPr>
-              <a:t>slowing</a:t>
-            </a:r>
-            <a:endParaRPr lang="en-US" sz="1200" dirty="0"/>
-          </a:p>
-        </p:txBody>
-      </p:sp>
-      <p:sp>
-        <p:nvSpPr>
-          <p:cNvPr id="54" name="Shape 52"/>
-          <p:cNvSpPr/>
-          <p:nvPr/>
-        </p:nvSpPr>
-        <p:spPr>
-          <a:xfrm>
-            <a:off x="2542032" y="4498848"/>
-            <a:ext cx="2011680" cy="402336"/>
-          </a:xfrm>
-          <a:prstGeom prst="rect">
-            <a:avLst>
-              <a:gd name="adj" fmla="val 13636"/>
-            </a:avLst>
-          </a:prstGeom>
-          <a:solidFill>
-            <a:srgbClr val="EEF2FF"/>
-          </a:solidFill>
-          <a:ln w="12700">
-            <a:solidFill>
-              <a:srgbClr val="6366F1"/>
-            </a:solidFill>
-            <a:prstDash val="solid"/>
-          </a:ln>
-        </p:spPr>
-      </p:sp>
-      <p:sp>
-        <p:nvSpPr>
-          <p:cNvPr id="55" name="Text 53"/>
-          <p:cNvSpPr/>
-          <p:nvPr/>
-        </p:nvSpPr>
-        <p:spPr>
-          <a:xfrm>
-            <a:off x="2542032" y="4498848"/>
-            <a:ext cx="2011680" cy="402336"/>
-          </a:xfrm>
-          <a:prstGeom prst="rect">
-            <a:avLst/>
-          </a:prstGeom>
-          <a:noFill/>
-          <a:ln/>
-        </p:spPr>
-        <p:txBody>
-          <a:bodyPr wrap="square" lIns="0" tIns="0" rIns="0" bIns="0" rtlCol="0" anchor="ctr"/>
-          <a:lstStyle/>
-          <a:p>
-            <a:pPr algn="ctr" indent="0" marL="0">
-              <a:buNone/>
-            </a:pPr>
-            <a:r>
-              <a:rPr lang="en-US" sz="1200" b="1" dirty="0">
-                <a:solidFill>
-                  <a:srgbClr val="4338CA"/>
-                </a:solidFill>
-                <a:latin typeface="Trebuchet MS" pitchFamily="34" charset="0"/>
-                <a:ea typeface="Trebuchet MS" pitchFamily="34" charset="-122"/>
-                <a:cs typeface="Trebuchet MS" pitchFamily="34" charset="-120"/>
-              </a:rPr>
-              <a:t>slowdown</a:t>
-            </a:r>
-            <a:endParaRPr lang="en-US" sz="1200" dirty="0"/>
-          </a:p>
-        </p:txBody>
-      </p:sp>
-      <p:sp>
-        <p:nvSpPr>
-          <p:cNvPr id="56" name="Shape 54"/>
-          <p:cNvSpPr/>
-          <p:nvPr/>
-        </p:nvSpPr>
-        <p:spPr>
-          <a:xfrm>
-            <a:off x="4718304" y="4498848"/>
-            <a:ext cx="2011680" cy="402336"/>
-          </a:xfrm>
-          <a:prstGeom prst="rect">
-            <a:avLst>
-              <a:gd name="adj" fmla="val 13636"/>
-            </a:avLst>
-          </a:prstGeom>
-          <a:solidFill>
-            <a:srgbClr val="EEF2FF"/>
-          </a:solidFill>
-          <a:ln w="12700">
-            <a:solidFill>
-              <a:srgbClr val="6366F1"/>
-            </a:solidFill>
-            <a:prstDash val="solid"/>
-          </a:ln>
-        </p:spPr>
-      </p:sp>
-      <p:sp>
-        <p:nvSpPr>
-          <p:cNvPr id="57" name="Text 55"/>
-          <p:cNvSpPr/>
-          <p:nvPr/>
-        </p:nvSpPr>
-        <p:spPr>
-          <a:xfrm>
-            <a:off x="4718304" y="4498848"/>
-            <a:ext cx="2011680" cy="402336"/>
-          </a:xfrm>
-          <a:prstGeom prst="rect">
-            <a:avLst/>
-          </a:prstGeom>
-          <a:noFill/>
-          <a:ln/>
-        </p:spPr>
-        <p:txBody>
-          <a:bodyPr wrap="square" lIns="0" tIns="0" rIns="0" bIns="0" rtlCol="0" anchor="ctr"/>
-          <a:lstStyle/>
-          <a:p>
-            <a:pPr algn="ctr" indent="0" marL="0">
-              <a:buNone/>
-            </a:pPr>
-            <a:r>
-              <a:rPr lang="en-US" sz="1200" b="1" dirty="0">
-                <a:solidFill>
-                  <a:srgbClr val="4338CA"/>
-                </a:solidFill>
-                <a:latin typeface="Trebuchet MS" pitchFamily="34" charset="0"/>
-                <a:ea typeface="Trebuchet MS" pitchFamily="34" charset="-122"/>
-                <a:cs typeface="Trebuchet MS" pitchFamily="34" charset="-120"/>
-              </a:rPr>
-              <a:t>slowly</a:t>
-            </a:r>
-            <a:endParaRPr lang="en-US" sz="1200" dirty="0"/>
-          </a:p>
-        </p:txBody>
-      </p:sp>
-      <p:sp>
-        <p:nvSpPr>
-          <p:cNvPr id="58" name="Shape 56"/>
-          <p:cNvSpPr/>
-          <p:nvPr/>
-        </p:nvSpPr>
-        <p:spPr>
-          <a:xfrm>
-            <a:off x="6894576" y="4498848"/>
-            <a:ext cx="2011680" cy="402336"/>
-          </a:xfrm>
-          <a:prstGeom prst="rect">
-            <a:avLst>
-              <a:gd name="adj" fmla="val 13636"/>
-            </a:avLst>
-          </a:prstGeom>
-          <a:solidFill>
-            <a:srgbClr val="EEF2FF"/>
-          </a:solidFill>
-          <a:ln w="12700">
-            <a:solidFill>
-              <a:srgbClr val="6366F1"/>
-            </a:solidFill>
-            <a:prstDash val="solid"/>
-          </a:ln>
-        </p:spPr>
-      </p:sp>
-      <p:sp>
-        <p:nvSpPr>
-          <p:cNvPr id="59" name="Text 57"/>
-          <p:cNvSpPr/>
-          <p:nvPr/>
-        </p:nvSpPr>
-        <p:spPr>
-          <a:xfrm>
-            <a:off x="6894576" y="4498848"/>
-            <a:ext cx="2011680" cy="402336"/>
-          </a:xfrm>
-          <a:prstGeom prst="rect">
-            <a:avLst/>
-          </a:prstGeom>
-          <a:noFill/>
-          <a:ln/>
-        </p:spPr>
-        <p:txBody>
-          <a:bodyPr wrap="square" lIns="0" tIns="0" rIns="0" bIns="0" rtlCol="0" anchor="ctr"/>
-          <a:lstStyle/>
-          <a:p>
-            <a:pPr algn="ctr" indent="0" marL="0">
-              <a:buNone/>
-            </a:pPr>
-            <a:r>
-              <a:rPr lang="en-US" sz="1200" b="1" dirty="0">
-                <a:solidFill>
-                  <a:srgbClr val="4338CA"/>
-                </a:solidFill>
-                <a:latin typeface="Trebuchet MS" pitchFamily="34" charset="0"/>
-                <a:ea typeface="Trebuchet MS" pitchFamily="34" charset="-122"/>
-                <a:cs typeface="Trebuchet MS" pitchFamily="34" charset="-120"/>
-              </a:rPr>
-              <a:t>outslow</a:t>
+              <a:t>slowed</a:t>
             </a:r>
             <a:endParaRPr lang="en-US" sz="1200" dirty="0"/>
           </a:p>
@@ -34125,7 +33978,7 @@
                 <a:ea typeface="Calibri" pitchFamily="34" charset="-122"/>
                 <a:cs typeface="Calibri" pitchFamily="34" charset="-120"/>
               </a:rPr>
-              <a:t>Word Labs  •  wordlabs.app  •  Root: 'slow' = not fast, moving carefully</a:t>
+              <a:t>Word Labs  •  wordlabs.app  •  Root: 'slow' = not fast</a:t>
             </a:r>
             <a:endParaRPr lang="en-US" sz="800" dirty="0"/>
           </a:p>
@@ -34289,7 +34142,7 @@
                 <a:ea typeface="Calibri" pitchFamily="34" charset="-122"/>
                 <a:cs typeface="Calibri" pitchFamily="34" charset="-120"/>
               </a:rPr>
-              <a:t>The core part of a word carrying its basic meaning. For example, 'slow' means 'not fast, moving carefully'.</a:t>
+              <a:t>The core part of a word carrying its basic meaning. For example, 'slow' means 'not fast'.</a:t>
             </a:r>
             <a:endParaRPr lang="en-US" sz="1350" dirty="0"/>
           </a:p>
@@ -34909,7 +34762,7 @@
                 <a:ea typeface="Calibri" pitchFamily="34" charset="-122"/>
                 <a:cs typeface="Calibri" pitchFamily="34" charset="-120"/>
               </a:rPr>
-              <a:t>Word Labs  •  wordlabs.app  •  Root: 'slow' = not fast, moving carefully</a:t>
+              <a:t>Word Labs  •  wordlabs.app  •  Root: 'slow' = not fast</a:t>
             </a:r>
             <a:endParaRPr lang="en-US" sz="800" dirty="0"/>
           </a:p>
@@ -35021,7 +34874,7 @@
                 <a:ea typeface="Calibri" pitchFamily="34" charset="-122"/>
                 <a:cs typeface="Calibri" pitchFamily="34" charset="-120"/>
               </a:rPr>
-              <a:t>1.  The root 'slow' comes from ancient Greek.</a:t>
+              <a:t>1.  'slow' means 'not fast'.</a:t>
             </a:r>
             <a:endParaRPr lang="en-US" sz="1300" dirty="0"/>
           </a:p>
@@ -35044,11 +34897,11 @@
             </a:avLst>
           </a:prstGeom>
           <a:solidFill>
-            <a:srgbClr val="FEE2E2"/>
-          </a:solidFill>
-          <a:ln w="12700">
-            <a:solidFill>
-              <a:srgbClr val="DC2626"/>
+            <a:srgbClr val="DCFCE7"/>
+          </a:solidFill>
+          <a:ln w="12700">
+            <a:solidFill>
+              <a:srgbClr val="16A34A"/>
             </a:solidFill>
             <a:prstDash val="solid"/>
           </a:ln>
@@ -35081,13 +34934,13 @@
             <a:r>
               <a:rPr lang="en-US" sz="1100" b="1" dirty="0">
                 <a:solidFill>
-                  <a:srgbClr val="DC2626"/>
+                  <a:srgbClr val="16A34A"/>
                 </a:solidFill>
                 <a:latin typeface="Trebuchet MS" pitchFamily="34" charset="0"/>
                 <a:ea typeface="Trebuchet MS" pitchFamily="34" charset="-122"/>
                 <a:cs typeface="Trebuchet MS" pitchFamily="34" charset="-120"/>
               </a:rPr>
-              <a:t>FALSE</a:t>
+              <a:t>TRUE</a:t>
             </a:r>
             <a:endParaRPr lang="en-US" sz="1100" dirty="0"/>
           </a:p>
@@ -35160,7 +35013,7 @@
                 <a:ea typeface="Calibri" pitchFamily="34" charset="-122"/>
                 <a:cs typeface="Calibri" pitchFamily="34" charset="-120"/>
               </a:rPr>
-              <a:t>2.  Adding '-ness' to 'slow' makes the word 'slowness', which means the quality of being slow.</a:t>
+              <a:t>2.  'slow' means 'not moving or happening quickly'.</a:t>
             </a:r>
             <a:endParaRPr lang="en-US" sz="1300" dirty="0"/>
           </a:p>
@@ -35299,7 +35152,7 @@
                 <a:ea typeface="Calibri" pitchFamily="34" charset="-122"/>
                 <a:cs typeface="Calibri" pitchFamily="34" charset="-120"/>
               </a:rPr>
-              <a:t>3.  The word 'slowly' is made from the root 'slow' and the suffix '-ly'.</a:t>
+              <a:t>3.  'slowed' means 'became slower or reduced in speed'.</a:t>
             </a:r>
             <a:endParaRPr lang="en-US" sz="1300" dirty="0"/>
           </a:p>
@@ -35438,7 +35291,7 @@
                 <a:ea typeface="Calibri" pitchFamily="34" charset="-122"/>
                 <a:cs typeface="Calibri" pitchFamily="34" charset="-120"/>
               </a:rPr>
-              <a:t>4.  The word 'slowest' uses the suffix '-est' to show that something is the most slow of all.</a:t>
+              <a:t>4.  'slowed' means 'became louder than before'.</a:t>
             </a:r>
             <a:endParaRPr lang="en-US" sz="1300" dirty="0"/>
           </a:p>
@@ -35461,11 +35314,11 @@
             </a:avLst>
           </a:prstGeom>
           <a:solidFill>
-            <a:srgbClr val="DCFCE7"/>
-          </a:solidFill>
-          <a:ln w="12700">
-            <a:solidFill>
-              <a:srgbClr val="16A34A"/>
+            <a:srgbClr val="FEE2E2"/>
+          </a:solidFill>
+          <a:ln w="12700">
+            <a:solidFill>
+              <a:srgbClr val="DC2626"/>
             </a:solidFill>
             <a:prstDash val="solid"/>
           </a:ln>
@@ -35498,13 +35351,13 @@
             <a:r>
               <a:rPr lang="en-US" sz="1100" b="1" dirty="0">
                 <a:solidFill>
-                  <a:srgbClr val="16A34A"/>
+                  <a:srgbClr val="DC2626"/>
                 </a:solidFill>
                 <a:latin typeface="Trebuchet MS" pitchFamily="34" charset="0"/>
                 <a:ea typeface="Trebuchet MS" pitchFamily="34" charset="-122"/>
                 <a:cs typeface="Trebuchet MS" pitchFamily="34" charset="-120"/>
               </a:rPr>
-              <a:t>TRUE</a:t>
+              <a:t>FALSE</a:t>
             </a:r>
             <a:endParaRPr lang="en-US" sz="1100" dirty="0"/>
           </a:p>
@@ -35577,7 +35430,7 @@
                 <a:ea typeface="Calibri" pitchFamily="34" charset="-122"/>
                 <a:cs typeface="Calibri" pitchFamily="34" charset="-120"/>
               </a:rPr>
-              <a:t>5.  The root 'slow' means moving very quickly and with great speed.</a:t>
+              <a:t>5.  'slow' means 'extremely bright in colour'.</a:t>
             </a:r>
             <a:endParaRPr lang="en-US" sz="1300" dirty="0"/>
           </a:p>
@@ -35935,7 +35788,7 @@
                 <a:ea typeface="Calibri" pitchFamily="34" charset="-122"/>
                 <a:cs typeface="Calibri" pitchFamily="34" charset="-120"/>
               </a:rPr>
-              <a:t>Word Labs  •  wordlabs.app  •  Root: 'slow' = not fast, moving carefully</a:t>
+              <a:t>Word Labs  •  wordlabs.app  •  Root: 'slow' = not fast</a:t>
             </a:r>
             <a:endParaRPr lang="en-US" sz="800" dirty="0"/>
           </a:p>
@@ -36072,7 +35925,7 @@
                 <a:ea typeface="Trebuchet MS" pitchFamily="34" charset="-122"/>
                 <a:cs typeface="Trebuchet MS" pitchFamily="34" charset="-120"/>
               </a:rPr>
-              <a:t>not fast, moving carefully</a:t>
+              <a:t>not fast</a:t>
             </a:r>
             <a:endParaRPr lang="en-US" sz="2000" dirty="0"/>
           </a:p>
@@ -36111,7 +35964,7 @@
                 <a:ea typeface="Calibri" pitchFamily="34" charset="-122"/>
                 <a:cs typeface="Calibri" pitchFamily="34" charset="-120"/>
               </a:rPr>
-              <a:t>Origin: Old English: slaw</a:t>
+              <a:t>Origin: Anglo-Saxon (Old English) root</a:t>
             </a:r>
             <a:endParaRPr lang="en-US" sz="1100" dirty="0"/>
           </a:p>
@@ -36216,7 +36069,7 @@
                 <a:ea typeface="Trebuchet MS" pitchFamily="34" charset="-122"/>
                 <a:cs typeface="Trebuchet MS" pitchFamily="34" charset="-120"/>
               </a:rPr>
-              <a:t>slowly</a:t>
+              <a:t>slow</a:t>
             </a:r>
             <a:endParaRPr lang="en-US" sz="1300" dirty="0"/>
           </a:p>
@@ -36282,337 +36135,7 @@
                 <a:ea typeface="Trebuchet MS" pitchFamily="34" charset="-122"/>
                 <a:cs typeface="Trebuchet MS" pitchFamily="34" charset="-120"/>
               </a:rPr>
-              <a:t>slowness</a:t>
-            </a:r>
-            <a:endParaRPr lang="en-US" sz="1300" dirty="0"/>
-          </a:p>
-        </p:txBody>
-      </p:sp>
-      <p:sp>
-        <p:nvSpPr>
-          <p:cNvPr id="20" name="Shape 18"/>
-          <p:cNvSpPr/>
-          <p:nvPr/>
-        </p:nvSpPr>
-        <p:spPr>
-          <a:xfrm>
-            <a:off x="4663440" y="2743200"/>
-            <a:ext cx="2011680" cy="502920"/>
-          </a:xfrm>
-          <a:prstGeom prst="rect">
-            <a:avLst>
-              <a:gd name="adj" fmla="val 14545"/>
-            </a:avLst>
-          </a:prstGeom>
-          <a:solidFill>
-            <a:srgbClr val="EEF2FF"/>
-          </a:solidFill>
-          <a:ln w="12700">
-            <a:solidFill>
-              <a:srgbClr val="6366F1"/>
-            </a:solidFill>
-            <a:prstDash val="solid"/>
-          </a:ln>
-        </p:spPr>
-      </p:sp>
-      <p:sp>
-        <p:nvSpPr>
-          <p:cNvPr id="21" name="Text 19"/>
-          <p:cNvSpPr/>
-          <p:nvPr/>
-        </p:nvSpPr>
-        <p:spPr>
-          <a:xfrm>
-            <a:off x="4663440" y="2743200"/>
-            <a:ext cx="2011680" cy="502920"/>
-          </a:xfrm>
-          <a:prstGeom prst="rect">
-            <a:avLst/>
-          </a:prstGeom>
-          <a:noFill/>
-          <a:ln/>
-        </p:spPr>
-        <p:txBody>
-          <a:bodyPr wrap="square" lIns="0" tIns="0" rIns="0" bIns="0" rtlCol="0" anchor="ctr"/>
-          <a:lstStyle/>
-          <a:p>
-            <a:pPr algn="ctr" indent="0" marL="0">
-              <a:buNone/>
-            </a:pPr>
-            <a:r>
-              <a:rPr lang="en-US" sz="1300" b="1" dirty="0">
-                <a:solidFill>
-                  <a:srgbClr val="4338CA"/>
-                </a:solidFill>
-                <a:latin typeface="Trebuchet MS" pitchFamily="34" charset="0"/>
-                <a:ea typeface="Trebuchet MS" pitchFamily="34" charset="-122"/>
-                <a:cs typeface="Trebuchet MS" pitchFamily="34" charset="-120"/>
-              </a:rPr>
-              <a:t>slower</a:t>
-            </a:r>
-            <a:endParaRPr lang="en-US" sz="1300" dirty="0"/>
-          </a:p>
-        </p:txBody>
-      </p:sp>
-      <p:sp>
-        <p:nvSpPr>
-          <p:cNvPr id="22" name="Shape 20"/>
-          <p:cNvSpPr/>
-          <p:nvPr/>
-        </p:nvSpPr>
-        <p:spPr>
-          <a:xfrm>
-            <a:off x="6812280" y="2743200"/>
-            <a:ext cx="2011680" cy="502920"/>
-          </a:xfrm>
-          <a:prstGeom prst="rect">
-            <a:avLst>
-              <a:gd name="adj" fmla="val 14545"/>
-            </a:avLst>
-          </a:prstGeom>
-          <a:solidFill>
-            <a:srgbClr val="EEF2FF"/>
-          </a:solidFill>
-          <a:ln w="12700">
-            <a:solidFill>
-              <a:srgbClr val="6366F1"/>
-            </a:solidFill>
-            <a:prstDash val="solid"/>
-          </a:ln>
-        </p:spPr>
-      </p:sp>
-      <p:sp>
-        <p:nvSpPr>
-          <p:cNvPr id="23" name="Text 21"/>
-          <p:cNvSpPr/>
-          <p:nvPr/>
-        </p:nvSpPr>
-        <p:spPr>
-          <a:xfrm>
-            <a:off x="6812280" y="2743200"/>
-            <a:ext cx="2011680" cy="502920"/>
-          </a:xfrm>
-          <a:prstGeom prst="rect">
-            <a:avLst/>
-          </a:prstGeom>
-          <a:noFill/>
-          <a:ln/>
-        </p:spPr>
-        <p:txBody>
-          <a:bodyPr wrap="square" lIns="0" tIns="0" rIns="0" bIns="0" rtlCol="0" anchor="ctr"/>
-          <a:lstStyle/>
-          <a:p>
-            <a:pPr algn="ctr" indent="0" marL="0">
-              <a:buNone/>
-            </a:pPr>
-            <a:r>
-              <a:rPr lang="en-US" sz="1300" b="1" dirty="0">
-                <a:solidFill>
-                  <a:srgbClr val="4338CA"/>
-                </a:solidFill>
-                <a:latin typeface="Trebuchet MS" pitchFamily="34" charset="0"/>
-                <a:ea typeface="Trebuchet MS" pitchFamily="34" charset="-122"/>
-                <a:cs typeface="Trebuchet MS" pitchFamily="34" charset="-120"/>
-              </a:rPr>
-              <a:t>slowest</a:t>
-            </a:r>
-            <a:endParaRPr lang="en-US" sz="1300" dirty="0"/>
-          </a:p>
-        </p:txBody>
-      </p:sp>
-      <p:sp>
-        <p:nvSpPr>
-          <p:cNvPr id="24" name="Shape 22"/>
-          <p:cNvSpPr/>
-          <p:nvPr/>
-        </p:nvSpPr>
-        <p:spPr>
-          <a:xfrm>
-            <a:off x="365760" y="3401568"/>
-            <a:ext cx="2011680" cy="502920"/>
-          </a:xfrm>
-          <a:prstGeom prst="rect">
-            <a:avLst>
-              <a:gd name="adj" fmla="val 14545"/>
-            </a:avLst>
-          </a:prstGeom>
-          <a:solidFill>
-            <a:srgbClr val="EEF2FF"/>
-          </a:solidFill>
-          <a:ln w="12700">
-            <a:solidFill>
-              <a:srgbClr val="6366F1"/>
-            </a:solidFill>
-            <a:prstDash val="solid"/>
-          </a:ln>
-        </p:spPr>
-      </p:sp>
-      <p:sp>
-        <p:nvSpPr>
-          <p:cNvPr id="25" name="Text 23"/>
-          <p:cNvSpPr/>
-          <p:nvPr/>
-        </p:nvSpPr>
-        <p:spPr>
-          <a:xfrm>
-            <a:off x="365760" y="3401568"/>
-            <a:ext cx="2011680" cy="502920"/>
-          </a:xfrm>
-          <a:prstGeom prst="rect">
-            <a:avLst/>
-          </a:prstGeom>
-          <a:noFill/>
-          <a:ln/>
-        </p:spPr>
-        <p:txBody>
-          <a:bodyPr wrap="square" lIns="0" tIns="0" rIns="0" bIns="0" rtlCol="0" anchor="ctr"/>
-          <a:lstStyle/>
-          <a:p>
-            <a:pPr algn="ctr" indent="0" marL="0">
-              <a:buNone/>
-            </a:pPr>
-            <a:r>
-              <a:rPr lang="en-US" sz="1300" b="1" dirty="0">
-                <a:solidFill>
-                  <a:srgbClr val="4338CA"/>
-                </a:solidFill>
-                <a:latin typeface="Trebuchet MS" pitchFamily="34" charset="0"/>
-                <a:ea typeface="Trebuchet MS" pitchFamily="34" charset="-122"/>
-                <a:cs typeface="Trebuchet MS" pitchFamily="34" charset="-120"/>
-              </a:rPr>
-              <a:t>slowing</a:t>
-            </a:r>
-            <a:endParaRPr lang="en-US" sz="1300" dirty="0"/>
-          </a:p>
-        </p:txBody>
-      </p:sp>
-      <p:sp>
-        <p:nvSpPr>
-          <p:cNvPr id="26" name="Shape 24"/>
-          <p:cNvSpPr/>
-          <p:nvPr/>
-        </p:nvSpPr>
-        <p:spPr>
-          <a:xfrm>
-            <a:off x="2514600" y="3401568"/>
-            <a:ext cx="2011680" cy="502920"/>
-          </a:xfrm>
-          <a:prstGeom prst="rect">
-            <a:avLst>
-              <a:gd name="adj" fmla="val 14545"/>
-            </a:avLst>
-          </a:prstGeom>
-          <a:solidFill>
-            <a:srgbClr val="EEF2FF"/>
-          </a:solidFill>
-          <a:ln w="12700">
-            <a:solidFill>
-              <a:srgbClr val="6366F1"/>
-            </a:solidFill>
-            <a:prstDash val="solid"/>
-          </a:ln>
-        </p:spPr>
-      </p:sp>
-      <p:sp>
-        <p:nvSpPr>
-          <p:cNvPr id="27" name="Text 25"/>
-          <p:cNvSpPr/>
-          <p:nvPr/>
-        </p:nvSpPr>
-        <p:spPr>
-          <a:xfrm>
-            <a:off x="2514600" y="3401568"/>
-            <a:ext cx="2011680" cy="502920"/>
-          </a:xfrm>
-          <a:prstGeom prst="rect">
-            <a:avLst/>
-          </a:prstGeom>
-          <a:noFill/>
-          <a:ln/>
-        </p:spPr>
-        <p:txBody>
-          <a:bodyPr wrap="square" lIns="0" tIns="0" rIns="0" bIns="0" rtlCol="0" anchor="ctr"/>
-          <a:lstStyle/>
-          <a:p>
-            <a:pPr algn="ctr" indent="0" marL="0">
-              <a:buNone/>
-            </a:pPr>
-            <a:r>
-              <a:rPr lang="en-US" sz="1300" b="1" dirty="0">
-                <a:solidFill>
-                  <a:srgbClr val="4338CA"/>
-                </a:solidFill>
-                <a:latin typeface="Trebuchet MS" pitchFamily="34" charset="0"/>
-                <a:ea typeface="Trebuchet MS" pitchFamily="34" charset="-122"/>
-                <a:cs typeface="Trebuchet MS" pitchFamily="34" charset="-120"/>
-              </a:rPr>
-              <a:t>slowdown</a:t>
-            </a:r>
-            <a:endParaRPr lang="en-US" sz="1300" dirty="0"/>
-          </a:p>
-        </p:txBody>
-      </p:sp>
-      <p:sp>
-        <p:nvSpPr>
-          <p:cNvPr id="28" name="Shape 26"/>
-          <p:cNvSpPr/>
-          <p:nvPr/>
-        </p:nvSpPr>
-        <p:spPr>
-          <a:xfrm>
-            <a:off x="4663440" y="3401568"/>
-            <a:ext cx="2011680" cy="502920"/>
-          </a:xfrm>
-          <a:prstGeom prst="rect">
-            <a:avLst>
-              <a:gd name="adj" fmla="val 14545"/>
-            </a:avLst>
-          </a:prstGeom>
-          <a:solidFill>
-            <a:srgbClr val="EEF2FF"/>
-          </a:solidFill>
-          <a:ln w="12700">
-            <a:solidFill>
-              <a:srgbClr val="6366F1"/>
-            </a:solidFill>
-            <a:prstDash val="solid"/>
-          </a:ln>
-        </p:spPr>
-      </p:sp>
-      <p:sp>
-        <p:nvSpPr>
-          <p:cNvPr id="29" name="Text 27"/>
-          <p:cNvSpPr/>
-          <p:nvPr/>
-        </p:nvSpPr>
-        <p:spPr>
-          <a:xfrm>
-            <a:off x="4663440" y="3401568"/>
-            <a:ext cx="2011680" cy="502920"/>
-          </a:xfrm>
-          <a:prstGeom prst="rect">
-            <a:avLst/>
-          </a:prstGeom>
-          <a:noFill/>
-          <a:ln/>
-        </p:spPr>
-        <p:txBody>
-          <a:bodyPr wrap="square" lIns="0" tIns="0" rIns="0" bIns="0" rtlCol="0" anchor="ctr"/>
-          <a:lstStyle/>
-          <a:p>
-            <a:pPr algn="ctr" indent="0" marL="0">
-              <a:buNone/>
-            </a:pPr>
-            <a:r>
-              <a:rPr lang="en-US" sz="1300" b="1" dirty="0">
-                <a:solidFill>
-                  <a:srgbClr val="4338CA"/>
-                </a:solidFill>
-                <a:latin typeface="Trebuchet MS" pitchFamily="34" charset="0"/>
-                <a:ea typeface="Trebuchet MS" pitchFamily="34" charset="-122"/>
-                <a:cs typeface="Trebuchet MS" pitchFamily="34" charset="-120"/>
-              </a:rPr>
-              <a:t>slowly</a:t>
+              <a:t>slowed</a:t>
             </a:r>
             <a:endParaRPr lang="en-US" sz="1300" dirty="0"/>
           </a:p>
@@ -36904,7 +36427,7 @@
                 <a:ea typeface="Calibri" pitchFamily="34" charset="-122"/>
                 <a:cs typeface="Calibri" pitchFamily="34" charset="-120"/>
               </a:rPr>
-              <a:t>Word Labs  •  wordlabs.app  •  Root: 'slow' = not fast, moving carefully</a:t>
+              <a:t>Word Labs  •  wordlabs.app  •  Root: 'slow' = not fast</a:t>
             </a:r>
             <a:endParaRPr lang="en-US" sz="800" dirty="0"/>
           </a:p>
@@ -37162,7 +36685,7 @@
             <a:avLst/>
           </a:prstGeom>
           <a:solidFill>
-            <a:srgbClr val="DDD6FE"/>
+            <a:srgbClr val="F8FAFC"/>
           </a:solidFill>
           <a:ln w="12700">
             <a:solidFill>
@@ -37174,14 +36697,39 @@
       </p:sp>
       <p:sp>
         <p:nvSpPr>
-          <p:cNvPr id="18" name="Text 16"/>
-          <p:cNvSpPr/>
-          <p:nvPr/>
-        </p:nvSpPr>
-        <p:spPr>
-          <a:xfrm>
-            <a:off x="640080" y="1755648"/>
-            <a:ext cx="1463040" cy="420624"/>
+          <p:cNvPr id="18" name="Shape 16"/>
+          <p:cNvSpPr/>
+          <p:nvPr/>
+        </p:nvSpPr>
+        <p:spPr>
+          <a:xfrm>
+            <a:off x="3291840" y="1755648"/>
+            <a:ext cx="1645920" cy="420624"/>
+          </a:xfrm>
+          <a:prstGeom prst="rect">
+            <a:avLst/>
+          </a:prstGeom>
+          <a:solidFill>
+            <a:srgbClr val="CCFBF1"/>
+          </a:solidFill>
+          <a:ln w="12700">
+            <a:solidFill>
+              <a:srgbClr val="E5E7EB"/>
+            </a:solidFill>
+            <a:prstDash val="solid"/>
+          </a:ln>
+        </p:spPr>
+      </p:sp>
+      <p:sp>
+        <p:nvSpPr>
+          <p:cNvPr id="19" name="Text 17"/>
+          <p:cNvSpPr/>
+          <p:nvPr/>
+        </p:nvSpPr>
+        <p:spPr>
+          <a:xfrm>
+            <a:off x="3291840" y="1755648"/>
+            <a:ext cx="1645920" cy="420624"/>
           </a:xfrm>
           <a:prstGeom prst="rect">
             <a:avLst/>
@@ -37199,13 +36747,13 @@
             <a:r>
               <a:rPr lang="en-US" sz="1300" b="1" dirty="0">
                 <a:solidFill>
-                  <a:srgbClr val="4C1D95"/>
+                  <a:srgbClr val="0F766E"/>
                 </a:solidFill>
                 <a:latin typeface="Trebuchet MS" pitchFamily="34" charset="0"/>
                 <a:ea typeface="Trebuchet MS" pitchFamily="34" charset="-122"/>
                 <a:cs typeface="Trebuchet MS" pitchFamily="34" charset="-120"/>
               </a:rPr>
-              <a:t>un-</a:t>
+              <a:t>slow</a:t>
             </a:r>
             <a:endParaRPr lang="en-US" sz="1300" dirty="0"/>
           </a:p>
@@ -37213,20 +36761,20 @@
       </p:sp>
       <p:sp>
         <p:nvSpPr>
-          <p:cNvPr id="19" name="Shape 17"/>
-          <p:cNvSpPr/>
-          <p:nvPr/>
-        </p:nvSpPr>
-        <p:spPr>
-          <a:xfrm>
-            <a:off x="3291840" y="1755648"/>
-            <a:ext cx="1645920" cy="420624"/>
-          </a:xfrm>
-          <a:prstGeom prst="rect">
-            <a:avLst/>
-          </a:prstGeom>
-          <a:solidFill>
-            <a:srgbClr val="CCFBF1"/>
+          <p:cNvPr id="20" name="Shape 18"/>
+          <p:cNvSpPr/>
+          <p:nvPr/>
+        </p:nvSpPr>
+        <p:spPr>
+          <a:xfrm>
+            <a:off x="5943600" y="1755648"/>
+            <a:ext cx="1463040" cy="420624"/>
+          </a:xfrm>
+          <a:prstGeom prst="rect">
+            <a:avLst/>
+          </a:prstGeom>
+          <a:solidFill>
+            <a:srgbClr val="FCE7F3"/>
           </a:solidFill>
           <a:ln w="12700">
             <a:solidFill>
@@ -37238,14 +36786,14 @@
       </p:sp>
       <p:sp>
         <p:nvSpPr>
-          <p:cNvPr id="20" name="Text 18"/>
-          <p:cNvSpPr/>
-          <p:nvPr/>
-        </p:nvSpPr>
-        <p:spPr>
-          <a:xfrm>
-            <a:off x="3291840" y="1755648"/>
-            <a:ext cx="1645920" cy="420624"/>
+          <p:cNvPr id="21" name="Text 19"/>
+          <p:cNvSpPr/>
+          <p:nvPr/>
+        </p:nvSpPr>
+        <p:spPr>
+          <a:xfrm>
+            <a:off x="5943600" y="1755648"/>
+            <a:ext cx="1463040" cy="420624"/>
           </a:xfrm>
           <a:prstGeom prst="rect">
             <a:avLst/>
@@ -37263,13 +36811,13 @@
             <a:r>
               <a:rPr lang="en-US" sz="1300" b="1" dirty="0">
                 <a:solidFill>
-                  <a:srgbClr val="0F766E"/>
+                  <a:srgbClr val="9D174D"/>
                 </a:solidFill>
                 <a:latin typeface="Trebuchet MS" pitchFamily="34" charset="0"/>
                 <a:ea typeface="Trebuchet MS" pitchFamily="34" charset="-122"/>
                 <a:cs typeface="Trebuchet MS" pitchFamily="34" charset="-120"/>
               </a:rPr>
-              <a:t>slow</a:t>
+              <a:t>-ed</a:t>
             </a:r>
             <a:endParaRPr lang="en-US" sz="1300" dirty="0"/>
           </a:p>
@@ -37277,19 +36825,69 @@
       </p:sp>
       <p:sp>
         <p:nvSpPr>
-          <p:cNvPr id="21" name="Shape 19"/>
-          <p:cNvSpPr/>
-          <p:nvPr/>
-        </p:nvSpPr>
-        <p:spPr>
-          <a:xfrm>
-            <a:off x="5943600" y="1755648"/>
+          <p:cNvPr id="22" name="Shape 20"/>
+          <p:cNvSpPr/>
+          <p:nvPr/>
+        </p:nvSpPr>
+        <p:spPr>
+          <a:xfrm>
+            <a:off x="640080" y="2212848"/>
             <a:ext cx="1463040" cy="420624"/>
           </a:xfrm>
           <a:prstGeom prst="rect">
             <a:avLst/>
           </a:prstGeom>
           <a:solidFill>
+            <a:srgbClr val="F1F5F9"/>
+          </a:solidFill>
+          <a:ln w="12700">
+            <a:solidFill>
+              <a:srgbClr val="E5E7EB"/>
+            </a:solidFill>
+            <a:prstDash val="solid"/>
+          </a:ln>
+        </p:spPr>
+      </p:sp>
+      <p:sp>
+        <p:nvSpPr>
+          <p:cNvPr id="23" name="Shape 21"/>
+          <p:cNvSpPr/>
+          <p:nvPr/>
+        </p:nvSpPr>
+        <p:spPr>
+          <a:xfrm>
+            <a:off x="3291840" y="2212848"/>
+            <a:ext cx="1645920" cy="420624"/>
+          </a:xfrm>
+          <a:prstGeom prst="rect">
+            <a:avLst/>
+          </a:prstGeom>
+          <a:solidFill>
+            <a:srgbClr val="F1F5F9"/>
+          </a:solidFill>
+          <a:ln w="12700">
+            <a:solidFill>
+              <a:srgbClr val="E5E7EB"/>
+            </a:solidFill>
+            <a:prstDash val="solid"/>
+          </a:ln>
+        </p:spPr>
+      </p:sp>
+      <p:sp>
+        <p:nvSpPr>
+          <p:cNvPr id="24" name="Shape 22"/>
+          <p:cNvSpPr/>
+          <p:nvPr/>
+        </p:nvSpPr>
+        <p:spPr>
+          <a:xfrm>
+            <a:off x="5943600" y="2212848"/>
+            <a:ext cx="1463040" cy="420624"/>
+          </a:xfrm>
+          <a:prstGeom prst="rect">
+            <a:avLst/>
+          </a:prstGeom>
+          <a:solidFill>
             <a:srgbClr val="FCE7F3"/>
           </a:solidFill>
           <a:ln w="12700">
@@ -37302,13 +36900,13 @@
       </p:sp>
       <p:sp>
         <p:nvSpPr>
-          <p:cNvPr id="22" name="Text 20"/>
-          <p:cNvSpPr/>
-          <p:nvPr/>
-        </p:nvSpPr>
-        <p:spPr>
-          <a:xfrm>
-            <a:off x="5943600" y="1755648"/>
+          <p:cNvPr id="25" name="Text 23"/>
+          <p:cNvSpPr/>
+          <p:nvPr/>
+        </p:nvSpPr>
+        <p:spPr>
+          <a:xfrm>
+            <a:off x="5943600" y="2212848"/>
             <a:ext cx="1463040" cy="420624"/>
           </a:xfrm>
           <a:prstGeom prst="rect">
@@ -37333,7 +36931,7 @@
                 <a:ea typeface="Trebuchet MS" pitchFamily="34" charset="-122"/>
                 <a:cs typeface="Trebuchet MS" pitchFamily="34" charset="-120"/>
               </a:rPr>
-              <a:t>-ly</a:t>
+              <a:t>-er</a:t>
             </a:r>
             <a:endParaRPr lang="en-US" sz="1300" dirty="0"/>
           </a:p>
@@ -37341,20 +36939,20 @@
       </p:sp>
       <p:sp>
         <p:nvSpPr>
-          <p:cNvPr id="23" name="Shape 21"/>
-          <p:cNvSpPr/>
-          <p:nvPr/>
-        </p:nvSpPr>
-        <p:spPr>
-          <a:xfrm>
-            <a:off x="640080" y="2212848"/>
+          <p:cNvPr id="26" name="Shape 24"/>
+          <p:cNvSpPr/>
+          <p:nvPr/>
+        </p:nvSpPr>
+        <p:spPr>
+          <a:xfrm>
+            <a:off x="640080" y="2670048"/>
             <a:ext cx="1463040" cy="420624"/>
           </a:xfrm>
           <a:prstGeom prst="rect">
             <a:avLst/>
           </a:prstGeom>
           <a:solidFill>
-            <a:srgbClr val="DDD6FE"/>
+            <a:srgbClr val="F8FAFC"/>
           </a:solidFill>
           <a:ln w="12700">
             <a:solidFill>
@@ -37366,18 +36964,68 @@
       </p:sp>
       <p:sp>
         <p:nvSpPr>
-          <p:cNvPr id="24" name="Text 22"/>
-          <p:cNvSpPr/>
-          <p:nvPr/>
-        </p:nvSpPr>
-        <p:spPr>
-          <a:xfrm>
-            <a:off x="640080" y="2212848"/>
+          <p:cNvPr id="27" name="Shape 25"/>
+          <p:cNvSpPr/>
+          <p:nvPr/>
+        </p:nvSpPr>
+        <p:spPr>
+          <a:xfrm>
+            <a:off x="3291840" y="2670048"/>
+            <a:ext cx="1645920" cy="420624"/>
+          </a:xfrm>
+          <a:prstGeom prst="rect">
+            <a:avLst/>
+          </a:prstGeom>
+          <a:solidFill>
+            <a:srgbClr val="F8FAFC"/>
+          </a:solidFill>
+          <a:ln w="12700">
+            <a:solidFill>
+              <a:srgbClr val="E5E7EB"/>
+            </a:solidFill>
+            <a:prstDash val="solid"/>
+          </a:ln>
+        </p:spPr>
+      </p:sp>
+      <p:sp>
+        <p:nvSpPr>
+          <p:cNvPr id="28" name="Shape 26"/>
+          <p:cNvSpPr/>
+          <p:nvPr/>
+        </p:nvSpPr>
+        <p:spPr>
+          <a:xfrm>
+            <a:off x="5943600" y="2670048"/>
             <a:ext cx="1463040" cy="420624"/>
           </a:xfrm>
           <a:prstGeom prst="rect">
             <a:avLst/>
           </a:prstGeom>
+          <a:solidFill>
+            <a:srgbClr val="FCE7F3"/>
+          </a:solidFill>
+          <a:ln w="12700">
+            <a:solidFill>
+              <a:srgbClr val="E5E7EB"/>
+            </a:solidFill>
+            <a:prstDash val="solid"/>
+          </a:ln>
+        </p:spPr>
+      </p:sp>
+      <p:sp>
+        <p:nvSpPr>
+          <p:cNvPr id="29" name="Text 27"/>
+          <p:cNvSpPr/>
+          <p:nvPr/>
+        </p:nvSpPr>
+        <p:spPr>
+          <a:xfrm>
+            <a:off x="5943600" y="2670048"/>
+            <a:ext cx="1463040" cy="420624"/>
+          </a:xfrm>
+          <a:prstGeom prst="rect">
+            <a:avLst/>
+          </a:prstGeom>
           <a:noFill/>
           <a:ln/>
         </p:spPr>
@@ -37391,13 +37039,13 @@
             <a:r>
               <a:rPr lang="en-US" sz="1300" b="1" dirty="0">
                 <a:solidFill>
-                  <a:srgbClr val="4C1D95"/>
+                  <a:srgbClr val="9D174D"/>
                 </a:solidFill>
                 <a:latin typeface="Trebuchet MS" pitchFamily="34" charset="0"/>
                 <a:ea typeface="Trebuchet MS" pitchFamily="34" charset="-122"/>
                 <a:cs typeface="Trebuchet MS" pitchFamily="34" charset="-120"/>
               </a:rPr>
-              <a:t>out-</a:t>
+              <a:t>-est</a:t>
             </a:r>
             <a:endParaRPr lang="en-US" sz="1300" dirty="0"/>
           </a:p>
@@ -37405,13 +37053,38 @@
       </p:sp>
       <p:sp>
         <p:nvSpPr>
-          <p:cNvPr id="25" name="Shape 23"/>
-          <p:cNvSpPr/>
-          <p:nvPr/>
-        </p:nvSpPr>
-        <p:spPr>
-          <a:xfrm>
-            <a:off x="3291840" y="2212848"/>
+          <p:cNvPr id="30" name="Shape 28"/>
+          <p:cNvSpPr/>
+          <p:nvPr/>
+        </p:nvSpPr>
+        <p:spPr>
+          <a:xfrm>
+            <a:off x="640080" y="3127248"/>
+            <a:ext cx="1463040" cy="420624"/>
+          </a:xfrm>
+          <a:prstGeom prst="rect">
+            <a:avLst/>
+          </a:prstGeom>
+          <a:solidFill>
+            <a:srgbClr val="F1F5F9"/>
+          </a:solidFill>
+          <a:ln w="12700">
+            <a:solidFill>
+              <a:srgbClr val="E5E7EB"/>
+            </a:solidFill>
+            <a:prstDash val="solid"/>
+          </a:ln>
+        </p:spPr>
+      </p:sp>
+      <p:sp>
+        <p:nvSpPr>
+          <p:cNvPr id="31" name="Shape 29"/>
+          <p:cNvSpPr/>
+          <p:nvPr/>
+        </p:nvSpPr>
+        <p:spPr>
+          <a:xfrm>
+            <a:off x="3291840" y="3127248"/>
             <a:ext cx="1645920" cy="420624"/>
           </a:xfrm>
           <a:prstGeom prst="rect">
@@ -37430,13 +37103,13 @@
       </p:sp>
       <p:sp>
         <p:nvSpPr>
-          <p:cNvPr id="26" name="Shape 24"/>
-          <p:cNvSpPr/>
-          <p:nvPr/>
-        </p:nvSpPr>
-        <p:spPr>
-          <a:xfrm>
-            <a:off x="5943600" y="2212848"/>
+          <p:cNvPr id="32" name="Shape 30"/>
+          <p:cNvSpPr/>
+          <p:nvPr/>
+        </p:nvSpPr>
+        <p:spPr>
+          <a:xfrm>
+            <a:off x="5943600" y="3127248"/>
             <a:ext cx="1463040" cy="420624"/>
           </a:xfrm>
           <a:prstGeom prst="rect">
@@ -37455,13 +37128,13 @@
       </p:sp>
       <p:sp>
         <p:nvSpPr>
-          <p:cNvPr id="27" name="Text 25"/>
-          <p:cNvSpPr/>
-          <p:nvPr/>
-        </p:nvSpPr>
-        <p:spPr>
-          <a:xfrm>
-            <a:off x="5943600" y="2212848"/>
+          <p:cNvPr id="33" name="Text 31"/>
+          <p:cNvSpPr/>
+          <p:nvPr/>
+        </p:nvSpPr>
+        <p:spPr>
+          <a:xfrm>
+            <a:off x="5943600" y="3127248"/>
             <a:ext cx="1463040" cy="420624"/>
           </a:xfrm>
           <a:prstGeom prst="rect">
@@ -37486,7 +37159,7 @@
                 <a:ea typeface="Trebuchet MS" pitchFamily="34" charset="-122"/>
                 <a:cs typeface="Trebuchet MS" pitchFamily="34" charset="-120"/>
               </a:rPr>
-              <a:t>-ness</a:t>
+              <a:t>-ing</a:t>
             </a:r>
             <a:endParaRPr lang="en-US" sz="1300" dirty="0"/>
           </a:p>
@@ -37494,20 +37167,20 @@
       </p:sp>
       <p:sp>
         <p:nvSpPr>
-          <p:cNvPr id="28" name="Shape 26"/>
-          <p:cNvSpPr/>
-          <p:nvPr/>
-        </p:nvSpPr>
-        <p:spPr>
-          <a:xfrm>
-            <a:off x="640080" y="2670048"/>
+          <p:cNvPr id="34" name="Shape 32"/>
+          <p:cNvSpPr/>
+          <p:nvPr/>
+        </p:nvSpPr>
+        <p:spPr>
+          <a:xfrm>
+            <a:off x="640080" y="3584448"/>
             <a:ext cx="1463040" cy="420624"/>
           </a:xfrm>
           <a:prstGeom prst="rect">
             <a:avLst/>
           </a:prstGeom>
           <a:solidFill>
-            <a:srgbClr val="DDD6FE"/>
+            <a:srgbClr val="F8FAFC"/>
           </a:solidFill>
           <a:ln w="12700">
             <a:solidFill>
@@ -37519,18 +37192,68 @@
       </p:sp>
       <p:sp>
         <p:nvSpPr>
-          <p:cNvPr id="29" name="Text 27"/>
-          <p:cNvSpPr/>
-          <p:nvPr/>
-        </p:nvSpPr>
-        <p:spPr>
-          <a:xfrm>
-            <a:off x="640080" y="2670048"/>
+          <p:cNvPr id="35" name="Shape 33"/>
+          <p:cNvSpPr/>
+          <p:nvPr/>
+        </p:nvSpPr>
+        <p:spPr>
+          <a:xfrm>
+            <a:off x="3291840" y="3584448"/>
+            <a:ext cx="1645920" cy="420624"/>
+          </a:xfrm>
+          <a:prstGeom prst="rect">
+            <a:avLst/>
+          </a:prstGeom>
+          <a:solidFill>
+            <a:srgbClr val="F8FAFC"/>
+          </a:solidFill>
+          <a:ln w="12700">
+            <a:solidFill>
+              <a:srgbClr val="E5E7EB"/>
+            </a:solidFill>
+            <a:prstDash val="solid"/>
+          </a:ln>
+        </p:spPr>
+      </p:sp>
+      <p:sp>
+        <p:nvSpPr>
+          <p:cNvPr id="36" name="Shape 34"/>
+          <p:cNvSpPr/>
+          <p:nvPr/>
+        </p:nvSpPr>
+        <p:spPr>
+          <a:xfrm>
+            <a:off x="5943600" y="3584448"/>
             <a:ext cx="1463040" cy="420624"/>
           </a:xfrm>
           <a:prstGeom prst="rect">
             <a:avLst/>
           </a:prstGeom>
+          <a:solidFill>
+            <a:srgbClr val="FCE7F3"/>
+          </a:solidFill>
+          <a:ln w="12700">
+            <a:solidFill>
+              <a:srgbClr val="E5E7EB"/>
+            </a:solidFill>
+            <a:prstDash val="solid"/>
+          </a:ln>
+        </p:spPr>
+      </p:sp>
+      <p:sp>
+        <p:nvSpPr>
+          <p:cNvPr id="37" name="Text 35"/>
+          <p:cNvSpPr/>
+          <p:nvPr/>
+        </p:nvSpPr>
+        <p:spPr>
+          <a:xfrm>
+            <a:off x="5943600" y="3584448"/>
+            <a:ext cx="1463040" cy="420624"/>
+          </a:xfrm>
+          <a:prstGeom prst="rect">
+            <a:avLst/>
+          </a:prstGeom>
           <a:noFill/>
           <a:ln/>
         </p:spPr>
@@ -37544,13 +37267,13 @@
             <a:r>
               <a:rPr lang="en-US" sz="1300" b="1" dirty="0">
                 <a:solidFill>
-                  <a:srgbClr val="4C1D95"/>
+                  <a:srgbClr val="9D174D"/>
                 </a:solidFill>
                 <a:latin typeface="Trebuchet MS" pitchFamily="34" charset="0"/>
                 <a:ea typeface="Trebuchet MS" pitchFamily="34" charset="-122"/>
                 <a:cs typeface="Trebuchet MS" pitchFamily="34" charset="-120"/>
               </a:rPr>
-              <a:t>over-</a:t>
+              <a:t>-ly</a:t>
             </a:r>
             <a:endParaRPr lang="en-US" sz="1300" dirty="0"/>
           </a:p>
@@ -37558,20 +37281,45 @@
       </p:sp>
       <p:sp>
         <p:nvSpPr>
-          <p:cNvPr id="30" name="Shape 28"/>
-          <p:cNvSpPr/>
-          <p:nvPr/>
-        </p:nvSpPr>
-        <p:spPr>
-          <a:xfrm>
-            <a:off x="3291840" y="2670048"/>
+          <p:cNvPr id="38" name="Shape 36"/>
+          <p:cNvSpPr/>
+          <p:nvPr/>
+        </p:nvSpPr>
+        <p:spPr>
+          <a:xfrm>
+            <a:off x="640080" y="4041648"/>
+            <a:ext cx="1463040" cy="420624"/>
+          </a:xfrm>
+          <a:prstGeom prst="rect">
+            <a:avLst/>
+          </a:prstGeom>
+          <a:solidFill>
+            <a:srgbClr val="F1F5F9"/>
+          </a:solidFill>
+          <a:ln w="12700">
+            <a:solidFill>
+              <a:srgbClr val="E5E7EB"/>
+            </a:solidFill>
+            <a:prstDash val="solid"/>
+          </a:ln>
+        </p:spPr>
+      </p:sp>
+      <p:sp>
+        <p:nvSpPr>
+          <p:cNvPr id="39" name="Shape 37"/>
+          <p:cNvSpPr/>
+          <p:nvPr/>
+        </p:nvSpPr>
+        <p:spPr>
+          <a:xfrm>
+            <a:off x="3291840" y="4041648"/>
             <a:ext cx="1645920" cy="420624"/>
           </a:xfrm>
           <a:prstGeom prst="rect">
             <a:avLst/>
           </a:prstGeom>
           <a:solidFill>
-            <a:srgbClr val="F8FAFC"/>
+            <a:srgbClr val="F1F5F9"/>
           </a:solidFill>
           <a:ln w="12700">
             <a:solidFill>
@@ -37583,13 +37331,13 @@
       </p:sp>
       <p:sp>
         <p:nvSpPr>
-          <p:cNvPr id="31" name="Shape 29"/>
-          <p:cNvSpPr/>
-          <p:nvPr/>
-        </p:nvSpPr>
-        <p:spPr>
-          <a:xfrm>
-            <a:off x="5943600" y="2670048"/>
+          <p:cNvPr id="40" name="Shape 38"/>
+          <p:cNvSpPr/>
+          <p:nvPr/>
+        </p:nvSpPr>
+        <p:spPr>
+          <a:xfrm>
+            <a:off x="5943600" y="4041648"/>
             <a:ext cx="1463040" cy="420624"/>
           </a:xfrm>
           <a:prstGeom prst="rect">
@@ -37608,13 +37356,13 @@
       </p:sp>
       <p:sp>
         <p:nvSpPr>
-          <p:cNvPr id="32" name="Text 30"/>
-          <p:cNvSpPr/>
-          <p:nvPr/>
-        </p:nvSpPr>
-        <p:spPr>
-          <a:xfrm>
-            <a:off x="5943600" y="2670048"/>
+          <p:cNvPr id="41" name="Text 39"/>
+          <p:cNvSpPr/>
+          <p:nvPr/>
+        </p:nvSpPr>
+        <p:spPr>
+          <a:xfrm>
+            <a:off x="5943600" y="4041648"/>
             <a:ext cx="1463040" cy="420624"/>
           </a:xfrm>
           <a:prstGeom prst="rect">
@@ -37639,7 +37387,7 @@
                 <a:ea typeface="Trebuchet MS" pitchFamily="34" charset="-122"/>
                 <a:cs typeface="Trebuchet MS" pitchFamily="34" charset="-120"/>
               </a:rPr>
-              <a:t>-er</a:t>
+              <a:t>-ness</a:t>
             </a:r>
             <a:endParaRPr lang="en-US" sz="1300" dirty="0"/>
           </a:p>
@@ -37647,319 +37395,13 @@
       </p:sp>
       <p:sp>
         <p:nvSpPr>
-          <p:cNvPr id="33" name="Shape 31"/>
-          <p:cNvSpPr/>
-          <p:nvPr/>
-        </p:nvSpPr>
-        <p:spPr>
-          <a:xfrm>
-            <a:off x="640080" y="3127248"/>
-            <a:ext cx="1463040" cy="420624"/>
-          </a:xfrm>
-          <a:prstGeom prst="rect">
-            <a:avLst/>
-          </a:prstGeom>
-          <a:solidFill>
-            <a:srgbClr val="DDD6FE"/>
-          </a:solidFill>
-          <a:ln w="12700">
-            <a:solidFill>
-              <a:srgbClr val="E5E7EB"/>
-            </a:solidFill>
-            <a:prstDash val="solid"/>
-          </a:ln>
-        </p:spPr>
-      </p:sp>
-      <p:sp>
-        <p:nvSpPr>
-          <p:cNvPr id="34" name="Text 32"/>
-          <p:cNvSpPr/>
-          <p:nvPr/>
-        </p:nvSpPr>
-        <p:spPr>
-          <a:xfrm>
-            <a:off x="640080" y="3127248"/>
-            <a:ext cx="1463040" cy="420624"/>
-          </a:xfrm>
-          <a:prstGeom prst="rect">
-            <a:avLst/>
-          </a:prstGeom>
-          <a:noFill/>
-          <a:ln/>
-        </p:spPr>
-        <p:txBody>
-          <a:bodyPr wrap="square" lIns="0" tIns="0" rIns="0" bIns="0" rtlCol="0" anchor="ctr"/>
-          <a:lstStyle/>
-          <a:p>
-            <a:pPr algn="ctr" indent="0" marL="0">
-              <a:buNone/>
-            </a:pPr>
-            <a:r>
-              <a:rPr lang="en-US" sz="1300" b="1" dirty="0">
-                <a:solidFill>
-                  <a:srgbClr val="4C1D95"/>
-                </a:solidFill>
-                <a:latin typeface="Trebuchet MS" pitchFamily="34" charset="0"/>
-                <a:ea typeface="Trebuchet MS" pitchFamily="34" charset="-122"/>
-                <a:cs typeface="Trebuchet MS" pitchFamily="34" charset="-120"/>
-              </a:rPr>
-              <a:t>be-</a:t>
-            </a:r>
-            <a:endParaRPr lang="en-US" sz="1300" dirty="0"/>
-          </a:p>
-        </p:txBody>
-      </p:sp>
-      <p:sp>
-        <p:nvSpPr>
-          <p:cNvPr id="35" name="Shape 33"/>
-          <p:cNvSpPr/>
-          <p:nvPr/>
-        </p:nvSpPr>
-        <p:spPr>
-          <a:xfrm>
-            <a:off x="3291840" y="3127248"/>
-            <a:ext cx="1645920" cy="420624"/>
-          </a:xfrm>
-          <a:prstGeom prst="rect">
-            <a:avLst/>
-          </a:prstGeom>
-          <a:solidFill>
-            <a:srgbClr val="F1F5F9"/>
-          </a:solidFill>
-          <a:ln w="12700">
-            <a:solidFill>
-              <a:srgbClr val="E5E7EB"/>
-            </a:solidFill>
-            <a:prstDash val="solid"/>
-          </a:ln>
-        </p:spPr>
-      </p:sp>
-      <p:sp>
-        <p:nvSpPr>
-          <p:cNvPr id="36" name="Shape 34"/>
-          <p:cNvSpPr/>
-          <p:nvPr/>
-        </p:nvSpPr>
-        <p:spPr>
-          <a:xfrm>
-            <a:off x="5943600" y="3127248"/>
-            <a:ext cx="1463040" cy="420624"/>
-          </a:xfrm>
-          <a:prstGeom prst="rect">
-            <a:avLst/>
-          </a:prstGeom>
-          <a:solidFill>
-            <a:srgbClr val="FCE7F3"/>
-          </a:solidFill>
-          <a:ln w="12700">
-            <a:solidFill>
-              <a:srgbClr val="E5E7EB"/>
-            </a:solidFill>
-            <a:prstDash val="solid"/>
-          </a:ln>
-        </p:spPr>
-      </p:sp>
-      <p:sp>
-        <p:nvSpPr>
-          <p:cNvPr id="37" name="Text 35"/>
-          <p:cNvSpPr/>
-          <p:nvPr/>
-        </p:nvSpPr>
-        <p:spPr>
-          <a:xfrm>
-            <a:off x="5943600" y="3127248"/>
-            <a:ext cx="1463040" cy="420624"/>
-          </a:xfrm>
-          <a:prstGeom prst="rect">
-            <a:avLst/>
-          </a:prstGeom>
-          <a:noFill/>
-          <a:ln/>
-        </p:spPr>
-        <p:txBody>
-          <a:bodyPr wrap="square" lIns="0" tIns="0" rIns="0" bIns="0" rtlCol="0" anchor="ctr"/>
-          <a:lstStyle/>
-          <a:p>
-            <a:pPr algn="ctr" indent="0" marL="0">
-              <a:buNone/>
-            </a:pPr>
-            <a:r>
-              <a:rPr lang="en-US" sz="1300" b="1" dirty="0">
-                <a:solidFill>
-                  <a:srgbClr val="9D174D"/>
-                </a:solidFill>
-                <a:latin typeface="Trebuchet MS" pitchFamily="34" charset="0"/>
-                <a:ea typeface="Trebuchet MS" pitchFamily="34" charset="-122"/>
-                <a:cs typeface="Trebuchet MS" pitchFamily="34" charset="-120"/>
-              </a:rPr>
-              <a:t>-est</a:t>
-            </a:r>
-            <a:endParaRPr lang="en-US" sz="1300" dirty="0"/>
-          </a:p>
-        </p:txBody>
-      </p:sp>
-      <p:sp>
-        <p:nvSpPr>
-          <p:cNvPr id="38" name="Shape 36"/>
-          <p:cNvSpPr/>
-          <p:nvPr/>
-        </p:nvSpPr>
-        <p:spPr>
-          <a:xfrm>
-            <a:off x="640080" y="3584448"/>
-            <a:ext cx="1463040" cy="420624"/>
-          </a:xfrm>
-          <a:prstGeom prst="rect">
-            <a:avLst/>
-          </a:prstGeom>
-          <a:solidFill>
-            <a:srgbClr val="DDD6FE"/>
-          </a:solidFill>
-          <a:ln w="12700">
-            <a:solidFill>
-              <a:srgbClr val="E5E7EB"/>
-            </a:solidFill>
-            <a:prstDash val="solid"/>
-          </a:ln>
-        </p:spPr>
-      </p:sp>
-      <p:sp>
-        <p:nvSpPr>
-          <p:cNvPr id="39" name="Text 37"/>
-          <p:cNvSpPr/>
-          <p:nvPr/>
-        </p:nvSpPr>
-        <p:spPr>
-          <a:xfrm>
-            <a:off x="640080" y="3584448"/>
-            <a:ext cx="1463040" cy="420624"/>
-          </a:xfrm>
-          <a:prstGeom prst="rect">
-            <a:avLst/>
-          </a:prstGeom>
-          <a:noFill/>
-          <a:ln/>
-        </p:spPr>
-        <p:txBody>
-          <a:bodyPr wrap="square" lIns="0" tIns="0" rIns="0" bIns="0" rtlCol="0" anchor="ctr"/>
-          <a:lstStyle/>
-          <a:p>
-            <a:pPr algn="ctr" indent="0" marL="0">
-              <a:buNone/>
-            </a:pPr>
-            <a:r>
-              <a:rPr lang="en-US" sz="1300" b="1" dirty="0">
-                <a:solidFill>
-                  <a:srgbClr val="4C1D95"/>
-                </a:solidFill>
-                <a:latin typeface="Trebuchet MS" pitchFamily="34" charset="0"/>
-                <a:ea typeface="Trebuchet MS" pitchFamily="34" charset="-122"/>
-                <a:cs typeface="Trebuchet MS" pitchFamily="34" charset="-120"/>
-              </a:rPr>
-              <a:t>re-</a:t>
-            </a:r>
-            <a:endParaRPr lang="en-US" sz="1300" dirty="0"/>
-          </a:p>
-        </p:txBody>
-      </p:sp>
-      <p:sp>
-        <p:nvSpPr>
-          <p:cNvPr id="40" name="Shape 38"/>
-          <p:cNvSpPr/>
-          <p:nvPr/>
-        </p:nvSpPr>
-        <p:spPr>
-          <a:xfrm>
-            <a:off x="3291840" y="3584448"/>
-            <a:ext cx="1645920" cy="420624"/>
-          </a:xfrm>
-          <a:prstGeom prst="rect">
-            <a:avLst/>
-          </a:prstGeom>
-          <a:solidFill>
-            <a:srgbClr val="F8FAFC"/>
-          </a:solidFill>
-          <a:ln w="12700">
-            <a:solidFill>
-              <a:srgbClr val="E5E7EB"/>
-            </a:solidFill>
-            <a:prstDash val="solid"/>
-          </a:ln>
-        </p:spPr>
-      </p:sp>
-      <p:sp>
-        <p:nvSpPr>
-          <p:cNvPr id="41" name="Shape 39"/>
-          <p:cNvSpPr/>
-          <p:nvPr/>
-        </p:nvSpPr>
-        <p:spPr>
-          <a:xfrm>
-            <a:off x="5943600" y="3584448"/>
-            <a:ext cx="1463040" cy="420624"/>
-          </a:xfrm>
-          <a:prstGeom prst="rect">
-            <a:avLst/>
-          </a:prstGeom>
-          <a:solidFill>
-            <a:srgbClr val="FCE7F3"/>
-          </a:solidFill>
-          <a:ln w="12700">
-            <a:solidFill>
-              <a:srgbClr val="E5E7EB"/>
-            </a:solidFill>
-            <a:prstDash val="solid"/>
-          </a:ln>
-        </p:spPr>
-      </p:sp>
-      <p:sp>
-        <p:nvSpPr>
           <p:cNvPr id="42" name="Text 40"/>
           <p:cNvSpPr/>
           <p:nvPr/>
         </p:nvSpPr>
         <p:spPr>
           <a:xfrm>
-            <a:off x="5943600" y="3584448"/>
-            <a:ext cx="1463040" cy="420624"/>
-          </a:xfrm>
-          <a:prstGeom prst="rect">
-            <a:avLst/>
-          </a:prstGeom>
-          <a:noFill/>
-          <a:ln/>
-        </p:spPr>
-        <p:txBody>
-          <a:bodyPr wrap="square" lIns="0" tIns="0" rIns="0" bIns="0" rtlCol="0" anchor="ctr"/>
-          <a:lstStyle/>
-          <a:p>
-            <a:pPr algn="ctr" indent="0" marL="0">
-              <a:buNone/>
-            </a:pPr>
-            <a:r>
-              <a:rPr lang="en-US" sz="1300" b="1" dirty="0">
-                <a:solidFill>
-                  <a:srgbClr val="9D174D"/>
-                </a:solidFill>
-                <a:latin typeface="Trebuchet MS" pitchFamily="34" charset="0"/>
-                <a:ea typeface="Trebuchet MS" pitchFamily="34" charset="-122"/>
-                <a:cs typeface="Trebuchet MS" pitchFamily="34" charset="-120"/>
-              </a:rPr>
-              <a:t>-ing</a:t>
-            </a:r>
-            <a:endParaRPr lang="en-US" sz="1300" dirty="0"/>
-          </a:p>
-        </p:txBody>
-      </p:sp>
-      <p:sp>
-        <p:nvSpPr>
-          <p:cNvPr id="43" name="Text 41"/>
-          <p:cNvSpPr/>
-          <p:nvPr/>
-        </p:nvSpPr>
-        <p:spPr>
-          <a:xfrm>
-            <a:off x="365760" y="4178808"/>
+            <a:off x="365760" y="4636008"/>
             <a:ext cx="1097280" cy="420624"/>
           </a:xfrm>
           <a:prstGeom prst="rect">
@@ -37992,14 +37434,14 @@
       </p:sp>
       <p:sp>
         <p:nvSpPr>
-          <p:cNvPr id="44" name="Shape 42"/>
-          <p:cNvSpPr/>
-          <p:nvPr/>
-        </p:nvSpPr>
-        <p:spPr>
-          <a:xfrm>
-            <a:off x="1508760" y="4178808"/>
-            <a:ext cx="822960" cy="420624"/>
+          <p:cNvPr id="43" name="Shape 41"/>
+          <p:cNvSpPr/>
+          <p:nvPr/>
+        </p:nvSpPr>
+        <p:spPr>
+          <a:xfrm>
+            <a:off x="1508760" y="4636008"/>
+            <a:ext cx="1243584" cy="420624"/>
           </a:xfrm>
           <a:prstGeom prst="rect">
             <a:avLst>
@@ -38007,11 +37449,11 @@
             </a:avLst>
           </a:prstGeom>
           <a:solidFill>
-            <a:srgbClr val="DDD6FE"/>
+            <a:srgbClr val="CCFBF1"/>
           </a:solidFill>
           <a:ln w="19050">
             <a:solidFill>
-              <a:srgbClr val="7C3AED"/>
+              <a:srgbClr val="0D9488"/>
             </a:solidFill>
             <a:prstDash val="solid"/>
           </a:ln>
@@ -38026,14 +37468,14 @@
       </p:sp>
       <p:sp>
         <p:nvSpPr>
-          <p:cNvPr id="45" name="Text 43"/>
-          <p:cNvSpPr/>
-          <p:nvPr/>
-        </p:nvSpPr>
-        <p:spPr>
-          <a:xfrm>
-            <a:off x="1508760" y="4178808"/>
-            <a:ext cx="822960" cy="420624"/>
+          <p:cNvPr id="44" name="Text 42"/>
+          <p:cNvSpPr/>
+          <p:nvPr/>
+        </p:nvSpPr>
+        <p:spPr>
+          <a:xfrm>
+            <a:off x="1508760" y="4636008"/>
+            <a:ext cx="1243584" cy="420624"/>
           </a:xfrm>
           <a:prstGeom prst="rect">
             <a:avLst/>
@@ -38051,13 +37493,13 @@
             <a:r>
               <a:rPr lang="en-US" sz="1300" b="1" dirty="0">
                 <a:solidFill>
-                  <a:srgbClr val="4C1D95"/>
+                  <a:srgbClr val="0F766E"/>
                 </a:solidFill>
                 <a:latin typeface="Trebuchet MS" pitchFamily="34" charset="0"/>
                 <a:ea typeface="Trebuchet MS" pitchFamily="34" charset="-122"/>
                 <a:cs typeface="Trebuchet MS" pitchFamily="34" charset="-120"/>
               </a:rPr>
-              <a:t>un-</a:t>
+              <a:t>'slow'</a:t>
             </a:r>
             <a:endParaRPr lang="en-US" sz="1300" dirty="0"/>
           </a:p>
@@ -38065,13 +37507,13 @@
       </p:sp>
       <p:sp>
         <p:nvSpPr>
-          <p:cNvPr id="46" name="Text 44"/>
-          <p:cNvSpPr/>
-          <p:nvPr/>
-        </p:nvSpPr>
-        <p:spPr>
-          <a:xfrm>
-            <a:off x="2359152" y="4178808"/>
+          <p:cNvPr id="45" name="Text 43"/>
+          <p:cNvSpPr/>
+          <p:nvPr/>
+        </p:nvSpPr>
+        <p:spPr>
+          <a:xfrm>
+            <a:off x="2779776" y="4636008"/>
             <a:ext cx="320040" cy="420624"/>
           </a:xfrm>
           <a:prstGeom prst="rect">
@@ -38104,14 +37546,14 @@
       </p:sp>
       <p:sp>
         <p:nvSpPr>
-          <p:cNvPr id="47" name="Shape 45"/>
-          <p:cNvSpPr/>
-          <p:nvPr/>
-        </p:nvSpPr>
-        <p:spPr>
-          <a:xfrm>
-            <a:off x="2706624" y="4178808"/>
-            <a:ext cx="1243584" cy="420624"/>
+          <p:cNvPr id="46" name="Shape 44"/>
+          <p:cNvSpPr/>
+          <p:nvPr/>
+        </p:nvSpPr>
+        <p:spPr>
+          <a:xfrm>
+            <a:off x="3127248" y="4636008"/>
+            <a:ext cx="822960" cy="420624"/>
           </a:xfrm>
           <a:prstGeom prst="rect">
             <a:avLst>
@@ -38119,11 +37561,11 @@
             </a:avLst>
           </a:prstGeom>
           <a:solidFill>
-            <a:srgbClr val="CCFBF1"/>
+            <a:srgbClr val="FCE7F3"/>
           </a:solidFill>
           <a:ln w="19050">
             <a:solidFill>
-              <a:srgbClr val="0D9488"/>
+              <a:srgbClr val="DB2777"/>
             </a:solidFill>
             <a:prstDash val="solid"/>
           </a:ln>
@@ -38138,14 +37580,14 @@
       </p:sp>
       <p:sp>
         <p:nvSpPr>
-          <p:cNvPr id="48" name="Text 46"/>
-          <p:cNvSpPr/>
-          <p:nvPr/>
-        </p:nvSpPr>
-        <p:spPr>
-          <a:xfrm>
-            <a:off x="2706624" y="4178808"/>
-            <a:ext cx="1243584" cy="420624"/>
+          <p:cNvPr id="47" name="Text 45"/>
+          <p:cNvSpPr/>
+          <p:nvPr/>
+        </p:nvSpPr>
+        <p:spPr>
+          <a:xfrm>
+            <a:off x="3127248" y="4636008"/>
+            <a:ext cx="822960" cy="420624"/>
           </a:xfrm>
           <a:prstGeom prst="rect">
             <a:avLst/>
@@ -38163,13 +37605,13 @@
             <a:r>
               <a:rPr lang="en-US" sz="1300" b="1" dirty="0">
                 <a:solidFill>
-                  <a:srgbClr val="0F766E"/>
+                  <a:srgbClr val="9D174D"/>
                 </a:solidFill>
                 <a:latin typeface="Trebuchet MS" pitchFamily="34" charset="0"/>
                 <a:ea typeface="Trebuchet MS" pitchFamily="34" charset="-122"/>
                 <a:cs typeface="Trebuchet MS" pitchFamily="34" charset="-120"/>
               </a:rPr>
-              <a:t>'slow'</a:t>
+              <a:t>-ed</a:t>
             </a:r>
             <a:endParaRPr lang="en-US" sz="1300" dirty="0"/>
           </a:p>
@@ -38177,14 +37619,14 @@
       </p:sp>
       <p:sp>
         <p:nvSpPr>
-          <p:cNvPr id="49" name="Text 47"/>
-          <p:cNvSpPr/>
-          <p:nvPr/>
-        </p:nvSpPr>
-        <p:spPr>
-          <a:xfrm>
-            <a:off x="3977640" y="4178808"/>
-            <a:ext cx="320040" cy="420624"/>
+          <p:cNvPr id="48" name="Text 46"/>
+          <p:cNvSpPr/>
+          <p:nvPr/>
+        </p:nvSpPr>
+        <p:spPr>
+          <a:xfrm>
+            <a:off x="4023360" y="4636008"/>
+            <a:ext cx="365760" cy="420624"/>
           </a:xfrm>
           <a:prstGeom prst="rect">
             <a:avLst/>
@@ -38200,30 +37642,30 @@
               <a:buNone/>
             </a:pPr>
             <a:r>
-              <a:rPr lang="en-US" sz="1400" dirty="0">
-                <a:solidFill>
-                  <a:srgbClr val="475569"/>
+              <a:rPr lang="en-US" sz="1800" b="1" dirty="0">
+                <a:solidFill>
+                  <a:srgbClr val="0D9488"/>
                 </a:solidFill>
                 <a:latin typeface="Trebuchet MS" pitchFamily="34" charset="0"/>
                 <a:ea typeface="Trebuchet MS" pitchFamily="34" charset="-122"/>
                 <a:cs typeface="Trebuchet MS" pitchFamily="34" charset="-120"/>
               </a:rPr>
-              <a:t>+</a:t>
-            </a:r>
-            <a:endParaRPr lang="en-US" sz="1400" dirty="0"/>
-          </a:p>
-        </p:txBody>
-      </p:sp>
-      <p:sp>
-        <p:nvSpPr>
-          <p:cNvPr id="50" name="Shape 48"/>
-          <p:cNvSpPr/>
-          <p:nvPr/>
-        </p:nvSpPr>
-        <p:spPr>
-          <a:xfrm>
-            <a:off x="4325112" y="4178808"/>
-            <a:ext cx="822960" cy="420624"/>
+              <a:t>=</a:t>
+            </a:r>
+            <a:endParaRPr lang="en-US" sz="1800" dirty="0"/>
+          </a:p>
+        </p:txBody>
+      </p:sp>
+      <p:sp>
+        <p:nvSpPr>
+          <p:cNvPr id="49" name="Shape 47"/>
+          <p:cNvSpPr/>
+          <p:nvPr/>
+        </p:nvSpPr>
+        <p:spPr>
+          <a:xfrm>
+            <a:off x="4434840" y="4636008"/>
+            <a:ext cx="2194560" cy="420624"/>
           </a:xfrm>
           <a:prstGeom prst="rect">
             <a:avLst>
@@ -38231,33 +37673,26 @@
             </a:avLst>
           </a:prstGeom>
           <a:solidFill>
-            <a:srgbClr val="FCE7F3"/>
-          </a:solidFill>
-          <a:ln w="19050">
-            <a:solidFill>
-              <a:srgbClr val="DB2777"/>
-            </a:solidFill>
-            <a:prstDash val="solid"/>
-          </a:ln>
-          <a:effectLst>
-            <a:outerShdw sx="100000" sy="100000" kx="0" ky="0" algn="bl" rotWithShape="0" blurRad="101600" dist="38100" dir="8100000">
-              <a:srgbClr val="000000">
-                <a:alpha val="12000"/>
-              </a:srgbClr>
-            </a:outerShdw>
-          </a:effectLst>
-        </p:spPr>
-      </p:sp>
-      <p:sp>
-        <p:nvSpPr>
-          <p:cNvPr id="51" name="Text 49"/>
-          <p:cNvSpPr/>
-          <p:nvPr/>
-        </p:nvSpPr>
-        <p:spPr>
-          <a:xfrm>
-            <a:off x="4325112" y="4178808"/>
-            <a:ext cx="822960" cy="420624"/>
+            <a:srgbClr val="0D9488"/>
+          </a:solidFill>
+          <a:ln w="12700">
+            <a:solidFill>
+              <a:srgbClr val="0D9488"/>
+            </a:solidFill>
+            <a:prstDash val="solid"/>
+          </a:ln>
+        </p:spPr>
+      </p:sp>
+      <p:sp>
+        <p:nvSpPr>
+          <p:cNvPr id="50" name="Text 48"/>
+          <p:cNvSpPr/>
+          <p:nvPr/>
+        </p:nvSpPr>
+        <p:spPr>
+          <a:xfrm>
+            <a:off x="4434840" y="4636008"/>
+            <a:ext cx="2194560" cy="420624"/>
           </a:xfrm>
           <a:prstGeom prst="rect">
             <a:avLst/>
@@ -38273,120 +37708,15 @@
               <a:buNone/>
             </a:pPr>
             <a:r>
-              <a:rPr lang="en-US" sz="1300" b="1" dirty="0">
-                <a:solidFill>
-                  <a:srgbClr val="9D174D"/>
+              <a:rPr lang="en-US" sz="1400" b="1" dirty="0">
+                <a:solidFill>
+                  <a:srgbClr val="FFFFFF"/>
                 </a:solidFill>
                 <a:latin typeface="Trebuchet MS" pitchFamily="34" charset="0"/>
                 <a:ea typeface="Trebuchet MS" pitchFamily="34" charset="-122"/>
                 <a:cs typeface="Trebuchet MS" pitchFamily="34" charset="-120"/>
               </a:rPr>
-              <a:t>-ly</a:t>
-            </a:r>
-            <a:endParaRPr lang="en-US" sz="1300" dirty="0"/>
-          </a:p>
-        </p:txBody>
-      </p:sp>
-      <p:sp>
-        <p:nvSpPr>
-          <p:cNvPr id="52" name="Text 50"/>
-          <p:cNvSpPr/>
-          <p:nvPr/>
-        </p:nvSpPr>
-        <p:spPr>
-          <a:xfrm>
-            <a:off x="5221224" y="4178808"/>
-            <a:ext cx="365760" cy="420624"/>
-          </a:xfrm>
-          <a:prstGeom prst="rect">
-            <a:avLst/>
-          </a:prstGeom>
-          <a:noFill/>
-          <a:ln/>
-        </p:spPr>
-        <p:txBody>
-          <a:bodyPr wrap="square" lIns="0" tIns="0" rIns="0" bIns="0" rtlCol="0" anchor="ctr"/>
-          <a:lstStyle/>
-          <a:p>
-            <a:pPr algn="ctr" indent="0" marL="0">
-              <a:buNone/>
-            </a:pPr>
-            <a:r>
-              <a:rPr lang="en-US" sz="1800" b="1" dirty="0">
-                <a:solidFill>
-                  <a:srgbClr val="0D9488"/>
-                </a:solidFill>
-                <a:latin typeface="Trebuchet MS" pitchFamily="34" charset="0"/>
-                <a:ea typeface="Trebuchet MS" pitchFamily="34" charset="-122"/>
-                <a:cs typeface="Trebuchet MS" pitchFamily="34" charset="-120"/>
-              </a:rPr>
-              <a:t>=</a:t>
-            </a:r>
-            <a:endParaRPr lang="en-US" sz="1800" dirty="0"/>
-          </a:p>
-        </p:txBody>
-      </p:sp>
-      <p:sp>
-        <p:nvSpPr>
-          <p:cNvPr id="53" name="Shape 51"/>
-          <p:cNvSpPr/>
-          <p:nvPr/>
-        </p:nvSpPr>
-        <p:spPr>
-          <a:xfrm>
-            <a:off x="5632704" y="4178808"/>
-            <a:ext cx="2194560" cy="420624"/>
-          </a:xfrm>
-          <a:prstGeom prst="rect">
-            <a:avLst>
-              <a:gd name="adj" fmla="val 17391"/>
-            </a:avLst>
-          </a:prstGeom>
-          <a:solidFill>
-            <a:srgbClr val="0D9488"/>
-          </a:solidFill>
-          <a:ln w="12700">
-            <a:solidFill>
-              <a:srgbClr val="0D9488"/>
-            </a:solidFill>
-            <a:prstDash val="solid"/>
-          </a:ln>
-        </p:spPr>
-      </p:sp>
-      <p:sp>
-        <p:nvSpPr>
-          <p:cNvPr id="54" name="Text 52"/>
-          <p:cNvSpPr/>
-          <p:nvPr/>
-        </p:nvSpPr>
-        <p:spPr>
-          <a:xfrm>
-            <a:off x="5632704" y="4178808"/>
-            <a:ext cx="2194560" cy="420624"/>
-          </a:xfrm>
-          <a:prstGeom prst="rect">
-            <a:avLst/>
-          </a:prstGeom>
-          <a:noFill/>
-          <a:ln/>
-        </p:spPr>
-        <p:txBody>
-          <a:bodyPr wrap="square" lIns="0" tIns="0" rIns="0" bIns="0" rtlCol="0" anchor="ctr"/>
-          <a:lstStyle/>
-          <a:p>
-            <a:pPr algn="ctr" indent="0" marL="0">
-              <a:buNone/>
-            </a:pPr>
-            <a:r>
-              <a:rPr lang="en-US" sz="1400" b="1" dirty="0">
-                <a:solidFill>
-                  <a:srgbClr val="FFFFFF"/>
-                </a:solidFill>
-                <a:latin typeface="Trebuchet MS" pitchFamily="34" charset="0"/>
-                <a:ea typeface="Trebuchet MS" pitchFamily="34" charset="-122"/>
-                <a:cs typeface="Trebuchet MS" pitchFamily="34" charset="-120"/>
-              </a:rPr>
-              <a:t>slowly</a:t>
+              <a:t>slow</a:t>
             </a:r>
             <a:endParaRPr lang="en-US" sz="1400" dirty="0"/>
           </a:p>
@@ -38678,7 +38008,7 @@
                 <a:ea typeface="Calibri" pitchFamily="34" charset="-122"/>
                 <a:cs typeface="Calibri" pitchFamily="34" charset="-120"/>
               </a:rPr>
-              <a:t>Word Labs  •  wordlabs.app  •  Root: 'slow' = not fast, moving carefully</a:t>
+              <a:t>Word Labs  •  wordlabs.app  •  Root: 'slow' = not fast</a:t>
             </a:r>
             <a:endParaRPr lang="en-US" sz="800" dirty="0"/>
           </a:p>
@@ -38790,7 +38120,7 @@
                 <a:ea typeface="Trebuchet MS" pitchFamily="34" charset="-122"/>
                 <a:cs typeface="Trebuchet MS" pitchFamily="34" charset="-120"/>
               </a:rPr>
-              <a:t>slowly</a:t>
+              <a:t>slow</a:t>
             </a:r>
             <a:endParaRPr lang="en-US" sz="1200" dirty="0"/>
           </a:p>
@@ -38856,7 +38186,7 @@
                 <a:ea typeface="Calibri" pitchFamily="34" charset="-122"/>
                 <a:cs typeface="Calibri" pitchFamily="34" charset="-120"/>
               </a:rPr>
-              <a:t>Moving or happening at a speed that is not quick at all.</a:t>
+              <a:t>became slower or reduced in speed</a:t>
             </a:r>
             <a:endParaRPr lang="en-US" sz="1200" dirty="0"/>
           </a:p>
@@ -38929,7 +38259,7 @@
                 <a:ea typeface="Trebuchet MS" pitchFamily="34" charset="-122"/>
                 <a:cs typeface="Trebuchet MS" pitchFamily="34" charset="-120"/>
               </a:rPr>
-              <a:t>slowness</a:t>
+              <a:t>slowed</a:t>
             </a:r>
             <a:endParaRPr lang="en-US" sz="1200" dirty="0"/>
           </a:p>
@@ -38995,702 +38325,7 @@
                 <a:ea typeface="Calibri" pitchFamily="34" charset="-122"/>
                 <a:cs typeface="Calibri" pitchFamily="34" charset="-120"/>
               </a:rPr>
-              <a:t>Becoming less fast; reducing speed as you move or work.</a:t>
-            </a:r>
-            <a:endParaRPr lang="en-US" sz="1200" dirty="0"/>
-          </a:p>
-        </p:txBody>
-      </p:sp>
-      <p:sp>
-        <p:nvSpPr>
-          <p:cNvPr id="19" name="Shape 17"/>
-          <p:cNvSpPr/>
-          <p:nvPr/>
-        </p:nvSpPr>
-        <p:spPr>
-          <a:xfrm>
-            <a:off x="365760" y="2249424"/>
-            <a:ext cx="2011680" cy="457200"/>
-          </a:xfrm>
-          <a:prstGeom prst="rect">
-            <a:avLst>
-              <a:gd name="adj" fmla="val 12000"/>
-            </a:avLst>
-          </a:prstGeom>
-          <a:solidFill>
-            <a:srgbClr val="EEF2FF"/>
-          </a:solidFill>
-          <a:ln w="12700">
-            <a:solidFill>
-              <a:srgbClr val="6366F1"/>
-            </a:solidFill>
-            <a:prstDash val="solid"/>
-          </a:ln>
-          <a:effectLst>
-            <a:outerShdw sx="100000" sy="100000" kx="0" ky="0" algn="bl" rotWithShape="0" blurRad="101600" dist="38100" dir="8100000">
-              <a:srgbClr val="000000">
-                <a:alpha val="12000"/>
-              </a:srgbClr>
-            </a:outerShdw>
-          </a:effectLst>
-        </p:spPr>
-      </p:sp>
-      <p:sp>
-        <p:nvSpPr>
-          <p:cNvPr id="20" name="Text 18"/>
-          <p:cNvSpPr/>
-          <p:nvPr/>
-        </p:nvSpPr>
-        <p:spPr>
-          <a:xfrm>
-            <a:off x="365760" y="2249424"/>
-            <a:ext cx="2011680" cy="457200"/>
-          </a:xfrm>
-          <a:prstGeom prst="rect">
-            <a:avLst/>
-          </a:prstGeom>
-          <a:noFill/>
-          <a:ln/>
-        </p:spPr>
-        <p:txBody>
-          <a:bodyPr wrap="square" lIns="0" tIns="0" rIns="0" bIns="0" rtlCol="0" anchor="ctr"/>
-          <a:lstStyle/>
-          <a:p>
-            <a:pPr algn="ctr" indent="0" marL="0">
-              <a:buNone/>
-            </a:pPr>
-            <a:r>
-              <a:rPr lang="en-US" sz="1200" b="1" dirty="0">
-                <a:solidFill>
-                  <a:srgbClr val="4338CA"/>
-                </a:solidFill>
-                <a:latin typeface="Trebuchet MS" pitchFamily="34" charset="0"/>
-                <a:ea typeface="Trebuchet MS" pitchFamily="34" charset="-122"/>
-                <a:cs typeface="Trebuchet MS" pitchFamily="34" charset="-120"/>
-              </a:rPr>
-              <a:t>slower</a:t>
-            </a:r>
-            <a:endParaRPr lang="en-US" sz="1200" dirty="0"/>
-          </a:p>
-        </p:txBody>
-      </p:sp>
-      <p:sp>
-        <p:nvSpPr>
-          <p:cNvPr id="21" name="Shape 19"/>
-          <p:cNvSpPr/>
-          <p:nvPr/>
-        </p:nvSpPr>
-        <p:spPr>
-          <a:xfrm>
-            <a:off x="2514600" y="2249424"/>
-            <a:ext cx="6263640" cy="457200"/>
-          </a:xfrm>
-          <a:prstGeom prst="rect">
-            <a:avLst>
-              <a:gd name="adj" fmla="val 12000"/>
-            </a:avLst>
-          </a:prstGeom>
-          <a:solidFill>
-            <a:srgbClr val="F8FAFC"/>
-          </a:solidFill>
-          <a:ln w="12700">
-            <a:solidFill>
-              <a:srgbClr val="E2E8F0"/>
-            </a:solidFill>
-            <a:prstDash val="solid"/>
-          </a:ln>
-        </p:spPr>
-      </p:sp>
-      <p:sp>
-        <p:nvSpPr>
-          <p:cNvPr id="22" name="Text 20"/>
-          <p:cNvSpPr/>
-          <p:nvPr/>
-        </p:nvSpPr>
-        <p:spPr>
-          <a:xfrm>
-            <a:off x="2651760" y="2249424"/>
-            <a:ext cx="6035040" cy="457200"/>
-          </a:xfrm>
-          <a:prstGeom prst="rect">
-            <a:avLst/>
-          </a:prstGeom>
-          <a:noFill/>
-          <a:ln/>
-        </p:spPr>
-        <p:txBody>
-          <a:bodyPr wrap="square" rtlCol="0" anchor="ctr"/>
-          <a:lstStyle/>
-          <a:p>
-            <a:pPr algn="l" indent="0" marL="0">
-              <a:buNone/>
-            </a:pPr>
-            <a:r>
-              <a:rPr lang="en-US" sz="1200" dirty="0">
-                <a:solidFill>
-                  <a:srgbClr val="0F172A"/>
-                </a:solidFill>
-                <a:latin typeface="Calibri" pitchFamily="34" charset="0"/>
-                <a:ea typeface="Calibri" pitchFamily="34" charset="-122"/>
-                <a:cs typeface="Calibri" pitchFamily="34" charset="-120"/>
-              </a:rPr>
-              <a:t>The most slow of all; moving less quickly than everything else being compared.</a:t>
-            </a:r>
-            <a:endParaRPr lang="en-US" sz="1200" dirty="0"/>
-          </a:p>
-        </p:txBody>
-      </p:sp>
-      <p:sp>
-        <p:nvSpPr>
-          <p:cNvPr id="23" name="Shape 21"/>
-          <p:cNvSpPr/>
-          <p:nvPr/>
-        </p:nvSpPr>
-        <p:spPr>
-          <a:xfrm>
-            <a:off x="365760" y="2779776"/>
-            <a:ext cx="2011680" cy="457200"/>
-          </a:xfrm>
-          <a:prstGeom prst="rect">
-            <a:avLst>
-              <a:gd name="adj" fmla="val 12000"/>
-            </a:avLst>
-          </a:prstGeom>
-          <a:solidFill>
-            <a:srgbClr val="EEF2FF"/>
-          </a:solidFill>
-          <a:ln w="12700">
-            <a:solidFill>
-              <a:srgbClr val="6366F1"/>
-            </a:solidFill>
-            <a:prstDash val="solid"/>
-          </a:ln>
-          <a:effectLst>
-            <a:outerShdw sx="100000" sy="100000" kx="0" ky="0" algn="bl" rotWithShape="0" blurRad="101600" dist="38100" dir="8100000">
-              <a:srgbClr val="000000">
-                <a:alpha val="12000"/>
-              </a:srgbClr>
-            </a:outerShdw>
-          </a:effectLst>
-        </p:spPr>
-      </p:sp>
-      <p:sp>
-        <p:nvSpPr>
-          <p:cNvPr id="24" name="Text 22"/>
-          <p:cNvSpPr/>
-          <p:nvPr/>
-        </p:nvSpPr>
-        <p:spPr>
-          <a:xfrm>
-            <a:off x="365760" y="2779776"/>
-            <a:ext cx="2011680" cy="457200"/>
-          </a:xfrm>
-          <a:prstGeom prst="rect">
-            <a:avLst/>
-          </a:prstGeom>
-          <a:noFill/>
-          <a:ln/>
-        </p:spPr>
-        <p:txBody>
-          <a:bodyPr wrap="square" lIns="0" tIns="0" rIns="0" bIns="0" rtlCol="0" anchor="ctr"/>
-          <a:lstStyle/>
-          <a:p>
-            <a:pPr algn="ctr" indent="0" marL="0">
-              <a:buNone/>
-            </a:pPr>
-            <a:r>
-              <a:rPr lang="en-US" sz="1200" b="1" dirty="0">
-                <a:solidFill>
-                  <a:srgbClr val="4338CA"/>
-                </a:solidFill>
-                <a:latin typeface="Trebuchet MS" pitchFamily="34" charset="0"/>
-                <a:ea typeface="Trebuchet MS" pitchFamily="34" charset="-122"/>
-                <a:cs typeface="Trebuchet MS" pitchFamily="34" charset="-120"/>
-              </a:rPr>
-              <a:t>slowest</a:t>
-            </a:r>
-            <a:endParaRPr lang="en-US" sz="1200" dirty="0"/>
-          </a:p>
-        </p:txBody>
-      </p:sp>
-      <p:sp>
-        <p:nvSpPr>
-          <p:cNvPr id="25" name="Shape 23"/>
-          <p:cNvSpPr/>
-          <p:nvPr/>
-        </p:nvSpPr>
-        <p:spPr>
-          <a:xfrm>
-            <a:off x="2514600" y="2779776"/>
-            <a:ext cx="6263640" cy="457200"/>
-          </a:xfrm>
-          <a:prstGeom prst="rect">
-            <a:avLst>
-              <a:gd name="adj" fmla="val 12000"/>
-            </a:avLst>
-          </a:prstGeom>
-          <a:solidFill>
-            <a:srgbClr val="F8FAFC"/>
-          </a:solidFill>
-          <a:ln w="12700">
-            <a:solidFill>
-              <a:srgbClr val="E2E8F0"/>
-            </a:solidFill>
-            <a:prstDash val="solid"/>
-          </a:ln>
-        </p:spPr>
-      </p:sp>
-      <p:sp>
-        <p:nvSpPr>
-          <p:cNvPr id="26" name="Text 24"/>
-          <p:cNvSpPr/>
-          <p:nvPr/>
-        </p:nvSpPr>
-        <p:spPr>
-          <a:xfrm>
-            <a:off x="2651760" y="2779776"/>
-            <a:ext cx="6035040" cy="457200"/>
-          </a:xfrm>
-          <a:prstGeom prst="rect">
-            <a:avLst/>
-          </a:prstGeom>
-          <a:noFill/>
-          <a:ln/>
-        </p:spPr>
-        <p:txBody>
-          <a:bodyPr wrap="square" rtlCol="0" anchor="ctr"/>
-          <a:lstStyle/>
-          <a:p>
-            <a:pPr algn="l" indent="0" marL="0">
-              <a:buNone/>
-            </a:pPr>
-            <a:r>
-              <a:rPr lang="en-US" sz="1200" dirty="0">
-                <a:solidFill>
-                  <a:srgbClr val="0F172A"/>
-                </a:solidFill>
-                <a:latin typeface="Calibri" pitchFamily="34" charset="0"/>
-                <a:ea typeface="Calibri" pitchFamily="34" charset="-122"/>
-                <a:cs typeface="Calibri" pitchFamily="34" charset="-120"/>
-              </a:rPr>
-              <a:t>When something becomes less fast or less busy than it was before.</a:t>
-            </a:r>
-            <a:endParaRPr lang="en-US" sz="1200" dirty="0"/>
-          </a:p>
-        </p:txBody>
-      </p:sp>
-      <p:sp>
-        <p:nvSpPr>
-          <p:cNvPr id="27" name="Shape 25"/>
-          <p:cNvSpPr/>
-          <p:nvPr/>
-        </p:nvSpPr>
-        <p:spPr>
-          <a:xfrm>
-            <a:off x="365760" y="3310128"/>
-            <a:ext cx="2011680" cy="457200"/>
-          </a:xfrm>
-          <a:prstGeom prst="rect">
-            <a:avLst>
-              <a:gd name="adj" fmla="val 12000"/>
-            </a:avLst>
-          </a:prstGeom>
-          <a:solidFill>
-            <a:srgbClr val="EEF2FF"/>
-          </a:solidFill>
-          <a:ln w="12700">
-            <a:solidFill>
-              <a:srgbClr val="6366F1"/>
-            </a:solidFill>
-            <a:prstDash val="solid"/>
-          </a:ln>
-          <a:effectLst>
-            <a:outerShdw sx="100000" sy="100000" kx="0" ky="0" algn="bl" rotWithShape="0" blurRad="101600" dist="38100" dir="8100000">
-              <a:srgbClr val="000000">
-                <a:alpha val="12000"/>
-              </a:srgbClr>
-            </a:outerShdw>
-          </a:effectLst>
-        </p:spPr>
-      </p:sp>
-      <p:sp>
-        <p:nvSpPr>
-          <p:cNvPr id="28" name="Text 26"/>
-          <p:cNvSpPr/>
-          <p:nvPr/>
-        </p:nvSpPr>
-        <p:spPr>
-          <a:xfrm>
-            <a:off x="365760" y="3310128"/>
-            <a:ext cx="2011680" cy="457200"/>
-          </a:xfrm>
-          <a:prstGeom prst="rect">
-            <a:avLst/>
-          </a:prstGeom>
-          <a:noFill/>
-          <a:ln/>
-        </p:spPr>
-        <p:txBody>
-          <a:bodyPr wrap="square" lIns="0" tIns="0" rIns="0" bIns="0" rtlCol="0" anchor="ctr"/>
-          <a:lstStyle/>
-          <a:p>
-            <a:pPr algn="ctr" indent="0" marL="0">
-              <a:buNone/>
-            </a:pPr>
-            <a:r>
-              <a:rPr lang="en-US" sz="1200" b="1" dirty="0">
-                <a:solidFill>
-                  <a:srgbClr val="4338CA"/>
-                </a:solidFill>
-                <a:latin typeface="Trebuchet MS" pitchFamily="34" charset="0"/>
-                <a:ea typeface="Trebuchet MS" pitchFamily="34" charset="-122"/>
-                <a:cs typeface="Trebuchet MS" pitchFamily="34" charset="-120"/>
-              </a:rPr>
-              <a:t>slowing</a:t>
-            </a:r>
-            <a:endParaRPr lang="en-US" sz="1200" dirty="0"/>
-          </a:p>
-        </p:txBody>
-      </p:sp>
-      <p:sp>
-        <p:nvSpPr>
-          <p:cNvPr id="29" name="Shape 27"/>
-          <p:cNvSpPr/>
-          <p:nvPr/>
-        </p:nvSpPr>
-        <p:spPr>
-          <a:xfrm>
-            <a:off x="2514600" y="3310128"/>
-            <a:ext cx="6263640" cy="457200"/>
-          </a:xfrm>
-          <a:prstGeom prst="rect">
-            <a:avLst>
-              <a:gd name="adj" fmla="val 12000"/>
-            </a:avLst>
-          </a:prstGeom>
-          <a:solidFill>
-            <a:srgbClr val="F8FAFC"/>
-          </a:solidFill>
-          <a:ln w="12700">
-            <a:solidFill>
-              <a:srgbClr val="E2E8F0"/>
-            </a:solidFill>
-            <a:prstDash val="solid"/>
-          </a:ln>
-        </p:spPr>
-      </p:sp>
-      <p:sp>
-        <p:nvSpPr>
-          <p:cNvPr id="30" name="Text 28"/>
-          <p:cNvSpPr/>
-          <p:nvPr/>
-        </p:nvSpPr>
-        <p:spPr>
-          <a:xfrm>
-            <a:off x="2651760" y="3310128"/>
-            <a:ext cx="6035040" cy="457200"/>
-          </a:xfrm>
-          <a:prstGeom prst="rect">
-            <a:avLst/>
-          </a:prstGeom>
-          <a:noFill/>
-          <a:ln/>
-        </p:spPr>
-        <p:txBody>
-          <a:bodyPr wrap="square" rtlCol="0" anchor="ctr"/>
-          <a:lstStyle/>
-          <a:p>
-            <a:pPr algn="l" indent="0" marL="0">
-              <a:buNone/>
-            </a:pPr>
-            <a:r>
-              <a:rPr lang="en-US" sz="1200" dirty="0">
-                <a:solidFill>
-                  <a:srgbClr val="0F172A"/>
-                </a:solidFill>
-                <a:latin typeface="Calibri" pitchFamily="34" charset="0"/>
-                <a:ea typeface="Calibri" pitchFamily="34" charset="-122"/>
-                <a:cs typeface="Calibri" pitchFamily="34" charset="-120"/>
-              </a:rPr>
-              <a:t>More slow than something else; not moving as quickly as another thing.</a:t>
-            </a:r>
-            <a:endParaRPr lang="en-US" sz="1200" dirty="0"/>
-          </a:p>
-        </p:txBody>
-      </p:sp>
-      <p:sp>
-        <p:nvSpPr>
-          <p:cNvPr id="31" name="Shape 29"/>
-          <p:cNvSpPr/>
-          <p:nvPr/>
-        </p:nvSpPr>
-        <p:spPr>
-          <a:xfrm>
-            <a:off x="365760" y="3840480"/>
-            <a:ext cx="2011680" cy="457200"/>
-          </a:xfrm>
-          <a:prstGeom prst="rect">
-            <a:avLst>
-              <a:gd name="adj" fmla="val 12000"/>
-            </a:avLst>
-          </a:prstGeom>
-          <a:solidFill>
-            <a:srgbClr val="EEF2FF"/>
-          </a:solidFill>
-          <a:ln w="12700">
-            <a:solidFill>
-              <a:srgbClr val="6366F1"/>
-            </a:solidFill>
-            <a:prstDash val="solid"/>
-          </a:ln>
-          <a:effectLst>
-            <a:outerShdw sx="100000" sy="100000" kx="0" ky="0" algn="bl" rotWithShape="0" blurRad="101600" dist="38100" dir="8100000">
-              <a:srgbClr val="000000">
-                <a:alpha val="12000"/>
-              </a:srgbClr>
-            </a:outerShdw>
-          </a:effectLst>
-        </p:spPr>
-      </p:sp>
-      <p:sp>
-        <p:nvSpPr>
-          <p:cNvPr id="32" name="Text 30"/>
-          <p:cNvSpPr/>
-          <p:nvPr/>
-        </p:nvSpPr>
-        <p:spPr>
-          <a:xfrm>
-            <a:off x="365760" y="3840480"/>
-            <a:ext cx="2011680" cy="457200"/>
-          </a:xfrm>
-          <a:prstGeom prst="rect">
-            <a:avLst/>
-          </a:prstGeom>
-          <a:noFill/>
-          <a:ln/>
-        </p:spPr>
-        <p:txBody>
-          <a:bodyPr wrap="square" lIns="0" tIns="0" rIns="0" bIns="0" rtlCol="0" anchor="ctr"/>
-          <a:lstStyle/>
-          <a:p>
-            <a:pPr algn="ctr" indent="0" marL="0">
-              <a:buNone/>
-            </a:pPr>
-            <a:r>
-              <a:rPr lang="en-US" sz="1200" b="1" dirty="0">
-                <a:solidFill>
-                  <a:srgbClr val="4338CA"/>
-                </a:solidFill>
-                <a:latin typeface="Trebuchet MS" pitchFamily="34" charset="0"/>
-                <a:ea typeface="Trebuchet MS" pitchFamily="34" charset="-122"/>
-                <a:cs typeface="Trebuchet MS" pitchFamily="34" charset="-120"/>
-              </a:rPr>
-              <a:t>slowdown</a:t>
-            </a:r>
-            <a:endParaRPr lang="en-US" sz="1200" dirty="0"/>
-          </a:p>
-        </p:txBody>
-      </p:sp>
-      <p:sp>
-        <p:nvSpPr>
-          <p:cNvPr id="33" name="Shape 31"/>
-          <p:cNvSpPr/>
-          <p:nvPr/>
-        </p:nvSpPr>
-        <p:spPr>
-          <a:xfrm>
-            <a:off x="2514600" y="3840480"/>
-            <a:ext cx="6263640" cy="457200"/>
-          </a:xfrm>
-          <a:prstGeom prst="rect">
-            <a:avLst>
-              <a:gd name="adj" fmla="val 12000"/>
-            </a:avLst>
-          </a:prstGeom>
-          <a:solidFill>
-            <a:srgbClr val="F8FAFC"/>
-          </a:solidFill>
-          <a:ln w="12700">
-            <a:solidFill>
-              <a:srgbClr val="E2E8F0"/>
-            </a:solidFill>
-            <a:prstDash val="solid"/>
-          </a:ln>
-        </p:spPr>
-      </p:sp>
-      <p:sp>
-        <p:nvSpPr>
-          <p:cNvPr id="34" name="Text 32"/>
-          <p:cNvSpPr/>
-          <p:nvPr/>
-        </p:nvSpPr>
-        <p:spPr>
-          <a:xfrm>
-            <a:off x="2651760" y="3840480"/>
-            <a:ext cx="6035040" cy="457200"/>
-          </a:xfrm>
-          <a:prstGeom prst="rect">
-            <a:avLst/>
-          </a:prstGeom>
-          <a:noFill/>
-          <a:ln/>
-        </p:spPr>
-        <p:txBody>
-          <a:bodyPr wrap="square" rtlCol="0" anchor="ctr"/>
-          <a:lstStyle/>
-          <a:p>
-            <a:pPr algn="l" indent="0" marL="0">
-              <a:buNone/>
-            </a:pPr>
-            <a:r>
-              <a:rPr lang="en-US" sz="1200" dirty="0">
-                <a:solidFill>
-                  <a:srgbClr val="0F172A"/>
-                </a:solidFill>
-                <a:latin typeface="Calibri" pitchFamily="34" charset="0"/>
-                <a:ea typeface="Calibri" pitchFamily="34" charset="-122"/>
-                <a:cs typeface="Calibri" pitchFamily="34" charset="-120"/>
-              </a:rPr>
-              <a:t>In a way that is not fast; taking a long time to move or happen.</a:t>
-            </a:r>
-            <a:endParaRPr lang="en-US" sz="1200" dirty="0"/>
-          </a:p>
-        </p:txBody>
-      </p:sp>
-      <p:sp>
-        <p:nvSpPr>
-          <p:cNvPr id="35" name="Shape 33"/>
-          <p:cNvSpPr/>
-          <p:nvPr/>
-        </p:nvSpPr>
-        <p:spPr>
-          <a:xfrm>
-            <a:off x="365760" y="4370832"/>
-            <a:ext cx="2011680" cy="457200"/>
-          </a:xfrm>
-          <a:prstGeom prst="rect">
-            <a:avLst>
-              <a:gd name="adj" fmla="val 12000"/>
-            </a:avLst>
-          </a:prstGeom>
-          <a:solidFill>
-            <a:srgbClr val="EEF2FF"/>
-          </a:solidFill>
-          <a:ln w="12700">
-            <a:solidFill>
-              <a:srgbClr val="6366F1"/>
-            </a:solidFill>
-            <a:prstDash val="solid"/>
-          </a:ln>
-          <a:effectLst>
-            <a:outerShdw sx="100000" sy="100000" kx="0" ky="0" algn="bl" rotWithShape="0" blurRad="101600" dist="38100" dir="8100000">
-              <a:srgbClr val="000000">
-                <a:alpha val="12000"/>
-              </a:srgbClr>
-            </a:outerShdw>
-          </a:effectLst>
-        </p:spPr>
-      </p:sp>
-      <p:sp>
-        <p:nvSpPr>
-          <p:cNvPr id="36" name="Text 34"/>
-          <p:cNvSpPr/>
-          <p:nvPr/>
-        </p:nvSpPr>
-        <p:spPr>
-          <a:xfrm>
-            <a:off x="365760" y="4370832"/>
-            <a:ext cx="2011680" cy="457200"/>
-          </a:xfrm>
-          <a:prstGeom prst="rect">
-            <a:avLst/>
-          </a:prstGeom>
-          <a:noFill/>
-          <a:ln/>
-        </p:spPr>
-        <p:txBody>
-          <a:bodyPr wrap="square" lIns="0" tIns="0" rIns="0" bIns="0" rtlCol="0" anchor="ctr"/>
-          <a:lstStyle/>
-          <a:p>
-            <a:pPr algn="ctr" indent="0" marL="0">
-              <a:buNone/>
-            </a:pPr>
-            <a:r>
-              <a:rPr lang="en-US" sz="1200" b="1" dirty="0">
-                <a:solidFill>
-                  <a:srgbClr val="4338CA"/>
-                </a:solidFill>
-                <a:latin typeface="Trebuchet MS" pitchFamily="34" charset="0"/>
-                <a:ea typeface="Trebuchet MS" pitchFamily="34" charset="-122"/>
-                <a:cs typeface="Trebuchet MS" pitchFamily="34" charset="-120"/>
-              </a:rPr>
-              <a:t>slowly</a:t>
-            </a:r>
-            <a:endParaRPr lang="en-US" sz="1200" dirty="0"/>
-          </a:p>
-        </p:txBody>
-      </p:sp>
-      <p:sp>
-        <p:nvSpPr>
-          <p:cNvPr id="37" name="Shape 35"/>
-          <p:cNvSpPr/>
-          <p:nvPr/>
-        </p:nvSpPr>
-        <p:spPr>
-          <a:xfrm>
-            <a:off x="2514600" y="4370832"/>
-            <a:ext cx="6263640" cy="457200"/>
-          </a:xfrm>
-          <a:prstGeom prst="rect">
-            <a:avLst>
-              <a:gd name="adj" fmla="val 12000"/>
-            </a:avLst>
-          </a:prstGeom>
-          <a:solidFill>
-            <a:srgbClr val="F8FAFC"/>
-          </a:solidFill>
-          <a:ln w="12700">
-            <a:solidFill>
-              <a:srgbClr val="E2E8F0"/>
-            </a:solidFill>
-            <a:prstDash val="solid"/>
-          </a:ln>
-        </p:spPr>
-      </p:sp>
-      <p:sp>
-        <p:nvSpPr>
-          <p:cNvPr id="38" name="Text 36"/>
-          <p:cNvSpPr/>
-          <p:nvPr/>
-        </p:nvSpPr>
-        <p:spPr>
-          <a:xfrm>
-            <a:off x="2651760" y="4370832"/>
-            <a:ext cx="6035040" cy="457200"/>
-          </a:xfrm>
-          <a:prstGeom prst="rect">
-            <a:avLst/>
-          </a:prstGeom>
-          <a:noFill/>
-          <a:ln/>
-        </p:spPr>
-        <p:txBody>
-          <a:bodyPr wrap="square" rtlCol="0" anchor="ctr"/>
-          <a:lstStyle/>
-          <a:p>
-            <a:pPr algn="l" indent="0" marL="0">
-              <a:buNone/>
-            </a:pPr>
-            <a:r>
-              <a:rPr lang="en-US" sz="1200" dirty="0">
-                <a:solidFill>
-                  <a:srgbClr val="0F172A"/>
-                </a:solidFill>
-                <a:latin typeface="Calibri" pitchFamily="34" charset="0"/>
-                <a:ea typeface="Calibri" pitchFamily="34" charset="-122"/>
-                <a:cs typeface="Calibri" pitchFamily="34" charset="-120"/>
-              </a:rPr>
-              <a:t>The quality of not being fast; the state of moving or doing things slowly.</a:t>
+              <a:t>not moving or happening quickly</a:t>
             </a:r>
             <a:endParaRPr lang="en-US" sz="1200" dirty="0"/>
           </a:p>
@@ -39982,7 +38617,7 @@
                 <a:ea typeface="Calibri" pitchFamily="34" charset="-122"/>
                 <a:cs typeface="Calibri" pitchFamily="34" charset="-120"/>
               </a:rPr>
-              <a:t>Word Labs  •  wordlabs.app  •  Root: 'slow' = not fast, moving carefully</a:t>
+              <a:t>Word Labs  •  wordlabs.app  •  Root: 'slow' = not fast</a:t>
             </a:r>
             <a:endParaRPr lang="en-US" sz="800" dirty="0"/>
           </a:p>
@@ -40185,7 +38820,7 @@
                 <a:ea typeface="Calibri" pitchFamily="34" charset="-122"/>
                 <a:cs typeface="Calibri" pitchFamily="34" charset="-120"/>
               </a:rPr>
-              <a:t>The turtle moved slowly across the warm sand towards the ocean.</a:t>
+              <a:t>The turtle moved at a slow pace across the garden.</a:t>
             </a:r>
             <a:endParaRPr lang="en-US" sz="1500" dirty="0"/>
           </a:p>
@@ -40349,7 +38984,7 @@
                 <a:ea typeface="Calibri" pitchFamily="34" charset="-122"/>
                 <a:cs typeface="Calibri" pitchFamily="34" charset="-120"/>
               </a:rPr>
-              <a:t>The slowness of the traffic made us late for the school assembly.</a:t>
+              <a:t>The car slowed as it approached the red light.</a:t>
             </a:r>
             <a:endParaRPr lang="en-US" sz="1500" dirty="0"/>
           </a:p>
@@ -40513,7 +39148,7 @@
                 <a:ea typeface="Calibri" pitchFamily="34" charset="-122"/>
                 <a:cs typeface="Calibri" pitchFamily="34" charset="-120"/>
               </a:rPr>
-              <a:t>She was the slowest runner in the race, but she never gave up.</a:t>
+              <a:t>The snail was much slower than the rabbit.</a:t>
             </a:r>
             <a:endParaRPr lang="en-US" sz="1500" dirty="0"/>
           </a:p>
